--- a/figures/figure_03.pptx
+++ b/figures/figure_03.pptx
@@ -2,12 +2,12 @@
 <file path=ppt/presentation.xml><?xml version="1.0" encoding="utf-8"?>
 <p:presentation xmlns:a="http://schemas.openxmlformats.org/drawingml/2006/main" xmlns:r="http://schemas.openxmlformats.org/officeDocument/2006/relationships" xmlns:p="http://schemas.openxmlformats.org/presentationml/2006/main" saveSubsetFonts="1">
   <p:sldMasterIdLst>
-    <p:sldMasterId id="2147483672" r:id="rId1"/>
+    <p:sldMasterId id="2147483708" r:id="rId1"/>
   </p:sldMasterIdLst>
   <p:sldIdLst>
     <p:sldId id="256" r:id="rId2"/>
   </p:sldIdLst>
-  <p:sldSz cx="4572000" cy="5029200"/>
+  <p:sldSz cx="4727575" cy="5121275"/>
   <p:notesSz cx="6858000" cy="9144000"/>
   <p:defaultTextStyle>
     <a:defPPr>
@@ -112,47 +112,255 @@
 </p:presentation>
 </file>
 
+<file path=ppt/revisionInfo.xml><?xml version="1.0" encoding="utf-8"?>
+<p1510:revInfo xmlns:a="http://schemas.openxmlformats.org/drawingml/2006/main" xmlns:r="http://schemas.openxmlformats.org/officeDocument/2006/relationships" xmlns:p1510="http://schemas.microsoft.com/office/powerpoint/2015/10/main">
+  <p1510:revLst>
+    <p1510:client id="{164736B1-AEA3-43F6-A0BD-7FCAC001A7D4}" v="19" dt="2026-09-03T17:40:30.845"/>
+  </p1510:revLst>
+</p1510:revInfo>
+</file>
+
 <file path=ppt/changesInfos/changesInfo1.xml><?xml version="1.0" encoding="utf-8"?>
 <pc:chgInfo xmlns:a="http://schemas.openxmlformats.org/drawingml/2006/main" xmlns:r="http://schemas.openxmlformats.org/officeDocument/2006/relationships" xmlns:ac="http://schemas.microsoft.com/office/drawing/2013/main/command" xmlns:pc="http://schemas.microsoft.com/office/powerpoint/2013/main/command">
   <pc:docChgLst>
     <pc:chgData name="Gilbert, Neil" userId="37be9f5c-8f28-415b-96d6-624acf93bb3f" providerId="ADAL" clId="{18ED56B6-1921-416C-9A28-3F6F3C8390B5}"/>
-    <pc:docChg chg="undo custSel modSld">
-      <pc:chgData name="Gilbert, Neil" userId="37be9f5c-8f28-415b-96d6-624acf93bb3f" providerId="ADAL" clId="{18ED56B6-1921-416C-9A28-3F6F3C8390B5}" dt="2026-08-12T16:30:27.147" v="50" actId="692"/>
+    <pc:docChg chg="undo custSel modSld modMainMaster">
+      <pc:chgData name="Gilbert, Neil" userId="37be9f5c-8f28-415b-96d6-624acf93bb3f" providerId="ADAL" clId="{18ED56B6-1921-416C-9A28-3F6F3C8390B5}" dt="2026-09-03T17:40:30.845" v="183"/>
       <pc:docMkLst>
         <pc:docMk/>
       </pc:docMkLst>
       <pc:sldChg chg="addSp delSp modSp mod">
-        <pc:chgData name="Gilbert, Neil" userId="37be9f5c-8f28-415b-96d6-624acf93bb3f" providerId="ADAL" clId="{18ED56B6-1921-416C-9A28-3F6F3C8390B5}" dt="2026-08-12T16:30:27.147" v="50" actId="692"/>
+        <pc:chgData name="Gilbert, Neil" userId="37be9f5c-8f28-415b-96d6-624acf93bb3f" providerId="ADAL" clId="{18ED56B6-1921-416C-9A28-3F6F3C8390B5}" dt="2026-09-03T17:40:30.845" v="183"/>
         <pc:sldMkLst>
           <pc:docMk/>
           <pc:sldMk cId="2165203398" sldId="256"/>
         </pc:sldMkLst>
         <pc:spChg chg="add mod">
-          <ac:chgData name="Gilbert, Neil" userId="37be9f5c-8f28-415b-96d6-624acf93bb3f" providerId="ADAL" clId="{18ED56B6-1921-416C-9A28-3F6F3C8390B5}" dt="2026-08-12T16:30:27.147" v="50" actId="692"/>
+          <ac:chgData name="Gilbert, Neil" userId="37be9f5c-8f28-415b-96d6-624acf93bb3f" providerId="ADAL" clId="{18ED56B6-1921-416C-9A28-3F6F3C8390B5}" dt="2026-09-03T17:33:22.915" v="149" actId="164"/>
           <ac:spMkLst>
             <pc:docMk/>
             <pc:sldMk cId="2165203398" sldId="256"/>
             <ac:spMk id="4" creationId="{D3A2D6DF-710B-3720-4C6D-BFC2B82C70D8}"/>
           </ac:spMkLst>
         </pc:spChg>
-        <pc:spChg chg="mod">
-          <ac:chgData name="Gilbert, Neil" userId="37be9f5c-8f28-415b-96d6-624acf93bb3f" providerId="ADAL" clId="{18ED56B6-1921-416C-9A28-3F6F3C8390B5}" dt="2026-08-12T16:28:05.293" v="20" actId="1076"/>
+        <pc:spChg chg="add del">
+          <ac:chgData name="Gilbert, Neil" userId="37be9f5c-8f28-415b-96d6-624acf93bb3f" providerId="ADAL" clId="{18ED56B6-1921-416C-9A28-3F6F3C8390B5}" dt="2026-09-03T17:25:47.508" v="61" actId="478"/>
+          <ac:spMkLst>
+            <pc:docMk/>
+            <pc:sldMk cId="2165203398" sldId="256"/>
+            <ac:spMk id="6" creationId="{10CABF02-8E9E-B111-92A7-F871C6F3077C}"/>
+          </ac:spMkLst>
+        </pc:spChg>
+        <pc:spChg chg="add mod ord">
+          <ac:chgData name="Gilbert, Neil" userId="37be9f5c-8f28-415b-96d6-624acf93bb3f" providerId="ADAL" clId="{18ED56B6-1921-416C-9A28-3F6F3C8390B5}" dt="2026-09-03T17:28:51.326" v="107" actId="164"/>
+          <ac:spMkLst>
+            <pc:docMk/>
+            <pc:sldMk cId="2165203398" sldId="256"/>
+            <ac:spMk id="10" creationId="{B1B04EBE-5177-3EF3-22C1-E20EB28AD32E}"/>
+          </ac:spMkLst>
+        </pc:spChg>
+        <pc:spChg chg="add mod ord">
+          <ac:chgData name="Gilbert, Neil" userId="37be9f5c-8f28-415b-96d6-624acf93bb3f" providerId="ADAL" clId="{18ED56B6-1921-416C-9A28-3F6F3C8390B5}" dt="2026-09-03T17:33:22.915" v="149" actId="164"/>
+          <ac:spMkLst>
+            <pc:docMk/>
+            <pc:sldMk cId="2165203398" sldId="256"/>
+            <ac:spMk id="13" creationId="{B52204DB-5774-19B6-A456-A966CE855586}"/>
+          </ac:spMkLst>
+        </pc:spChg>
+        <pc:spChg chg="add mod">
+          <ac:chgData name="Gilbert, Neil" userId="37be9f5c-8f28-415b-96d6-624acf93bb3f" providerId="ADAL" clId="{18ED56B6-1921-416C-9A28-3F6F3C8390B5}" dt="2026-09-03T17:34:52.607" v="154" actId="14100"/>
+          <ac:spMkLst>
+            <pc:docMk/>
+            <pc:sldMk cId="2165203398" sldId="256"/>
+            <ac:spMk id="15" creationId="{8E296CFF-F3FA-663B-CD2D-EFB2E0DD3E23}"/>
+          </ac:spMkLst>
+        </pc:spChg>
+        <pc:spChg chg="mod">
+          <ac:chgData name="Gilbert, Neil" userId="37be9f5c-8f28-415b-96d6-624acf93bb3f" providerId="ADAL" clId="{18ED56B6-1921-416C-9A28-3F6F3C8390B5}" dt="2026-09-03T17:33:25.739" v="151"/>
+          <ac:spMkLst>
+            <pc:docMk/>
+            <pc:sldMk cId="2165203398" sldId="256"/>
+            <ac:spMk id="20" creationId="{B52204DB-5774-19B6-A456-A966CE855586}"/>
+          </ac:spMkLst>
+        </pc:spChg>
+        <pc:spChg chg="mod">
+          <ac:chgData name="Gilbert, Neil" userId="37be9f5c-8f28-415b-96d6-624acf93bb3f" providerId="ADAL" clId="{18ED56B6-1921-416C-9A28-3F6F3C8390B5}" dt="2026-09-03T17:33:25.739" v="151"/>
+          <ac:spMkLst>
+            <pc:docMk/>
+            <pc:sldMk cId="2165203398" sldId="256"/>
+            <ac:spMk id="23" creationId="{BCD3D06E-CC25-1B46-9A17-26CAF8C93CF0}"/>
+          </ac:spMkLst>
+        </pc:spChg>
+        <pc:spChg chg="mod">
+          <ac:chgData name="Gilbert, Neil" userId="37be9f5c-8f28-415b-96d6-624acf93bb3f" providerId="ADAL" clId="{18ED56B6-1921-416C-9A28-3F6F3C8390B5}" dt="2026-09-03T17:33:25.739" v="151"/>
+          <ac:spMkLst>
+            <pc:docMk/>
+            <pc:sldMk cId="2165203398" sldId="256"/>
+            <ac:spMk id="24" creationId="{D3A2D6DF-710B-3720-4C6D-BFC2B82C70D8}"/>
+          </ac:spMkLst>
+        </pc:spChg>
+        <pc:spChg chg="mod">
+          <ac:chgData name="Gilbert, Neil" userId="37be9f5c-8f28-415b-96d6-624acf93bb3f" providerId="ADAL" clId="{18ED56B6-1921-416C-9A28-3F6F3C8390B5}" dt="2026-09-03T17:33:25.739" v="151"/>
+          <ac:spMkLst>
+            <pc:docMk/>
+            <pc:sldMk cId="2165203398" sldId="256"/>
+            <ac:spMk id="26" creationId="{B1B04EBE-5177-3EF3-22C1-E20EB28AD32E}"/>
+          </ac:spMkLst>
+        </pc:spChg>
+        <pc:spChg chg="mod">
+          <ac:chgData name="Gilbert, Neil" userId="37be9f5c-8f28-415b-96d6-624acf93bb3f" providerId="ADAL" clId="{18ED56B6-1921-416C-9A28-3F6F3C8390B5}" dt="2026-09-03T17:33:25.739" v="151"/>
+          <ac:spMkLst>
+            <pc:docMk/>
+            <pc:sldMk cId="2165203398" sldId="256"/>
+            <ac:spMk id="27" creationId="{9BD73756-49EC-4CB5-0C3A-7D0370512674}"/>
+          </ac:spMkLst>
+        </pc:spChg>
+        <pc:spChg chg="mod">
+          <ac:chgData name="Gilbert, Neil" userId="37be9f5c-8f28-415b-96d6-624acf93bb3f" providerId="ADAL" clId="{18ED56B6-1921-416C-9A28-3F6F3C8390B5}" dt="2026-09-03T17:33:25.739" v="151"/>
+          <ac:spMkLst>
+            <pc:docMk/>
+            <pc:sldMk cId="2165203398" sldId="256"/>
+            <ac:spMk id="30" creationId="{46B984FC-6679-16BA-F998-6047C13CC4EA}"/>
+          </ac:spMkLst>
+        </pc:spChg>
+        <pc:spChg chg="mod">
+          <ac:chgData name="Gilbert, Neil" userId="37be9f5c-8f28-415b-96d6-624acf93bb3f" providerId="ADAL" clId="{18ED56B6-1921-416C-9A28-3F6F3C8390B5}" dt="2026-09-03T17:33:25.739" v="151"/>
+          <ac:spMkLst>
+            <pc:docMk/>
+            <pc:sldMk cId="2165203398" sldId="256"/>
+            <ac:spMk id="33" creationId="{BD19C6D8-BAA8-0600-F916-9455C8E77F38}"/>
+          </ac:spMkLst>
+        </pc:spChg>
+        <pc:spChg chg="mod">
+          <ac:chgData name="Gilbert, Neil" userId="37be9f5c-8f28-415b-96d6-624acf93bb3f" providerId="ADAL" clId="{18ED56B6-1921-416C-9A28-3F6F3C8390B5}" dt="2026-09-03T17:33:25.739" v="151"/>
+          <ac:spMkLst>
+            <pc:docMk/>
+            <pc:sldMk cId="2165203398" sldId="256"/>
+            <ac:spMk id="36" creationId="{99F67F2C-5E11-C4CF-9D29-FC2BFC11A0CC}"/>
+          </ac:spMkLst>
+        </pc:spChg>
+        <pc:spChg chg="mod">
+          <ac:chgData name="Gilbert, Neil" userId="37be9f5c-8f28-415b-96d6-624acf93bb3f" providerId="ADAL" clId="{18ED56B6-1921-416C-9A28-3F6F3C8390B5}" dt="2026-09-03T17:33:25.739" v="151"/>
+          <ac:spMkLst>
+            <pc:docMk/>
+            <pc:sldMk cId="2165203398" sldId="256"/>
+            <ac:spMk id="38" creationId="{98D05FE3-5A7E-3100-EF73-242D8696E482}"/>
+          </ac:spMkLst>
+        </pc:spChg>
+        <pc:spChg chg="mod">
+          <ac:chgData name="Gilbert, Neil" userId="37be9f5c-8f28-415b-96d6-624acf93bb3f" providerId="ADAL" clId="{18ED56B6-1921-416C-9A28-3F6F3C8390B5}" dt="2026-09-03T17:36:24.190" v="165"/>
+          <ac:spMkLst>
+            <pc:docMk/>
+            <pc:sldMk cId="2165203398" sldId="256"/>
+            <ac:spMk id="42" creationId="{0E21E371-FCDF-D6DD-1C98-E7F1F5A31D7A}"/>
+          </ac:spMkLst>
+        </pc:spChg>
+        <pc:spChg chg="mod">
+          <ac:chgData name="Gilbert, Neil" userId="37be9f5c-8f28-415b-96d6-624acf93bb3f" providerId="ADAL" clId="{18ED56B6-1921-416C-9A28-3F6F3C8390B5}" dt="2026-09-03T17:36:24.190" v="165"/>
+          <ac:spMkLst>
+            <pc:docMk/>
+            <pc:sldMk cId="2165203398" sldId="256"/>
+            <ac:spMk id="43" creationId="{FA78D632-3EF5-EEF3-7773-0DBAF07DFB00}"/>
+          </ac:spMkLst>
+        </pc:spChg>
+        <pc:spChg chg="mod">
+          <ac:chgData name="Gilbert, Neil" userId="37be9f5c-8f28-415b-96d6-624acf93bb3f" providerId="ADAL" clId="{18ED56B6-1921-416C-9A28-3F6F3C8390B5}" dt="2026-09-03T17:36:24.190" v="165"/>
+          <ac:spMkLst>
+            <pc:docMk/>
+            <pc:sldMk cId="2165203398" sldId="256"/>
+            <ac:spMk id="44" creationId="{7CBB6A18-4C62-1FE0-A525-041D9CDDC471}"/>
+          </ac:spMkLst>
+        </pc:spChg>
+        <pc:spChg chg="mod">
+          <ac:chgData name="Gilbert, Neil" userId="37be9f5c-8f28-415b-96d6-624acf93bb3f" providerId="ADAL" clId="{18ED56B6-1921-416C-9A28-3F6F3C8390B5}" dt="2026-09-03T17:36:24.190" v="165"/>
+          <ac:spMkLst>
+            <pc:docMk/>
+            <pc:sldMk cId="2165203398" sldId="256"/>
+            <ac:spMk id="45" creationId="{088BCC8B-8957-7602-4A3E-ED17B6473B46}"/>
+          </ac:spMkLst>
+        </pc:spChg>
+        <pc:spChg chg="mod">
+          <ac:chgData name="Gilbert, Neil" userId="37be9f5c-8f28-415b-96d6-624acf93bb3f" providerId="ADAL" clId="{18ED56B6-1921-416C-9A28-3F6F3C8390B5}" dt="2026-09-03T17:36:24.190" v="165"/>
+          <ac:spMkLst>
+            <pc:docMk/>
+            <pc:sldMk cId="2165203398" sldId="256"/>
+            <ac:spMk id="46" creationId="{A61FF6A6-BDBA-7AD6-9D62-AD260FCC2F75}"/>
+          </ac:spMkLst>
+        </pc:spChg>
+        <pc:spChg chg="mod">
+          <ac:chgData name="Gilbert, Neil" userId="37be9f5c-8f28-415b-96d6-624acf93bb3f" providerId="ADAL" clId="{18ED56B6-1921-416C-9A28-3F6F3C8390B5}" dt="2026-09-03T17:36:24.190" v="165"/>
+          <ac:spMkLst>
+            <pc:docMk/>
+            <pc:sldMk cId="2165203398" sldId="256"/>
+            <ac:spMk id="53" creationId="{D3A2D6DF-710B-3720-4C6D-BFC2B82C70D8}"/>
+          </ac:spMkLst>
+        </pc:spChg>
+        <pc:spChg chg="mod">
+          <ac:chgData name="Gilbert, Neil" userId="37be9f5c-8f28-415b-96d6-624acf93bb3f" providerId="ADAL" clId="{18ED56B6-1921-416C-9A28-3F6F3C8390B5}" dt="2026-09-03T17:36:24.190" v="165"/>
+          <ac:spMkLst>
+            <pc:docMk/>
+            <pc:sldMk cId="2165203398" sldId="256"/>
+            <ac:spMk id="56" creationId="{9BD73756-49EC-4CB5-0C3A-7D0370512674}"/>
+          </ac:spMkLst>
+        </pc:spChg>
+        <pc:spChg chg="mod topLvl">
+          <ac:chgData name="Gilbert, Neil" userId="37be9f5c-8f28-415b-96d6-624acf93bb3f" providerId="ADAL" clId="{18ED56B6-1921-416C-9A28-3F6F3C8390B5}" dt="2026-09-03T17:36:03.227" v="163" actId="164"/>
+          <ac:spMkLst>
+            <pc:docMk/>
+            <pc:sldMk cId="2165203398" sldId="256"/>
+            <ac:spMk id="65" creationId="{0E21E371-FCDF-D6DD-1C98-E7F1F5A31D7A}"/>
+          </ac:spMkLst>
+        </pc:spChg>
+        <pc:spChg chg="mod topLvl">
+          <ac:chgData name="Gilbert, Neil" userId="37be9f5c-8f28-415b-96d6-624acf93bb3f" providerId="ADAL" clId="{18ED56B6-1921-416C-9A28-3F6F3C8390B5}" dt="2026-09-03T17:36:03.227" v="163" actId="164"/>
+          <ac:spMkLst>
+            <pc:docMk/>
+            <pc:sldMk cId="2165203398" sldId="256"/>
+            <ac:spMk id="66" creationId="{FA78D632-3EF5-EEF3-7773-0DBAF07DFB00}"/>
+          </ac:spMkLst>
+        </pc:spChg>
+        <pc:spChg chg="mod topLvl">
+          <ac:chgData name="Gilbert, Neil" userId="37be9f5c-8f28-415b-96d6-624acf93bb3f" providerId="ADAL" clId="{18ED56B6-1921-416C-9A28-3F6F3C8390B5}" dt="2026-09-03T17:36:03.227" v="163" actId="164"/>
           <ac:spMkLst>
             <pc:docMk/>
             <pc:sldMk cId="2165203398" sldId="256"/>
             <ac:spMk id="67" creationId="{7CBB6A18-4C62-1FE0-A525-041D9CDDC471}"/>
           </ac:spMkLst>
         </pc:spChg>
-        <pc:spChg chg="mod">
-          <ac:chgData name="Gilbert, Neil" userId="37be9f5c-8f28-415b-96d6-624acf93bb3f" providerId="ADAL" clId="{18ED56B6-1921-416C-9A28-3F6F3C8390B5}" dt="2026-08-12T16:28:02.881" v="19" actId="1076"/>
+        <pc:spChg chg="mod topLvl">
+          <ac:chgData name="Gilbert, Neil" userId="37be9f5c-8f28-415b-96d6-624acf93bb3f" providerId="ADAL" clId="{18ED56B6-1921-416C-9A28-3F6F3C8390B5}" dt="2026-09-03T17:36:03.227" v="163" actId="164"/>
           <ac:spMkLst>
             <pc:docMk/>
             <pc:sldMk cId="2165203398" sldId="256"/>
             <ac:spMk id="68" creationId="{088BCC8B-8957-7602-4A3E-ED17B6473B46}"/>
           </ac:spMkLst>
         </pc:spChg>
-        <pc:spChg chg="mod">
-          <ac:chgData name="Gilbert, Neil" userId="37be9f5c-8f28-415b-96d6-624acf93bb3f" providerId="ADAL" clId="{18ED56B6-1921-416C-9A28-3F6F3C8390B5}" dt="2026-08-12T16:28:56.613" v="26" actId="14100"/>
+        <pc:spChg chg="mod topLvl">
+          <ac:chgData name="Gilbert, Neil" userId="37be9f5c-8f28-415b-96d6-624acf93bb3f" providerId="ADAL" clId="{18ED56B6-1921-416C-9A28-3F6F3C8390B5}" dt="2026-09-03T17:28:51.326" v="107" actId="164"/>
+          <ac:spMkLst>
+            <pc:docMk/>
+            <pc:sldMk cId="2165203398" sldId="256"/>
+            <ac:spMk id="69" creationId="{9BD73756-49EC-4CB5-0C3A-7D0370512674}"/>
+          </ac:spMkLst>
+        </pc:spChg>
+        <pc:spChg chg="mod topLvl">
+          <ac:chgData name="Gilbert, Neil" userId="37be9f5c-8f28-415b-96d6-624acf93bb3f" providerId="ADAL" clId="{18ED56B6-1921-416C-9A28-3F6F3C8390B5}" dt="2026-09-03T17:33:22.915" v="149" actId="164"/>
+          <ac:spMkLst>
+            <pc:docMk/>
+            <pc:sldMk cId="2165203398" sldId="256"/>
+            <ac:spMk id="70" creationId="{BCD3D06E-CC25-1B46-9A17-26CAF8C93CF0}"/>
+          </ac:spMkLst>
+        </pc:spChg>
+        <pc:spChg chg="mod topLvl">
+          <ac:chgData name="Gilbert, Neil" userId="37be9f5c-8f28-415b-96d6-624acf93bb3f" providerId="ADAL" clId="{18ED56B6-1921-416C-9A28-3F6F3C8390B5}" dt="2026-09-03T17:36:03.227" v="163" actId="164"/>
+          <ac:spMkLst>
+            <pc:docMk/>
+            <pc:sldMk cId="2165203398" sldId="256"/>
+            <ac:spMk id="71" creationId="{A61FF6A6-BDBA-7AD6-9D62-AD260FCC2F75}"/>
+          </ac:spMkLst>
+        </pc:spChg>
+        <pc:spChg chg="mod">
+          <ac:chgData name="Gilbert, Neil" userId="37be9f5c-8f28-415b-96d6-624acf93bb3f" providerId="ADAL" clId="{18ED56B6-1921-416C-9A28-3F6F3C8390B5}" dt="2026-09-03T17:31:25.783" v="123" actId="1076"/>
           <ac:spMkLst>
             <pc:docMk/>
             <pc:sldMk cId="2165203398" sldId="256"/>
@@ -160,46 +368,824 @@
           </ac:spMkLst>
         </pc:spChg>
         <pc:spChg chg="mod">
-          <ac:chgData name="Gilbert, Neil" userId="37be9f5c-8f28-415b-96d6-624acf93bb3f" providerId="ADAL" clId="{18ED56B6-1921-416C-9A28-3F6F3C8390B5}" dt="2026-08-12T16:29:55.800" v="46" actId="1076"/>
+          <ac:chgData name="Gilbert, Neil" userId="37be9f5c-8f28-415b-96d6-624acf93bb3f" providerId="ADAL" clId="{18ED56B6-1921-416C-9A28-3F6F3C8390B5}" dt="2026-09-03T17:31:33.466" v="125" actId="1076"/>
           <ac:spMkLst>
             <pc:docMk/>
             <pc:sldMk cId="2165203398" sldId="256"/>
             <ac:spMk id="75" creationId="{98D05FE3-5A7E-3100-EF73-242D8696E482}"/>
           </ac:spMkLst>
         </pc:spChg>
+        <pc:spChg chg="mod">
+          <ac:chgData name="Gilbert, Neil" userId="37be9f5c-8f28-415b-96d6-624acf93bb3f" providerId="ADAL" clId="{18ED56B6-1921-416C-9A28-3F6F3C8390B5}" dt="2026-09-03T17:26:38.079" v="73" actId="165"/>
+          <ac:spMkLst>
+            <pc:docMk/>
+            <pc:sldMk cId="2165203398" sldId="256"/>
+            <ac:spMk id="79" creationId="{46B984FC-6679-16BA-F998-6047C13CC4EA}"/>
+          </ac:spMkLst>
+        </pc:spChg>
+        <pc:spChg chg="mod">
+          <ac:chgData name="Gilbert, Neil" userId="37be9f5c-8f28-415b-96d6-624acf93bb3f" providerId="ADAL" clId="{18ED56B6-1921-416C-9A28-3F6F3C8390B5}" dt="2026-09-03T17:36:24.190" v="165"/>
+          <ac:spMkLst>
+            <pc:docMk/>
+            <pc:sldMk cId="2165203398" sldId="256"/>
+            <ac:spMk id="87" creationId="{99F67F2C-5E11-C4CF-9D29-FC2BFC11A0CC}"/>
+          </ac:spMkLst>
+        </pc:spChg>
+        <pc:spChg chg="mod">
+          <ac:chgData name="Gilbert, Neil" userId="37be9f5c-8f28-415b-96d6-624acf93bb3f" providerId="ADAL" clId="{18ED56B6-1921-416C-9A28-3F6F3C8390B5}" dt="2026-09-03T17:36:24.190" v="165"/>
+          <ac:spMkLst>
+            <pc:docMk/>
+            <pc:sldMk cId="2165203398" sldId="256"/>
+            <ac:spMk id="89" creationId="{98D05FE3-5A7E-3100-EF73-242D8696E482}"/>
+          </ac:spMkLst>
+        </pc:spChg>
+        <pc:spChg chg="mod">
+          <ac:chgData name="Gilbert, Neil" userId="37be9f5c-8f28-415b-96d6-624acf93bb3f" providerId="ADAL" clId="{18ED56B6-1921-416C-9A28-3F6F3C8390B5}" dt="2026-09-03T17:36:24.190" v="165"/>
+          <ac:spMkLst>
+            <pc:docMk/>
+            <pc:sldMk cId="2165203398" sldId="256"/>
+            <ac:spMk id="91" creationId="{8E296CFF-F3FA-663B-CD2D-EFB2E0DD3E23}"/>
+          </ac:spMkLst>
+        </pc:spChg>
+        <pc:spChg chg="mod">
+          <ac:chgData name="Gilbert, Neil" userId="37be9f5c-8f28-415b-96d6-624acf93bb3f" providerId="ADAL" clId="{18ED56B6-1921-416C-9A28-3F6F3C8390B5}" dt="2026-09-03T17:37:04.851" v="168" actId="113"/>
+          <ac:spMkLst>
+            <pc:docMk/>
+            <pc:sldMk cId="2165203398" sldId="256"/>
+            <ac:spMk id="94" creationId="{0E21E371-FCDF-D6DD-1C98-E7F1F5A31D7A}"/>
+          </ac:spMkLst>
+        </pc:spChg>
+        <pc:spChg chg="mod">
+          <ac:chgData name="Gilbert, Neil" userId="37be9f5c-8f28-415b-96d6-624acf93bb3f" providerId="ADAL" clId="{18ED56B6-1921-416C-9A28-3F6F3C8390B5}" dt="2026-09-03T17:37:04.851" v="168" actId="113"/>
+          <ac:spMkLst>
+            <pc:docMk/>
+            <pc:sldMk cId="2165203398" sldId="256"/>
+            <ac:spMk id="95" creationId="{FA78D632-3EF5-EEF3-7773-0DBAF07DFB00}"/>
+          </ac:spMkLst>
+        </pc:spChg>
+        <pc:spChg chg="mod">
+          <ac:chgData name="Gilbert, Neil" userId="37be9f5c-8f28-415b-96d6-624acf93bb3f" providerId="ADAL" clId="{18ED56B6-1921-416C-9A28-3F6F3C8390B5}" dt="2026-09-03T17:37:04.851" v="168" actId="113"/>
+          <ac:spMkLst>
+            <pc:docMk/>
+            <pc:sldMk cId="2165203398" sldId="256"/>
+            <ac:spMk id="96" creationId="{7CBB6A18-4C62-1FE0-A525-041D9CDDC471}"/>
+          </ac:spMkLst>
+        </pc:spChg>
+        <pc:spChg chg="mod">
+          <ac:chgData name="Gilbert, Neil" userId="37be9f5c-8f28-415b-96d6-624acf93bb3f" providerId="ADAL" clId="{18ED56B6-1921-416C-9A28-3F6F3C8390B5}" dt="2026-09-03T17:37:04.851" v="168" actId="113"/>
+          <ac:spMkLst>
+            <pc:docMk/>
+            <pc:sldMk cId="2165203398" sldId="256"/>
+            <ac:spMk id="98" creationId="{A61FF6A6-BDBA-7AD6-9D62-AD260FCC2F75}"/>
+          </ac:spMkLst>
+        </pc:spChg>
+        <pc:spChg chg="mod">
+          <ac:chgData name="Gilbert, Neil" userId="37be9f5c-8f28-415b-96d6-624acf93bb3f" providerId="ADAL" clId="{18ED56B6-1921-416C-9A28-3F6F3C8390B5}" dt="2026-09-03T17:37:04.851" v="168" actId="113"/>
+          <ac:spMkLst>
+            <pc:docMk/>
+            <pc:sldMk cId="2165203398" sldId="256"/>
+            <ac:spMk id="101" creationId="{B52204DB-5774-19B6-A456-A966CE855586}"/>
+          </ac:spMkLst>
+        </pc:spChg>
+        <pc:spChg chg="mod">
+          <ac:chgData name="Gilbert, Neil" userId="37be9f5c-8f28-415b-96d6-624acf93bb3f" providerId="ADAL" clId="{18ED56B6-1921-416C-9A28-3F6F3C8390B5}" dt="2026-09-03T17:37:04.851" v="168" actId="113"/>
+          <ac:spMkLst>
+            <pc:docMk/>
+            <pc:sldMk cId="2165203398" sldId="256"/>
+            <ac:spMk id="104" creationId="{BCD3D06E-CC25-1B46-9A17-26CAF8C93CF0}"/>
+          </ac:spMkLst>
+        </pc:spChg>
+        <pc:spChg chg="mod">
+          <ac:chgData name="Gilbert, Neil" userId="37be9f5c-8f28-415b-96d6-624acf93bb3f" providerId="ADAL" clId="{18ED56B6-1921-416C-9A28-3F6F3C8390B5}" dt="2026-09-03T17:37:04.851" v="168" actId="113"/>
+          <ac:spMkLst>
+            <pc:docMk/>
+            <pc:sldMk cId="2165203398" sldId="256"/>
+            <ac:spMk id="105" creationId="{D3A2D6DF-710B-3720-4C6D-BFC2B82C70D8}"/>
+          </ac:spMkLst>
+        </pc:spChg>
+        <pc:spChg chg="mod">
+          <ac:chgData name="Gilbert, Neil" userId="37be9f5c-8f28-415b-96d6-624acf93bb3f" providerId="ADAL" clId="{18ED56B6-1921-416C-9A28-3F6F3C8390B5}" dt="2026-09-03T17:37:04.851" v="168" actId="113"/>
+          <ac:spMkLst>
+            <pc:docMk/>
+            <pc:sldMk cId="2165203398" sldId="256"/>
+            <ac:spMk id="108" creationId="{9BD73756-49EC-4CB5-0C3A-7D0370512674}"/>
+          </ac:spMkLst>
+        </pc:spChg>
+        <pc:spChg chg="mod">
+          <ac:chgData name="Gilbert, Neil" userId="37be9f5c-8f28-415b-96d6-624acf93bb3f" providerId="ADAL" clId="{18ED56B6-1921-416C-9A28-3F6F3C8390B5}" dt="2026-09-03T17:37:04.851" v="168" actId="113"/>
+          <ac:spMkLst>
+            <pc:docMk/>
+            <pc:sldMk cId="2165203398" sldId="256"/>
+            <ac:spMk id="114" creationId="{BD19C6D8-BAA8-0600-F916-9455C8E77F38}"/>
+          </ac:spMkLst>
+        </pc:spChg>
+        <pc:spChg chg="mod">
+          <ac:chgData name="Gilbert, Neil" userId="37be9f5c-8f28-415b-96d6-624acf93bb3f" providerId="ADAL" clId="{18ED56B6-1921-416C-9A28-3F6F3C8390B5}" dt="2026-09-03T17:37:04.851" v="168" actId="113"/>
+          <ac:spMkLst>
+            <pc:docMk/>
+            <pc:sldMk cId="2165203398" sldId="256"/>
+            <ac:spMk id="121" creationId="{8E296CFF-F3FA-663B-CD2D-EFB2E0DD3E23}"/>
+          </ac:spMkLst>
+        </pc:spChg>
+        <pc:spChg chg="del mod topLvl">
+          <ac:chgData name="Gilbert, Neil" userId="37be9f5c-8f28-415b-96d6-624acf93bb3f" providerId="ADAL" clId="{18ED56B6-1921-416C-9A28-3F6F3C8390B5}" dt="2026-09-03T17:40:23.928" v="182" actId="21"/>
+          <ac:spMkLst>
+            <pc:docMk/>
+            <pc:sldMk cId="2165203398" sldId="256"/>
+            <ac:spMk id="124" creationId="{0E21E371-FCDF-D6DD-1C98-E7F1F5A31D7A}"/>
+          </ac:spMkLst>
+        </pc:spChg>
+        <pc:spChg chg="del mod topLvl">
+          <ac:chgData name="Gilbert, Neil" userId="37be9f5c-8f28-415b-96d6-624acf93bb3f" providerId="ADAL" clId="{18ED56B6-1921-416C-9A28-3F6F3C8390B5}" dt="2026-09-03T17:40:23.928" v="182" actId="21"/>
+          <ac:spMkLst>
+            <pc:docMk/>
+            <pc:sldMk cId="2165203398" sldId="256"/>
+            <ac:spMk id="125" creationId="{FA78D632-3EF5-EEF3-7773-0DBAF07DFB00}"/>
+          </ac:spMkLst>
+        </pc:spChg>
+        <pc:spChg chg="del">
+          <ac:chgData name="Gilbert, Neil" userId="37be9f5c-8f28-415b-96d6-624acf93bb3f" providerId="ADAL" clId="{18ED56B6-1921-416C-9A28-3F6F3C8390B5}" dt="2026-09-03T17:40:23.928" v="182" actId="21"/>
+          <ac:spMkLst>
+            <pc:docMk/>
+            <pc:sldMk cId="2165203398" sldId="256"/>
+            <ac:spMk id="126" creationId="{7CBB6A18-4C62-1FE0-A525-041D9CDDC471}"/>
+          </ac:spMkLst>
+        </pc:spChg>
+        <pc:spChg chg="del">
+          <ac:chgData name="Gilbert, Neil" userId="37be9f5c-8f28-415b-96d6-624acf93bb3f" providerId="ADAL" clId="{18ED56B6-1921-416C-9A28-3F6F3C8390B5}" dt="2026-09-03T17:40:23.928" v="182" actId="21"/>
+          <ac:spMkLst>
+            <pc:docMk/>
+            <pc:sldMk cId="2165203398" sldId="256"/>
+            <ac:spMk id="127" creationId="{088BCC8B-8957-7602-4A3E-ED17B6473B46}"/>
+          </ac:spMkLst>
+        </pc:spChg>
+        <pc:spChg chg="del mod topLvl">
+          <ac:chgData name="Gilbert, Neil" userId="37be9f5c-8f28-415b-96d6-624acf93bb3f" providerId="ADAL" clId="{18ED56B6-1921-416C-9A28-3F6F3C8390B5}" dt="2026-09-03T17:40:23.928" v="182" actId="21"/>
+          <ac:spMkLst>
+            <pc:docMk/>
+            <pc:sldMk cId="2165203398" sldId="256"/>
+            <ac:spMk id="128" creationId="{A61FF6A6-BDBA-7AD6-9D62-AD260FCC2F75}"/>
+          </ac:spMkLst>
+        </pc:spChg>
+        <pc:spChg chg="mod">
+          <ac:chgData name="Gilbert, Neil" userId="37be9f5c-8f28-415b-96d6-624acf93bb3f" providerId="ADAL" clId="{18ED56B6-1921-416C-9A28-3F6F3C8390B5}" dt="2026-09-03T17:39:37.740" v="177" actId="165"/>
+          <ac:spMkLst>
+            <pc:docMk/>
+            <pc:sldMk cId="2165203398" sldId="256"/>
+            <ac:spMk id="131" creationId="{B52204DB-5774-19B6-A456-A966CE855586}"/>
+          </ac:spMkLst>
+        </pc:spChg>
+        <pc:spChg chg="mod">
+          <ac:chgData name="Gilbert, Neil" userId="37be9f5c-8f28-415b-96d6-624acf93bb3f" providerId="ADAL" clId="{18ED56B6-1921-416C-9A28-3F6F3C8390B5}" dt="2026-09-03T17:39:37.740" v="177" actId="165"/>
+          <ac:spMkLst>
+            <pc:docMk/>
+            <pc:sldMk cId="2165203398" sldId="256"/>
+            <ac:spMk id="134" creationId="{BCD3D06E-CC25-1B46-9A17-26CAF8C93CF0}"/>
+          </ac:spMkLst>
+        </pc:spChg>
+        <pc:spChg chg="mod">
+          <ac:chgData name="Gilbert, Neil" userId="37be9f5c-8f28-415b-96d6-624acf93bb3f" providerId="ADAL" clId="{18ED56B6-1921-416C-9A28-3F6F3C8390B5}" dt="2026-09-03T17:39:37.740" v="177" actId="165"/>
+          <ac:spMkLst>
+            <pc:docMk/>
+            <pc:sldMk cId="2165203398" sldId="256"/>
+            <ac:spMk id="135" creationId="{D3A2D6DF-710B-3720-4C6D-BFC2B82C70D8}"/>
+          </ac:spMkLst>
+        </pc:spChg>
+        <pc:spChg chg="mod">
+          <ac:chgData name="Gilbert, Neil" userId="37be9f5c-8f28-415b-96d6-624acf93bb3f" providerId="ADAL" clId="{18ED56B6-1921-416C-9A28-3F6F3C8390B5}" dt="2026-09-03T17:39:37.740" v="177" actId="165"/>
+          <ac:spMkLst>
+            <pc:docMk/>
+            <pc:sldMk cId="2165203398" sldId="256"/>
+            <ac:spMk id="137" creationId="{B1B04EBE-5177-3EF3-22C1-E20EB28AD32E}"/>
+          </ac:spMkLst>
+        </pc:spChg>
+        <pc:spChg chg="mod">
+          <ac:chgData name="Gilbert, Neil" userId="37be9f5c-8f28-415b-96d6-624acf93bb3f" providerId="ADAL" clId="{18ED56B6-1921-416C-9A28-3F6F3C8390B5}" dt="2026-09-03T17:39:37.740" v="177" actId="165"/>
+          <ac:spMkLst>
+            <pc:docMk/>
+            <pc:sldMk cId="2165203398" sldId="256"/>
+            <ac:spMk id="141" creationId="{46B984FC-6679-16BA-F998-6047C13CC4EA}"/>
+          </ac:spMkLst>
+        </pc:spChg>
+        <pc:spChg chg="mod">
+          <ac:chgData name="Gilbert, Neil" userId="37be9f5c-8f28-415b-96d6-624acf93bb3f" providerId="ADAL" clId="{18ED56B6-1921-416C-9A28-3F6F3C8390B5}" dt="2026-09-03T17:39:37.740" v="177" actId="165"/>
+          <ac:spMkLst>
+            <pc:docMk/>
+            <pc:sldMk cId="2165203398" sldId="256"/>
+            <ac:spMk id="144" creationId="{BD19C6D8-BAA8-0600-F916-9455C8E77F38}"/>
+          </ac:spMkLst>
+        </pc:spChg>
+        <pc:spChg chg="mod">
+          <ac:chgData name="Gilbert, Neil" userId="37be9f5c-8f28-415b-96d6-624acf93bb3f" providerId="ADAL" clId="{18ED56B6-1921-416C-9A28-3F6F3C8390B5}" dt="2026-09-03T17:39:37.740" v="177" actId="165"/>
+          <ac:spMkLst>
+            <pc:docMk/>
+            <pc:sldMk cId="2165203398" sldId="256"/>
+            <ac:spMk id="147" creationId="{99F67F2C-5E11-C4CF-9D29-FC2BFC11A0CC}"/>
+          </ac:spMkLst>
+        </pc:spChg>
+        <pc:spChg chg="mod">
+          <ac:chgData name="Gilbert, Neil" userId="37be9f5c-8f28-415b-96d6-624acf93bb3f" providerId="ADAL" clId="{18ED56B6-1921-416C-9A28-3F6F3C8390B5}" dt="2026-09-03T17:40:16.368" v="181" actId="1076"/>
+          <ac:spMkLst>
+            <pc:docMk/>
+            <pc:sldMk cId="2165203398" sldId="256"/>
+            <ac:spMk id="149" creationId="{98D05FE3-5A7E-3100-EF73-242D8696E482}"/>
+          </ac:spMkLst>
+        </pc:spChg>
+        <pc:spChg chg="del mod ord topLvl">
+          <ac:chgData name="Gilbert, Neil" userId="37be9f5c-8f28-415b-96d6-624acf93bb3f" providerId="ADAL" clId="{18ED56B6-1921-416C-9A28-3F6F3C8390B5}" dt="2026-09-03T17:40:23.928" v="182" actId="21"/>
+          <ac:spMkLst>
+            <pc:docMk/>
+            <pc:sldMk cId="2165203398" sldId="256"/>
+            <ac:spMk id="151" creationId="{8E296CFF-F3FA-663B-CD2D-EFB2E0DD3E23}"/>
+          </ac:spMkLst>
+        </pc:spChg>
+        <pc:spChg chg="mod">
+          <ac:chgData name="Gilbert, Neil" userId="37be9f5c-8f28-415b-96d6-624acf93bb3f" providerId="ADAL" clId="{18ED56B6-1921-416C-9A28-3F6F3C8390B5}" dt="2026-09-03T17:37:48.268" v="172"/>
+          <ac:spMkLst>
+            <pc:docMk/>
+            <pc:sldMk cId="2165203398" sldId="256"/>
+            <ac:spMk id="157" creationId="{088BCC8B-8957-7602-4A3E-ED17B6473B46}"/>
+          </ac:spMkLst>
+        </pc:spChg>
+        <pc:spChg chg="mod">
+          <ac:chgData name="Gilbert, Neil" userId="37be9f5c-8f28-415b-96d6-624acf93bb3f" providerId="ADAL" clId="{18ED56B6-1921-416C-9A28-3F6F3C8390B5}" dt="2026-09-03T17:37:48.268" v="172"/>
+          <ac:spMkLst>
+            <pc:docMk/>
+            <pc:sldMk cId="2165203398" sldId="256"/>
+            <ac:spMk id="158" creationId="{A61FF6A6-BDBA-7AD6-9D62-AD260FCC2F75}"/>
+          </ac:spMkLst>
+        </pc:spChg>
+        <pc:spChg chg="mod">
+          <ac:chgData name="Gilbert, Neil" userId="37be9f5c-8f28-415b-96d6-624acf93bb3f" providerId="ADAL" clId="{18ED56B6-1921-416C-9A28-3F6F3C8390B5}" dt="2026-09-03T17:37:48.268" v="172"/>
+          <ac:spMkLst>
+            <pc:docMk/>
+            <pc:sldMk cId="2165203398" sldId="256"/>
+            <ac:spMk id="161" creationId="{B52204DB-5774-19B6-A456-A966CE855586}"/>
+          </ac:spMkLst>
+        </pc:spChg>
+        <pc:spChg chg="mod">
+          <ac:chgData name="Gilbert, Neil" userId="37be9f5c-8f28-415b-96d6-624acf93bb3f" providerId="ADAL" clId="{18ED56B6-1921-416C-9A28-3F6F3C8390B5}" dt="2026-09-03T17:37:48.268" v="172"/>
+          <ac:spMkLst>
+            <pc:docMk/>
+            <pc:sldMk cId="2165203398" sldId="256"/>
+            <ac:spMk id="165" creationId="{D3A2D6DF-710B-3720-4C6D-BFC2B82C70D8}"/>
+          </ac:spMkLst>
+        </pc:spChg>
+        <pc:spChg chg="mod">
+          <ac:chgData name="Gilbert, Neil" userId="37be9f5c-8f28-415b-96d6-624acf93bb3f" providerId="ADAL" clId="{18ED56B6-1921-416C-9A28-3F6F3C8390B5}" dt="2026-09-03T17:37:48.268" v="172"/>
+          <ac:spMkLst>
+            <pc:docMk/>
+            <pc:sldMk cId="2165203398" sldId="256"/>
+            <ac:spMk id="167" creationId="{B1B04EBE-5177-3EF3-22C1-E20EB28AD32E}"/>
+          </ac:spMkLst>
+        </pc:spChg>
+        <pc:spChg chg="mod">
+          <ac:chgData name="Gilbert, Neil" userId="37be9f5c-8f28-415b-96d6-624acf93bb3f" providerId="ADAL" clId="{18ED56B6-1921-416C-9A28-3F6F3C8390B5}" dt="2026-09-03T17:37:48.268" v="172"/>
+          <ac:spMkLst>
+            <pc:docMk/>
+            <pc:sldMk cId="2165203398" sldId="256"/>
+            <ac:spMk id="168" creationId="{9BD73756-49EC-4CB5-0C3A-7D0370512674}"/>
+          </ac:spMkLst>
+        </pc:spChg>
+        <pc:spChg chg="mod">
+          <ac:chgData name="Gilbert, Neil" userId="37be9f5c-8f28-415b-96d6-624acf93bb3f" providerId="ADAL" clId="{18ED56B6-1921-416C-9A28-3F6F3C8390B5}" dt="2026-09-03T17:37:48.268" v="172"/>
+          <ac:spMkLst>
+            <pc:docMk/>
+            <pc:sldMk cId="2165203398" sldId="256"/>
+            <ac:spMk id="174" creationId="{BD19C6D8-BAA8-0600-F916-9455C8E77F38}"/>
+          </ac:spMkLst>
+        </pc:spChg>
+        <pc:spChg chg="mod">
+          <ac:chgData name="Gilbert, Neil" userId="37be9f5c-8f28-415b-96d6-624acf93bb3f" providerId="ADAL" clId="{18ED56B6-1921-416C-9A28-3F6F3C8390B5}" dt="2026-09-03T17:37:48.268" v="172"/>
+          <ac:spMkLst>
+            <pc:docMk/>
+            <pc:sldMk cId="2165203398" sldId="256"/>
+            <ac:spMk id="177" creationId="{99F67F2C-5E11-C4CF-9D29-FC2BFC11A0CC}"/>
+          </ac:spMkLst>
+        </pc:spChg>
+        <pc:spChg chg="mod">
+          <ac:chgData name="Gilbert, Neil" userId="37be9f5c-8f28-415b-96d6-624acf93bb3f" providerId="ADAL" clId="{18ED56B6-1921-416C-9A28-3F6F3C8390B5}" dt="2026-09-03T17:37:48.268" v="172"/>
+          <ac:spMkLst>
+            <pc:docMk/>
+            <pc:sldMk cId="2165203398" sldId="256"/>
+            <ac:spMk id="179" creationId="{98D05FE3-5A7E-3100-EF73-242D8696E482}"/>
+          </ac:spMkLst>
+        </pc:spChg>
+        <pc:spChg chg="mod">
+          <ac:chgData name="Gilbert, Neil" userId="37be9f5c-8f28-415b-96d6-624acf93bb3f" providerId="ADAL" clId="{18ED56B6-1921-416C-9A28-3F6F3C8390B5}" dt="2026-09-03T17:39:25.775" v="174" actId="14100"/>
+          <ac:spMkLst>
+            <pc:docMk/>
+            <pc:sldMk cId="2165203398" sldId="256"/>
+            <ac:spMk id="181" creationId="{8E296CFF-F3FA-663B-CD2D-EFB2E0DD3E23}"/>
+          </ac:spMkLst>
+        </pc:spChg>
+        <pc:spChg chg="add mod">
+          <ac:chgData name="Gilbert, Neil" userId="37be9f5c-8f28-415b-96d6-624acf93bb3f" providerId="ADAL" clId="{18ED56B6-1921-416C-9A28-3F6F3C8390B5}" dt="2026-09-03T17:40:30.845" v="183"/>
+          <ac:spMkLst>
+            <pc:docMk/>
+            <pc:sldMk cId="2165203398" sldId="256"/>
+            <ac:spMk id="183" creationId="{0E21E371-FCDF-D6DD-1C98-E7F1F5A31D7A}"/>
+          </ac:spMkLst>
+        </pc:spChg>
+        <pc:spChg chg="add mod">
+          <ac:chgData name="Gilbert, Neil" userId="37be9f5c-8f28-415b-96d6-624acf93bb3f" providerId="ADAL" clId="{18ED56B6-1921-416C-9A28-3F6F3C8390B5}" dt="2026-09-03T17:40:30.845" v="183"/>
+          <ac:spMkLst>
+            <pc:docMk/>
+            <pc:sldMk cId="2165203398" sldId="256"/>
+            <ac:spMk id="184" creationId="{FA78D632-3EF5-EEF3-7773-0DBAF07DFB00}"/>
+          </ac:spMkLst>
+        </pc:spChg>
+        <pc:spChg chg="add mod">
+          <ac:chgData name="Gilbert, Neil" userId="37be9f5c-8f28-415b-96d6-624acf93bb3f" providerId="ADAL" clId="{18ED56B6-1921-416C-9A28-3F6F3C8390B5}" dt="2026-09-03T17:40:30.845" v="183"/>
+          <ac:spMkLst>
+            <pc:docMk/>
+            <pc:sldMk cId="2165203398" sldId="256"/>
+            <ac:spMk id="185" creationId="{7CBB6A18-4C62-1FE0-A525-041D9CDDC471}"/>
+          </ac:spMkLst>
+        </pc:spChg>
+        <pc:spChg chg="add mod">
+          <ac:chgData name="Gilbert, Neil" userId="37be9f5c-8f28-415b-96d6-624acf93bb3f" providerId="ADAL" clId="{18ED56B6-1921-416C-9A28-3F6F3C8390B5}" dt="2026-09-03T17:40:30.845" v="183"/>
+          <ac:spMkLst>
+            <pc:docMk/>
+            <pc:sldMk cId="2165203398" sldId="256"/>
+            <ac:spMk id="187" creationId="{A61FF6A6-BDBA-7AD6-9D62-AD260FCC2F75}"/>
+          </ac:spMkLst>
+        </pc:spChg>
+        <pc:spChg chg="mod">
+          <ac:chgData name="Gilbert, Neil" userId="37be9f5c-8f28-415b-96d6-624acf93bb3f" providerId="ADAL" clId="{18ED56B6-1921-416C-9A28-3F6F3C8390B5}" dt="2026-09-03T17:40:30.845" v="183"/>
+          <ac:spMkLst>
+            <pc:docMk/>
+            <pc:sldMk cId="2165203398" sldId="256"/>
+            <ac:spMk id="190" creationId="{B52204DB-5774-19B6-A456-A966CE855586}"/>
+          </ac:spMkLst>
+        </pc:spChg>
+        <pc:spChg chg="mod">
+          <ac:chgData name="Gilbert, Neil" userId="37be9f5c-8f28-415b-96d6-624acf93bb3f" providerId="ADAL" clId="{18ED56B6-1921-416C-9A28-3F6F3C8390B5}" dt="2026-09-03T17:40:30.845" v="183"/>
+          <ac:spMkLst>
+            <pc:docMk/>
+            <pc:sldMk cId="2165203398" sldId="256"/>
+            <ac:spMk id="193" creationId="{BCD3D06E-CC25-1B46-9A17-26CAF8C93CF0}"/>
+          </ac:spMkLst>
+        </pc:spChg>
+        <pc:spChg chg="mod">
+          <ac:chgData name="Gilbert, Neil" userId="37be9f5c-8f28-415b-96d6-624acf93bb3f" providerId="ADAL" clId="{18ED56B6-1921-416C-9A28-3F6F3C8390B5}" dt="2026-09-03T17:40:30.845" v="183"/>
+          <ac:spMkLst>
+            <pc:docMk/>
+            <pc:sldMk cId="2165203398" sldId="256"/>
+            <ac:spMk id="194" creationId="{D3A2D6DF-710B-3720-4C6D-BFC2B82C70D8}"/>
+          </ac:spMkLst>
+        </pc:spChg>
+        <pc:spChg chg="mod">
+          <ac:chgData name="Gilbert, Neil" userId="37be9f5c-8f28-415b-96d6-624acf93bb3f" providerId="ADAL" clId="{18ED56B6-1921-416C-9A28-3F6F3C8390B5}" dt="2026-09-03T17:40:30.845" v="183"/>
+          <ac:spMkLst>
+            <pc:docMk/>
+            <pc:sldMk cId="2165203398" sldId="256"/>
+            <ac:spMk id="197" creationId="{9BD73756-49EC-4CB5-0C3A-7D0370512674}"/>
+          </ac:spMkLst>
+        </pc:spChg>
+        <pc:spChg chg="mod">
+          <ac:chgData name="Gilbert, Neil" userId="37be9f5c-8f28-415b-96d6-624acf93bb3f" providerId="ADAL" clId="{18ED56B6-1921-416C-9A28-3F6F3C8390B5}" dt="2026-09-03T17:40:30.845" v="183"/>
+          <ac:spMkLst>
+            <pc:docMk/>
+            <pc:sldMk cId="2165203398" sldId="256"/>
+            <ac:spMk id="200" creationId="{46B984FC-6679-16BA-F998-6047C13CC4EA}"/>
+          </ac:spMkLst>
+        </pc:spChg>
+        <pc:spChg chg="mod">
+          <ac:chgData name="Gilbert, Neil" userId="37be9f5c-8f28-415b-96d6-624acf93bb3f" providerId="ADAL" clId="{18ED56B6-1921-416C-9A28-3F6F3C8390B5}" dt="2026-09-03T17:40:30.845" v="183"/>
+          <ac:spMkLst>
+            <pc:docMk/>
+            <pc:sldMk cId="2165203398" sldId="256"/>
+            <ac:spMk id="203" creationId="{BD19C6D8-BAA8-0600-F916-9455C8E77F38}"/>
+          </ac:spMkLst>
+        </pc:spChg>
+        <pc:grpChg chg="add mod">
+          <ac:chgData name="Gilbert, Neil" userId="37be9f5c-8f28-415b-96d6-624acf93bb3f" providerId="ADAL" clId="{18ED56B6-1921-416C-9A28-3F6F3C8390B5}" dt="2026-09-03T17:33:22.915" v="149" actId="164"/>
+          <ac:grpSpMkLst>
+            <pc:docMk/>
+            <pc:sldMk cId="2165203398" sldId="256"/>
+            <ac:grpSpMk id="11" creationId="{1C89B2AC-E6F7-96B7-68B5-A9E882DEDB8C}"/>
+          </ac:grpSpMkLst>
+        </pc:grpChg>
+        <pc:grpChg chg="add mod ord">
+          <ac:chgData name="Gilbert, Neil" userId="37be9f5c-8f28-415b-96d6-624acf93bb3f" providerId="ADAL" clId="{18ED56B6-1921-416C-9A28-3F6F3C8390B5}" dt="2026-09-03T17:36:03.227" v="163" actId="164"/>
+          <ac:grpSpMkLst>
+            <pc:docMk/>
+            <pc:sldMk cId="2165203398" sldId="256"/>
+            <ac:grpSpMk id="16" creationId="{5C726014-114E-88E3-9E0D-B685F16CBAC4}"/>
+          </ac:grpSpMkLst>
+        </pc:grpChg>
+        <pc:grpChg chg="add del mod">
+          <ac:chgData name="Gilbert, Neil" userId="37be9f5c-8f28-415b-96d6-624acf93bb3f" providerId="ADAL" clId="{18ED56B6-1921-416C-9A28-3F6F3C8390B5}" dt="2026-09-03T17:33:24.979" v="150" actId="21"/>
+          <ac:grpSpMkLst>
+            <pc:docMk/>
+            <pc:sldMk cId="2165203398" sldId="256"/>
+            <ac:grpSpMk id="17" creationId="{3F4CDE92-3C04-8723-5353-AB59C84CBACE}"/>
+          </ac:grpSpMkLst>
+        </pc:grpChg>
+        <pc:grpChg chg="mod">
+          <ac:chgData name="Gilbert, Neil" userId="37be9f5c-8f28-415b-96d6-624acf93bb3f" providerId="ADAL" clId="{18ED56B6-1921-416C-9A28-3F6F3C8390B5}" dt="2026-09-03T17:36:03.227" v="163" actId="164"/>
+          <ac:grpSpMkLst>
+            <pc:docMk/>
+            <pc:sldMk cId="2165203398" sldId="256"/>
+            <ac:grpSpMk id="18" creationId="{3F4CDE92-3C04-8723-5353-AB59C84CBACE}"/>
+          </ac:grpSpMkLst>
+        </pc:grpChg>
+        <pc:grpChg chg="add del mod">
+          <ac:chgData name="Gilbert, Neil" userId="37be9f5c-8f28-415b-96d6-624acf93bb3f" providerId="ADAL" clId="{18ED56B6-1921-416C-9A28-3F6F3C8390B5}" dt="2026-09-03T17:36:23.484" v="164" actId="21"/>
+          <ac:grpSpMkLst>
+            <pc:docMk/>
+            <pc:sldMk cId="2165203398" sldId="256"/>
+            <ac:grpSpMk id="39" creationId="{27B64738-3C46-161A-C842-92A08D0A078F}"/>
+          </ac:grpSpMkLst>
+        </pc:grpChg>
+        <pc:grpChg chg="del">
+          <ac:chgData name="Gilbert, Neil" userId="37be9f5c-8f28-415b-96d6-624acf93bb3f" providerId="ADAL" clId="{18ED56B6-1921-416C-9A28-3F6F3C8390B5}" dt="2026-09-03T17:36:43.960" v="166" actId="21"/>
+          <ac:grpSpMkLst>
+            <pc:docMk/>
+            <pc:sldMk cId="2165203398" sldId="256"/>
+            <ac:grpSpMk id="40" creationId="{27B64738-3C46-161A-C842-92A08D0A078F}"/>
+          </ac:grpSpMkLst>
+        </pc:grpChg>
+        <pc:grpChg chg="mod ord">
+          <ac:chgData name="Gilbert, Neil" userId="37be9f5c-8f28-415b-96d6-624acf93bb3f" providerId="ADAL" clId="{18ED56B6-1921-416C-9A28-3F6F3C8390B5}" dt="2026-09-03T17:28:51.326" v="107" actId="164"/>
+          <ac:grpSpMkLst>
+            <pc:docMk/>
+            <pc:sldMk cId="2165203398" sldId="256"/>
+            <ac:grpSpMk id="63" creationId="{A43BD0DF-851A-8C8D-5036-D3B915FE47D1}"/>
+          </ac:grpSpMkLst>
+        </pc:grpChg>
+        <pc:grpChg chg="mod">
+          <ac:chgData name="Gilbert, Neil" userId="37be9f5c-8f28-415b-96d6-624acf93bb3f" providerId="ADAL" clId="{18ED56B6-1921-416C-9A28-3F6F3C8390B5}" dt="2026-09-03T17:33:22.915" v="149" actId="164"/>
+          <ac:grpSpMkLst>
+            <pc:docMk/>
+            <pc:sldMk cId="2165203398" sldId="256"/>
+            <ac:grpSpMk id="64" creationId="{1F1221FE-96B6-2BC8-00DC-B1146062102A}"/>
+          </ac:grpSpMkLst>
+        </pc:grpChg>
+        <pc:grpChg chg="del">
+          <ac:chgData name="Gilbert, Neil" userId="37be9f5c-8f28-415b-96d6-624acf93bb3f" providerId="ADAL" clId="{18ED56B6-1921-416C-9A28-3F6F3C8390B5}" dt="2026-09-03T17:37:13.785" v="169" actId="21"/>
+          <ac:grpSpMkLst>
+            <pc:docMk/>
+            <pc:sldMk cId="2165203398" sldId="256"/>
+            <ac:grpSpMk id="92" creationId="{27B64738-3C46-161A-C842-92A08D0A078F}"/>
+          </ac:grpSpMkLst>
+        </pc:grpChg>
+        <pc:grpChg chg="add del">
+          <ac:chgData name="Gilbert, Neil" userId="37be9f5c-8f28-415b-96d6-624acf93bb3f" providerId="ADAL" clId="{18ED56B6-1921-416C-9A28-3F6F3C8390B5}" dt="2026-09-03T17:39:28.262" v="176" actId="21"/>
+          <ac:grpSpMkLst>
+            <pc:docMk/>
+            <pc:sldMk cId="2165203398" sldId="256"/>
+            <ac:grpSpMk id="122" creationId="{27B64738-3C46-161A-C842-92A08D0A078F}"/>
+          </ac:grpSpMkLst>
+        </pc:grpChg>
+        <pc:grpChg chg="del">
+          <ac:chgData name="Gilbert, Neil" userId="37be9f5c-8f28-415b-96d6-624acf93bb3f" providerId="ADAL" clId="{18ED56B6-1921-416C-9A28-3F6F3C8390B5}" dt="2026-09-03T17:39:42.916" v="178" actId="165"/>
+          <ac:grpSpMkLst>
+            <pc:docMk/>
+            <pc:sldMk cId="2165203398" sldId="256"/>
+            <ac:grpSpMk id="123" creationId="{5C726014-114E-88E3-9E0D-B685F16CBAC4}"/>
+          </ac:grpSpMkLst>
+        </pc:grpChg>
+        <pc:grpChg chg="del">
+          <ac:chgData name="Gilbert, Neil" userId="37be9f5c-8f28-415b-96d6-624acf93bb3f" providerId="ADAL" clId="{18ED56B6-1921-416C-9A28-3F6F3C8390B5}" dt="2026-09-03T17:40:23.928" v="182" actId="21"/>
+          <ac:grpSpMkLst>
+            <pc:docMk/>
+            <pc:sldMk cId="2165203398" sldId="256"/>
+            <ac:grpSpMk id="129" creationId="{3F4CDE92-3C04-8723-5353-AB59C84CBACE}"/>
+          </ac:grpSpMkLst>
+        </pc:grpChg>
         <pc:picChg chg="add mod ord modCrop">
-          <ac:chgData name="Gilbert, Neil" userId="37be9f5c-8f28-415b-96d6-624acf93bb3f" providerId="ADAL" clId="{18ED56B6-1921-416C-9A28-3F6F3C8390B5}" dt="2026-08-12T16:27:58.204" v="18" actId="1076"/>
+          <ac:chgData name="Gilbert, Neil" userId="37be9f5c-8f28-415b-96d6-624acf93bb3f" providerId="ADAL" clId="{18ED56B6-1921-416C-9A28-3F6F3C8390B5}" dt="2026-09-03T17:32:55.608" v="147" actId="164"/>
           <ac:picMkLst>
             <pc:docMk/>
             <pc:sldMk cId="2165203398" sldId="256"/>
             <ac:picMk id="3" creationId="{3312B9E9-F068-BAFD-B712-06C890B1A95D}"/>
           </ac:picMkLst>
         </pc:picChg>
-        <pc:picChg chg="del">
-          <ac:chgData name="Gilbert, Neil" userId="37be9f5c-8f28-415b-96d6-624acf93bb3f" providerId="ADAL" clId="{18ED56B6-1921-416C-9A28-3F6F3C8390B5}" dt="2026-08-12T16:26:35.609" v="0" actId="478"/>
+        <pc:picChg chg="add mod ord">
+          <ac:chgData name="Gilbert, Neil" userId="37be9f5c-8f28-415b-96d6-624acf93bb3f" providerId="ADAL" clId="{18ED56B6-1921-416C-9A28-3F6F3C8390B5}" dt="2026-09-03T17:33:22.915" v="149" actId="164"/>
           <ac:picMkLst>
             <pc:docMk/>
             <pc:sldMk cId="2165203398" sldId="256"/>
-            <ac:picMk id="62" creationId="{61C9BB25-7979-3A9C-246D-5BFEAF4BF0D6}"/>
+            <ac:picMk id="5" creationId="{3A3FB0E3-DD33-8DBD-C9B2-7D186B2CE335}"/>
+          </ac:picMkLst>
+        </pc:picChg>
+        <pc:picChg chg="add del">
+          <ac:chgData name="Gilbert, Neil" userId="37be9f5c-8f28-415b-96d6-624acf93bb3f" providerId="ADAL" clId="{18ED56B6-1921-416C-9A28-3F6F3C8390B5}" dt="2026-09-03T17:25:48.708" v="63" actId="22"/>
+          <ac:picMkLst>
+            <pc:docMk/>
+            <pc:sldMk cId="2165203398" sldId="256"/>
+            <ac:picMk id="8" creationId="{F3986D3F-09C6-C9D0-C40B-F59FF1412ACD}"/>
           </ac:picMkLst>
         </pc:picChg>
         <pc:picChg chg="mod">
-          <ac:chgData name="Gilbert, Neil" userId="37be9f5c-8f28-415b-96d6-624acf93bb3f" providerId="ADAL" clId="{18ED56B6-1921-416C-9A28-3F6F3C8390B5}" dt="2026-08-12T16:28:59.345" v="28" actId="1076"/>
+          <ac:chgData name="Gilbert, Neil" userId="37be9f5c-8f28-415b-96d6-624acf93bb3f" providerId="ADAL" clId="{18ED56B6-1921-416C-9A28-3F6F3C8390B5}" dt="2026-09-03T17:33:25.739" v="151"/>
+          <ac:picMkLst>
+            <pc:docMk/>
+            <pc:sldMk cId="2165203398" sldId="256"/>
+            <ac:picMk id="19" creationId="{3A3FB0E3-DD33-8DBD-C9B2-7D186B2CE335}"/>
+          </ac:picMkLst>
+        </pc:picChg>
+        <pc:picChg chg="add del mod">
+          <ac:chgData name="Gilbert, Neil" userId="37be9f5c-8f28-415b-96d6-624acf93bb3f" providerId="ADAL" clId="{18ED56B6-1921-416C-9A28-3F6F3C8390B5}" dt="2026-09-03T17:25:08.374" v="53" actId="478"/>
           <ac:picMkLst>
             <pc:docMk/>
             <pc:sldMk cId="2165203398" sldId="256"/>
             <ac:picMk id="72" creationId="{D0FB048F-6D41-1CC3-ACF0-F1D81D1DCC3D}"/>
           </ac:picMkLst>
         </pc:picChg>
-        <pc:cxnChg chg="del">
-          <ac:chgData name="Gilbert, Neil" userId="37be9f5c-8f28-415b-96d6-624acf93bb3f" providerId="ADAL" clId="{18ED56B6-1921-416C-9A28-3F6F3C8390B5}" dt="2026-08-12T16:29:59.943" v="47" actId="478"/>
+        <pc:picChg chg="del mod topLvl">
+          <ac:chgData name="Gilbert, Neil" userId="37be9f5c-8f28-415b-96d6-624acf93bb3f" providerId="ADAL" clId="{18ED56B6-1921-416C-9A28-3F6F3C8390B5}" dt="2026-09-03T17:40:23.928" v="182" actId="21"/>
+          <ac:picMkLst>
+            <pc:docMk/>
+            <pc:sldMk cId="2165203398" sldId="256"/>
+            <ac:picMk id="150" creationId="{3312B9E9-F068-BAFD-B712-06C890B1A95D}"/>
+          </ac:picMkLst>
+        </pc:picChg>
+        <pc:cxnChg chg="mod">
+          <ac:chgData name="Gilbert, Neil" userId="37be9f5c-8f28-415b-96d6-624acf93bb3f" providerId="ADAL" clId="{18ED56B6-1921-416C-9A28-3F6F3C8390B5}" dt="2026-09-03T17:31:22.740" v="122" actId="1076"/>
           <ac:cxnSpMkLst>
             <pc:docMk/>
             <pc:sldMk cId="2165203398" sldId="256"/>
-            <ac:cxnSpMk id="76" creationId="{235E9802-AE20-4A87-7B4E-9540788DAFC5}"/>
+            <ac:cxnSpMk id="74" creationId="{B3AC14C0-D495-739A-92A8-1DEB1A104595}"/>
           </ac:cxnSpMkLst>
         </pc:cxnChg>
       </pc:sldChg>
+      <pc:sldMasterChg chg="modSp modSldLayout">
+        <pc:chgData name="Gilbert, Neil" userId="37be9f5c-8f28-415b-96d6-624acf93bb3f" providerId="ADAL" clId="{18ED56B6-1921-416C-9A28-3F6F3C8390B5}" dt="2026-09-03T17:39:27.520" v="175"/>
+        <pc:sldMasterMkLst>
+          <pc:docMk/>
+          <pc:sldMasterMk cId="3348616141" sldId="2147483696"/>
+        </pc:sldMasterMkLst>
+        <pc:spChg chg="mod">
+          <ac:chgData name="Gilbert, Neil" userId="37be9f5c-8f28-415b-96d6-624acf93bb3f" providerId="ADAL" clId="{18ED56B6-1921-416C-9A28-3F6F3C8390B5}" dt="2026-09-03T17:39:27.520" v="175"/>
+          <ac:spMkLst>
+            <pc:docMk/>
+            <pc:sldMasterMk cId="3348616141" sldId="2147483696"/>
+            <ac:spMk id="2" creationId="{00000000-0000-0000-0000-000000000000}"/>
+          </ac:spMkLst>
+        </pc:spChg>
+        <pc:spChg chg="mod">
+          <ac:chgData name="Gilbert, Neil" userId="37be9f5c-8f28-415b-96d6-624acf93bb3f" providerId="ADAL" clId="{18ED56B6-1921-416C-9A28-3F6F3C8390B5}" dt="2026-09-03T17:39:27.520" v="175"/>
+          <ac:spMkLst>
+            <pc:docMk/>
+            <pc:sldMasterMk cId="3348616141" sldId="2147483696"/>
+            <ac:spMk id="3" creationId="{00000000-0000-0000-0000-000000000000}"/>
+          </ac:spMkLst>
+        </pc:spChg>
+        <pc:spChg chg="mod">
+          <ac:chgData name="Gilbert, Neil" userId="37be9f5c-8f28-415b-96d6-624acf93bb3f" providerId="ADAL" clId="{18ED56B6-1921-416C-9A28-3F6F3C8390B5}" dt="2026-09-03T17:39:27.520" v="175"/>
+          <ac:spMkLst>
+            <pc:docMk/>
+            <pc:sldMasterMk cId="3348616141" sldId="2147483696"/>
+            <ac:spMk id="4" creationId="{00000000-0000-0000-0000-000000000000}"/>
+          </ac:spMkLst>
+        </pc:spChg>
+        <pc:spChg chg="mod">
+          <ac:chgData name="Gilbert, Neil" userId="37be9f5c-8f28-415b-96d6-624acf93bb3f" providerId="ADAL" clId="{18ED56B6-1921-416C-9A28-3F6F3C8390B5}" dt="2026-09-03T17:39:27.520" v="175"/>
+          <ac:spMkLst>
+            <pc:docMk/>
+            <pc:sldMasterMk cId="3348616141" sldId="2147483696"/>
+            <ac:spMk id="5" creationId="{00000000-0000-0000-0000-000000000000}"/>
+          </ac:spMkLst>
+        </pc:spChg>
+        <pc:spChg chg="mod">
+          <ac:chgData name="Gilbert, Neil" userId="37be9f5c-8f28-415b-96d6-624acf93bb3f" providerId="ADAL" clId="{18ED56B6-1921-416C-9A28-3F6F3C8390B5}" dt="2026-09-03T17:39:27.520" v="175"/>
+          <ac:spMkLst>
+            <pc:docMk/>
+            <pc:sldMasterMk cId="3348616141" sldId="2147483696"/>
+            <ac:spMk id="6" creationId="{00000000-0000-0000-0000-000000000000}"/>
+          </ac:spMkLst>
+        </pc:spChg>
+        <pc:sldLayoutChg chg="modSp">
+          <pc:chgData name="Gilbert, Neil" userId="37be9f5c-8f28-415b-96d6-624acf93bb3f" providerId="ADAL" clId="{18ED56B6-1921-416C-9A28-3F6F3C8390B5}" dt="2026-09-03T17:39:27.520" v="175"/>
+          <pc:sldLayoutMkLst>
+            <pc:docMk/>
+            <pc:sldMasterMk cId="3348616141" sldId="2147483696"/>
+            <pc:sldLayoutMk cId="3918660156" sldId="2147483697"/>
+          </pc:sldLayoutMkLst>
+          <pc:spChg chg="mod">
+            <ac:chgData name="Gilbert, Neil" userId="37be9f5c-8f28-415b-96d6-624acf93bb3f" providerId="ADAL" clId="{18ED56B6-1921-416C-9A28-3F6F3C8390B5}" dt="2026-09-03T17:39:27.520" v="175"/>
+            <ac:spMkLst>
+              <pc:docMk/>
+              <pc:sldMasterMk cId="3348616141" sldId="2147483696"/>
+              <pc:sldLayoutMk cId="3918660156" sldId="2147483697"/>
+              <ac:spMk id="2" creationId="{00000000-0000-0000-0000-000000000000}"/>
+            </ac:spMkLst>
+          </pc:spChg>
+          <pc:spChg chg="mod">
+            <ac:chgData name="Gilbert, Neil" userId="37be9f5c-8f28-415b-96d6-624acf93bb3f" providerId="ADAL" clId="{18ED56B6-1921-416C-9A28-3F6F3C8390B5}" dt="2026-09-03T17:39:27.520" v="175"/>
+            <ac:spMkLst>
+              <pc:docMk/>
+              <pc:sldMasterMk cId="3348616141" sldId="2147483696"/>
+              <pc:sldLayoutMk cId="3918660156" sldId="2147483697"/>
+              <ac:spMk id="3" creationId="{00000000-0000-0000-0000-000000000000}"/>
+            </ac:spMkLst>
+          </pc:spChg>
+        </pc:sldLayoutChg>
+        <pc:sldLayoutChg chg="modSp">
+          <pc:chgData name="Gilbert, Neil" userId="37be9f5c-8f28-415b-96d6-624acf93bb3f" providerId="ADAL" clId="{18ED56B6-1921-416C-9A28-3F6F3C8390B5}" dt="2026-09-03T17:39:27.520" v="175"/>
+          <pc:sldLayoutMkLst>
+            <pc:docMk/>
+            <pc:sldMasterMk cId="3348616141" sldId="2147483696"/>
+            <pc:sldLayoutMk cId="2654750959" sldId="2147483699"/>
+          </pc:sldLayoutMkLst>
+          <pc:spChg chg="mod">
+            <ac:chgData name="Gilbert, Neil" userId="37be9f5c-8f28-415b-96d6-624acf93bb3f" providerId="ADAL" clId="{18ED56B6-1921-416C-9A28-3F6F3C8390B5}" dt="2026-09-03T17:39:27.520" v="175"/>
+            <ac:spMkLst>
+              <pc:docMk/>
+              <pc:sldMasterMk cId="3348616141" sldId="2147483696"/>
+              <pc:sldLayoutMk cId="2654750959" sldId="2147483699"/>
+              <ac:spMk id="2" creationId="{00000000-0000-0000-0000-000000000000}"/>
+            </ac:spMkLst>
+          </pc:spChg>
+          <pc:spChg chg="mod">
+            <ac:chgData name="Gilbert, Neil" userId="37be9f5c-8f28-415b-96d6-624acf93bb3f" providerId="ADAL" clId="{18ED56B6-1921-416C-9A28-3F6F3C8390B5}" dt="2026-09-03T17:39:27.520" v="175"/>
+            <ac:spMkLst>
+              <pc:docMk/>
+              <pc:sldMasterMk cId="3348616141" sldId="2147483696"/>
+              <pc:sldLayoutMk cId="2654750959" sldId="2147483699"/>
+              <ac:spMk id="3" creationId="{00000000-0000-0000-0000-000000000000}"/>
+            </ac:spMkLst>
+          </pc:spChg>
+        </pc:sldLayoutChg>
+        <pc:sldLayoutChg chg="modSp">
+          <pc:chgData name="Gilbert, Neil" userId="37be9f5c-8f28-415b-96d6-624acf93bb3f" providerId="ADAL" clId="{18ED56B6-1921-416C-9A28-3F6F3C8390B5}" dt="2026-09-03T17:39:27.520" v="175"/>
+          <pc:sldLayoutMkLst>
+            <pc:docMk/>
+            <pc:sldMasterMk cId="3348616141" sldId="2147483696"/>
+            <pc:sldLayoutMk cId="453765560" sldId="2147483700"/>
+          </pc:sldLayoutMkLst>
+          <pc:spChg chg="mod">
+            <ac:chgData name="Gilbert, Neil" userId="37be9f5c-8f28-415b-96d6-624acf93bb3f" providerId="ADAL" clId="{18ED56B6-1921-416C-9A28-3F6F3C8390B5}" dt="2026-09-03T17:39:27.520" v="175"/>
+            <ac:spMkLst>
+              <pc:docMk/>
+              <pc:sldMasterMk cId="3348616141" sldId="2147483696"/>
+              <pc:sldLayoutMk cId="453765560" sldId="2147483700"/>
+              <ac:spMk id="3" creationId="{00000000-0000-0000-0000-000000000000}"/>
+            </ac:spMkLst>
+          </pc:spChg>
+          <pc:spChg chg="mod">
+            <ac:chgData name="Gilbert, Neil" userId="37be9f5c-8f28-415b-96d6-624acf93bb3f" providerId="ADAL" clId="{18ED56B6-1921-416C-9A28-3F6F3C8390B5}" dt="2026-09-03T17:39:27.520" v="175"/>
+            <ac:spMkLst>
+              <pc:docMk/>
+              <pc:sldMasterMk cId="3348616141" sldId="2147483696"/>
+              <pc:sldLayoutMk cId="453765560" sldId="2147483700"/>
+              <ac:spMk id="4" creationId="{00000000-0000-0000-0000-000000000000}"/>
+            </ac:spMkLst>
+          </pc:spChg>
+        </pc:sldLayoutChg>
+        <pc:sldLayoutChg chg="modSp">
+          <pc:chgData name="Gilbert, Neil" userId="37be9f5c-8f28-415b-96d6-624acf93bb3f" providerId="ADAL" clId="{18ED56B6-1921-416C-9A28-3F6F3C8390B5}" dt="2026-09-03T17:39:27.520" v="175"/>
+          <pc:sldLayoutMkLst>
+            <pc:docMk/>
+            <pc:sldMasterMk cId="3348616141" sldId="2147483696"/>
+            <pc:sldLayoutMk cId="282348633" sldId="2147483701"/>
+          </pc:sldLayoutMkLst>
+          <pc:spChg chg="mod">
+            <ac:chgData name="Gilbert, Neil" userId="37be9f5c-8f28-415b-96d6-624acf93bb3f" providerId="ADAL" clId="{18ED56B6-1921-416C-9A28-3F6F3C8390B5}" dt="2026-09-03T17:39:27.520" v="175"/>
+            <ac:spMkLst>
+              <pc:docMk/>
+              <pc:sldMasterMk cId="3348616141" sldId="2147483696"/>
+              <pc:sldLayoutMk cId="282348633" sldId="2147483701"/>
+              <ac:spMk id="2" creationId="{00000000-0000-0000-0000-000000000000}"/>
+            </ac:spMkLst>
+          </pc:spChg>
+          <pc:spChg chg="mod">
+            <ac:chgData name="Gilbert, Neil" userId="37be9f5c-8f28-415b-96d6-624acf93bb3f" providerId="ADAL" clId="{18ED56B6-1921-416C-9A28-3F6F3C8390B5}" dt="2026-09-03T17:39:27.520" v="175"/>
+            <ac:spMkLst>
+              <pc:docMk/>
+              <pc:sldMasterMk cId="3348616141" sldId="2147483696"/>
+              <pc:sldLayoutMk cId="282348633" sldId="2147483701"/>
+              <ac:spMk id="3" creationId="{00000000-0000-0000-0000-000000000000}"/>
+            </ac:spMkLst>
+          </pc:spChg>
+          <pc:spChg chg="mod">
+            <ac:chgData name="Gilbert, Neil" userId="37be9f5c-8f28-415b-96d6-624acf93bb3f" providerId="ADAL" clId="{18ED56B6-1921-416C-9A28-3F6F3C8390B5}" dt="2026-09-03T17:39:27.520" v="175"/>
+            <ac:spMkLst>
+              <pc:docMk/>
+              <pc:sldMasterMk cId="3348616141" sldId="2147483696"/>
+              <pc:sldLayoutMk cId="282348633" sldId="2147483701"/>
+              <ac:spMk id="4" creationId="{00000000-0000-0000-0000-000000000000}"/>
+            </ac:spMkLst>
+          </pc:spChg>
+          <pc:spChg chg="mod">
+            <ac:chgData name="Gilbert, Neil" userId="37be9f5c-8f28-415b-96d6-624acf93bb3f" providerId="ADAL" clId="{18ED56B6-1921-416C-9A28-3F6F3C8390B5}" dt="2026-09-03T17:39:27.520" v="175"/>
+            <ac:spMkLst>
+              <pc:docMk/>
+              <pc:sldMasterMk cId="3348616141" sldId="2147483696"/>
+              <pc:sldLayoutMk cId="282348633" sldId="2147483701"/>
+              <ac:spMk id="5" creationId="{00000000-0000-0000-0000-000000000000}"/>
+            </ac:spMkLst>
+          </pc:spChg>
+          <pc:spChg chg="mod">
+            <ac:chgData name="Gilbert, Neil" userId="37be9f5c-8f28-415b-96d6-624acf93bb3f" providerId="ADAL" clId="{18ED56B6-1921-416C-9A28-3F6F3C8390B5}" dt="2026-09-03T17:39:27.520" v="175"/>
+            <ac:spMkLst>
+              <pc:docMk/>
+              <pc:sldMasterMk cId="3348616141" sldId="2147483696"/>
+              <pc:sldLayoutMk cId="282348633" sldId="2147483701"/>
+              <ac:spMk id="6" creationId="{00000000-0000-0000-0000-000000000000}"/>
+            </ac:spMkLst>
+          </pc:spChg>
+        </pc:sldLayoutChg>
+        <pc:sldLayoutChg chg="modSp">
+          <pc:chgData name="Gilbert, Neil" userId="37be9f5c-8f28-415b-96d6-624acf93bb3f" providerId="ADAL" clId="{18ED56B6-1921-416C-9A28-3F6F3C8390B5}" dt="2026-09-03T17:39:27.520" v="175"/>
+          <pc:sldLayoutMkLst>
+            <pc:docMk/>
+            <pc:sldMasterMk cId="3348616141" sldId="2147483696"/>
+            <pc:sldLayoutMk cId="2812652376" sldId="2147483704"/>
+          </pc:sldLayoutMkLst>
+          <pc:spChg chg="mod">
+            <ac:chgData name="Gilbert, Neil" userId="37be9f5c-8f28-415b-96d6-624acf93bb3f" providerId="ADAL" clId="{18ED56B6-1921-416C-9A28-3F6F3C8390B5}" dt="2026-09-03T17:39:27.520" v="175"/>
+            <ac:spMkLst>
+              <pc:docMk/>
+              <pc:sldMasterMk cId="3348616141" sldId="2147483696"/>
+              <pc:sldLayoutMk cId="2812652376" sldId="2147483704"/>
+              <ac:spMk id="2" creationId="{00000000-0000-0000-0000-000000000000}"/>
+            </ac:spMkLst>
+          </pc:spChg>
+          <pc:spChg chg="mod">
+            <ac:chgData name="Gilbert, Neil" userId="37be9f5c-8f28-415b-96d6-624acf93bb3f" providerId="ADAL" clId="{18ED56B6-1921-416C-9A28-3F6F3C8390B5}" dt="2026-09-03T17:39:27.520" v="175"/>
+            <ac:spMkLst>
+              <pc:docMk/>
+              <pc:sldMasterMk cId="3348616141" sldId="2147483696"/>
+              <pc:sldLayoutMk cId="2812652376" sldId="2147483704"/>
+              <ac:spMk id="3" creationId="{00000000-0000-0000-0000-000000000000}"/>
+            </ac:spMkLst>
+          </pc:spChg>
+          <pc:spChg chg="mod">
+            <ac:chgData name="Gilbert, Neil" userId="37be9f5c-8f28-415b-96d6-624acf93bb3f" providerId="ADAL" clId="{18ED56B6-1921-416C-9A28-3F6F3C8390B5}" dt="2026-09-03T17:39:27.520" v="175"/>
+            <ac:spMkLst>
+              <pc:docMk/>
+              <pc:sldMasterMk cId="3348616141" sldId="2147483696"/>
+              <pc:sldLayoutMk cId="2812652376" sldId="2147483704"/>
+              <ac:spMk id="4" creationId="{00000000-0000-0000-0000-000000000000}"/>
+            </ac:spMkLst>
+          </pc:spChg>
+        </pc:sldLayoutChg>
+        <pc:sldLayoutChg chg="modSp">
+          <pc:chgData name="Gilbert, Neil" userId="37be9f5c-8f28-415b-96d6-624acf93bb3f" providerId="ADAL" clId="{18ED56B6-1921-416C-9A28-3F6F3C8390B5}" dt="2026-09-03T17:39:27.520" v="175"/>
+          <pc:sldLayoutMkLst>
+            <pc:docMk/>
+            <pc:sldMasterMk cId="3348616141" sldId="2147483696"/>
+            <pc:sldLayoutMk cId="752102783" sldId="2147483705"/>
+          </pc:sldLayoutMkLst>
+          <pc:spChg chg="mod">
+            <ac:chgData name="Gilbert, Neil" userId="37be9f5c-8f28-415b-96d6-624acf93bb3f" providerId="ADAL" clId="{18ED56B6-1921-416C-9A28-3F6F3C8390B5}" dt="2026-09-03T17:39:27.520" v="175"/>
+            <ac:spMkLst>
+              <pc:docMk/>
+              <pc:sldMasterMk cId="3348616141" sldId="2147483696"/>
+              <pc:sldLayoutMk cId="752102783" sldId="2147483705"/>
+              <ac:spMk id="2" creationId="{00000000-0000-0000-0000-000000000000}"/>
+            </ac:spMkLst>
+          </pc:spChg>
+          <pc:spChg chg="mod">
+            <ac:chgData name="Gilbert, Neil" userId="37be9f5c-8f28-415b-96d6-624acf93bb3f" providerId="ADAL" clId="{18ED56B6-1921-416C-9A28-3F6F3C8390B5}" dt="2026-09-03T17:39:27.520" v="175"/>
+            <ac:spMkLst>
+              <pc:docMk/>
+              <pc:sldMasterMk cId="3348616141" sldId="2147483696"/>
+              <pc:sldLayoutMk cId="752102783" sldId="2147483705"/>
+              <ac:spMk id="3" creationId="{00000000-0000-0000-0000-000000000000}"/>
+            </ac:spMkLst>
+          </pc:spChg>
+          <pc:spChg chg="mod">
+            <ac:chgData name="Gilbert, Neil" userId="37be9f5c-8f28-415b-96d6-624acf93bb3f" providerId="ADAL" clId="{18ED56B6-1921-416C-9A28-3F6F3C8390B5}" dt="2026-09-03T17:39:27.520" v="175"/>
+            <ac:spMkLst>
+              <pc:docMk/>
+              <pc:sldMasterMk cId="3348616141" sldId="2147483696"/>
+              <pc:sldLayoutMk cId="752102783" sldId="2147483705"/>
+              <ac:spMk id="4" creationId="{00000000-0000-0000-0000-000000000000}"/>
+            </ac:spMkLst>
+          </pc:spChg>
+        </pc:sldLayoutChg>
+        <pc:sldLayoutChg chg="modSp">
+          <pc:chgData name="Gilbert, Neil" userId="37be9f5c-8f28-415b-96d6-624acf93bb3f" providerId="ADAL" clId="{18ED56B6-1921-416C-9A28-3F6F3C8390B5}" dt="2026-09-03T17:39:27.520" v="175"/>
+          <pc:sldLayoutMkLst>
+            <pc:docMk/>
+            <pc:sldMasterMk cId="3348616141" sldId="2147483696"/>
+            <pc:sldLayoutMk cId="1633056759" sldId="2147483707"/>
+          </pc:sldLayoutMkLst>
+          <pc:spChg chg="mod">
+            <ac:chgData name="Gilbert, Neil" userId="37be9f5c-8f28-415b-96d6-624acf93bb3f" providerId="ADAL" clId="{18ED56B6-1921-416C-9A28-3F6F3C8390B5}" dt="2026-09-03T17:39:27.520" v="175"/>
+            <ac:spMkLst>
+              <pc:docMk/>
+              <pc:sldMasterMk cId="3348616141" sldId="2147483696"/>
+              <pc:sldLayoutMk cId="1633056759" sldId="2147483707"/>
+              <ac:spMk id="2" creationId="{00000000-0000-0000-0000-000000000000}"/>
+            </ac:spMkLst>
+          </pc:spChg>
+          <pc:spChg chg="mod">
+            <ac:chgData name="Gilbert, Neil" userId="37be9f5c-8f28-415b-96d6-624acf93bb3f" providerId="ADAL" clId="{18ED56B6-1921-416C-9A28-3F6F3C8390B5}" dt="2026-09-03T17:39:27.520" v="175"/>
+            <ac:spMkLst>
+              <pc:docMk/>
+              <pc:sldMasterMk cId="3348616141" sldId="2147483696"/>
+              <pc:sldLayoutMk cId="1633056759" sldId="2147483707"/>
+              <ac:spMk id="3" creationId="{00000000-0000-0000-0000-000000000000}"/>
+            </ac:spMkLst>
+          </pc:spChg>
+        </pc:sldLayoutChg>
+      </pc:sldMasterChg>
     </pc:docChg>
   </pc:docChgLst>
 </pc:chgInfo>
@@ -234,15 +1220,15 @@
         </p:nvSpPr>
         <p:spPr>
           <a:xfrm>
-            <a:off x="342900" y="823066"/>
-            <a:ext cx="3886200" cy="1750907"/>
+            <a:off x="354568" y="838135"/>
+            <a:ext cx="4018439" cy="1782962"/>
           </a:xfrm>
         </p:spPr>
         <p:txBody>
           <a:bodyPr anchor="b"/>
           <a:lstStyle>
             <a:lvl1pPr algn="ctr">
-              <a:defRPr sz="3000"/>
+              <a:defRPr sz="3102"/>
             </a:lvl1pPr>
           </a:lstStyle>
           <a:p>
@@ -266,8 +1252,8 @@
         </p:nvSpPr>
         <p:spPr>
           <a:xfrm>
-            <a:off x="571500" y="2641495"/>
-            <a:ext cx="3429000" cy="1214225"/>
+            <a:off x="590947" y="2689855"/>
+            <a:ext cx="3545681" cy="1236456"/>
           </a:xfrm>
         </p:spPr>
         <p:txBody>
@@ -275,39 +1261,39 @@
           <a:lstStyle>
             <a:lvl1pPr marL="0" indent="0" algn="ctr">
               <a:buNone/>
-              <a:defRPr sz="1200"/>
+              <a:defRPr sz="1241"/>
             </a:lvl1pPr>
-            <a:lvl2pPr marL="228600" indent="0" algn="ctr">
-              <a:buNone/>
-              <a:defRPr sz="1000"/>
+            <a:lvl2pPr marL="236372" indent="0" algn="ctr">
+              <a:buNone/>
+              <a:defRPr sz="1034"/>
             </a:lvl2pPr>
-            <a:lvl3pPr marL="457200" indent="0" algn="ctr">
-              <a:buNone/>
-              <a:defRPr sz="900"/>
+            <a:lvl3pPr marL="472745" indent="0" algn="ctr">
+              <a:buNone/>
+              <a:defRPr sz="931"/>
             </a:lvl3pPr>
-            <a:lvl4pPr marL="685800" indent="0" algn="ctr">
-              <a:buNone/>
-              <a:defRPr sz="800"/>
+            <a:lvl4pPr marL="709117" indent="0" algn="ctr">
+              <a:buNone/>
+              <a:defRPr sz="827"/>
             </a:lvl4pPr>
-            <a:lvl5pPr marL="914400" indent="0" algn="ctr">
-              <a:buNone/>
-              <a:defRPr sz="800"/>
+            <a:lvl5pPr marL="945490" indent="0" algn="ctr">
+              <a:buNone/>
+              <a:defRPr sz="827"/>
             </a:lvl5pPr>
-            <a:lvl6pPr marL="1143000" indent="0" algn="ctr">
-              <a:buNone/>
-              <a:defRPr sz="800"/>
+            <a:lvl6pPr marL="1181862" indent="0" algn="ctr">
+              <a:buNone/>
+              <a:defRPr sz="827"/>
             </a:lvl6pPr>
-            <a:lvl7pPr marL="1371600" indent="0" algn="ctr">
-              <a:buNone/>
-              <a:defRPr sz="800"/>
+            <a:lvl7pPr marL="1418234" indent="0" algn="ctr">
+              <a:buNone/>
+              <a:defRPr sz="827"/>
             </a:lvl7pPr>
-            <a:lvl8pPr marL="1600200" indent="0" algn="ctr">
-              <a:buNone/>
-              <a:defRPr sz="800"/>
+            <a:lvl8pPr marL="1654607" indent="0" algn="ctr">
+              <a:buNone/>
+              <a:defRPr sz="827"/>
             </a:lvl8pPr>
-            <a:lvl9pPr marL="1828800" indent="0" algn="ctr">
-              <a:buNone/>
-              <a:defRPr sz="800"/>
+            <a:lvl9pPr marL="1890979" indent="0" algn="ctr">
+              <a:buNone/>
+              <a:defRPr sz="827"/>
             </a:lvl9pPr>
           </a:lstStyle>
           <a:p>
@@ -336,7 +1322,7 @@
           <a:p>
             <a:fld id="{BDE2A46F-7BDB-4139-9993-9E5D6C6B5509}" type="datetimeFigureOut">
               <a:rPr lang="en-US" smtClean="0"/>
-              <a:t>8/12/2026</a:t>
+              <a:t>9/3/2026</a:t>
             </a:fld>
             <a:endParaRPr lang="en-US"/>
           </a:p>
@@ -387,7 +1373,7 @@
     </p:spTree>
     <p:extLst>
       <p:ext uri="{BB962C8B-B14F-4D97-AF65-F5344CB8AC3E}">
-        <p14:creationId xmlns:p14="http://schemas.microsoft.com/office/powerpoint/2010/main" val="581302873"/>
+        <p14:creationId xmlns:p14="http://schemas.microsoft.com/office/powerpoint/2010/main" val="4064904503"/>
       </p:ext>
     </p:extLst>
   </p:cSld>
@@ -506,7 +1492,7 @@
           <a:p>
             <a:fld id="{BDE2A46F-7BDB-4139-9993-9E5D6C6B5509}" type="datetimeFigureOut">
               <a:rPr lang="en-US" smtClean="0"/>
-              <a:t>8/12/2026</a:t>
+              <a:t>9/3/2026</a:t>
             </a:fld>
             <a:endParaRPr lang="en-US"/>
           </a:p>
@@ -557,7 +1543,7 @@
     </p:spTree>
     <p:extLst>
       <p:ext uri="{BB962C8B-B14F-4D97-AF65-F5344CB8AC3E}">
-        <p14:creationId xmlns:p14="http://schemas.microsoft.com/office/powerpoint/2010/main" val="4058715844"/>
+        <p14:creationId xmlns:p14="http://schemas.microsoft.com/office/powerpoint/2010/main" val="3150818904"/>
       </p:ext>
     </p:extLst>
   </p:cSld>
@@ -596,8 +1582,8 @@
         </p:nvSpPr>
         <p:spPr>
           <a:xfrm>
-            <a:off x="3271838" y="267758"/>
-            <a:ext cx="985838" cy="4262015"/>
+            <a:off x="3383171" y="272660"/>
+            <a:ext cx="1019383" cy="4340044"/>
           </a:xfrm>
         </p:spPr>
         <p:txBody>
@@ -624,8 +1610,8 @@
         </p:nvSpPr>
         <p:spPr>
           <a:xfrm>
-            <a:off x="314325" y="267758"/>
-            <a:ext cx="2900363" cy="4262015"/>
+            <a:off x="325021" y="272660"/>
+            <a:ext cx="2999055" cy="4340044"/>
           </a:xfrm>
         </p:spPr>
         <p:txBody>
@@ -686,7 +1672,7 @@
           <a:p>
             <a:fld id="{BDE2A46F-7BDB-4139-9993-9E5D6C6B5509}" type="datetimeFigureOut">
               <a:rPr lang="en-US" smtClean="0"/>
-              <a:t>8/12/2026</a:t>
+              <a:t>9/3/2026</a:t>
             </a:fld>
             <a:endParaRPr lang="en-US"/>
           </a:p>
@@ -737,7 +1723,7 @@
     </p:spTree>
     <p:extLst>
       <p:ext uri="{BB962C8B-B14F-4D97-AF65-F5344CB8AC3E}">
-        <p14:creationId xmlns:p14="http://schemas.microsoft.com/office/powerpoint/2010/main" val="217884959"/>
+        <p14:creationId xmlns:p14="http://schemas.microsoft.com/office/powerpoint/2010/main" val="2569556904"/>
       </p:ext>
     </p:extLst>
   </p:cSld>
@@ -856,7 +1842,7 @@
           <a:p>
             <a:fld id="{BDE2A46F-7BDB-4139-9993-9E5D6C6B5509}" type="datetimeFigureOut">
               <a:rPr lang="en-US" smtClean="0"/>
-              <a:t>8/12/2026</a:t>
+              <a:t>9/3/2026</a:t>
             </a:fld>
             <a:endParaRPr lang="en-US"/>
           </a:p>
@@ -907,7 +1893,7 @@
     </p:spTree>
     <p:extLst>
       <p:ext uri="{BB962C8B-B14F-4D97-AF65-F5344CB8AC3E}">
-        <p14:creationId xmlns:p14="http://schemas.microsoft.com/office/powerpoint/2010/main" val="2438942113"/>
+        <p14:creationId xmlns:p14="http://schemas.microsoft.com/office/powerpoint/2010/main" val="2908323036"/>
       </p:ext>
     </p:extLst>
   </p:cSld>
@@ -946,15 +1932,15 @@
         </p:nvSpPr>
         <p:spPr>
           <a:xfrm>
-            <a:off x="311944" y="1253809"/>
-            <a:ext cx="3943350" cy="2092007"/>
+            <a:off x="322559" y="1276764"/>
+            <a:ext cx="4077533" cy="2130308"/>
           </a:xfrm>
         </p:spPr>
         <p:txBody>
           <a:bodyPr anchor="b"/>
           <a:lstStyle>
             <a:lvl1pPr>
-              <a:defRPr sz="3000"/>
+              <a:defRPr sz="3102"/>
             </a:lvl1pPr>
           </a:lstStyle>
           <a:p>
@@ -978,8 +1964,8 @@
         </p:nvSpPr>
         <p:spPr>
           <a:xfrm>
-            <a:off x="311944" y="3365607"/>
-            <a:ext cx="3943350" cy="1100137"/>
+            <a:off x="322559" y="3427225"/>
+            <a:ext cx="4077533" cy="1120279"/>
           </a:xfrm>
         </p:spPr>
         <p:txBody>
@@ -987,7 +1973,7 @@
           <a:lstStyle>
             <a:lvl1pPr marL="0" indent="0">
               <a:buNone/>
-              <a:defRPr sz="1200">
+              <a:defRPr sz="1241">
                 <a:solidFill>
                   <a:schemeClr val="tx1">
                     <a:tint val="82000"/>
@@ -995,9 +1981,9 @@
                 </a:solidFill>
               </a:defRPr>
             </a:lvl1pPr>
-            <a:lvl2pPr marL="228600" indent="0">
-              <a:buNone/>
-              <a:defRPr sz="1000">
+            <a:lvl2pPr marL="236372" indent="0">
+              <a:buNone/>
+              <a:defRPr sz="1034">
                 <a:solidFill>
                   <a:schemeClr val="tx1">
                     <a:tint val="82000"/>
@@ -1005,9 +1991,9 @@
                 </a:solidFill>
               </a:defRPr>
             </a:lvl2pPr>
-            <a:lvl3pPr marL="457200" indent="0">
-              <a:buNone/>
-              <a:defRPr sz="900">
+            <a:lvl3pPr marL="472745" indent="0">
+              <a:buNone/>
+              <a:defRPr sz="931">
                 <a:solidFill>
                   <a:schemeClr val="tx1">
                     <a:tint val="82000"/>
@@ -1015,9 +2001,9 @@
                 </a:solidFill>
               </a:defRPr>
             </a:lvl3pPr>
-            <a:lvl4pPr marL="685800" indent="0">
-              <a:buNone/>
-              <a:defRPr sz="800">
+            <a:lvl4pPr marL="709117" indent="0">
+              <a:buNone/>
+              <a:defRPr sz="827">
                 <a:solidFill>
                   <a:schemeClr val="tx1">
                     <a:tint val="82000"/>
@@ -1025,9 +2011,9 @@
                 </a:solidFill>
               </a:defRPr>
             </a:lvl4pPr>
-            <a:lvl5pPr marL="914400" indent="0">
-              <a:buNone/>
-              <a:defRPr sz="800">
+            <a:lvl5pPr marL="945490" indent="0">
+              <a:buNone/>
+              <a:defRPr sz="827">
                 <a:solidFill>
                   <a:schemeClr val="tx1">
                     <a:tint val="82000"/>
@@ -1035,9 +2021,9 @@
                 </a:solidFill>
               </a:defRPr>
             </a:lvl5pPr>
-            <a:lvl6pPr marL="1143000" indent="0">
-              <a:buNone/>
-              <a:defRPr sz="800">
+            <a:lvl6pPr marL="1181862" indent="0">
+              <a:buNone/>
+              <a:defRPr sz="827">
                 <a:solidFill>
                   <a:schemeClr val="tx1">
                     <a:tint val="82000"/>
@@ -1045,9 +2031,9 @@
                 </a:solidFill>
               </a:defRPr>
             </a:lvl6pPr>
-            <a:lvl7pPr marL="1371600" indent="0">
-              <a:buNone/>
-              <a:defRPr sz="800">
+            <a:lvl7pPr marL="1418234" indent="0">
+              <a:buNone/>
+              <a:defRPr sz="827">
                 <a:solidFill>
                   <a:schemeClr val="tx1">
                     <a:tint val="82000"/>
@@ -1055,9 +2041,9 @@
                 </a:solidFill>
               </a:defRPr>
             </a:lvl7pPr>
-            <a:lvl8pPr marL="1600200" indent="0">
-              <a:buNone/>
-              <a:defRPr sz="800">
+            <a:lvl8pPr marL="1654607" indent="0">
+              <a:buNone/>
+              <a:defRPr sz="827">
                 <a:solidFill>
                   <a:schemeClr val="tx1">
                     <a:tint val="82000"/>
@@ -1065,9 +2051,9 @@
                 </a:solidFill>
               </a:defRPr>
             </a:lvl8pPr>
-            <a:lvl9pPr marL="1828800" indent="0">
-              <a:buNone/>
-              <a:defRPr sz="800">
+            <a:lvl9pPr marL="1890979" indent="0">
+              <a:buNone/>
+              <a:defRPr sz="827">
                 <a:solidFill>
                   <a:schemeClr val="tx1">
                     <a:tint val="82000"/>
@@ -1102,7 +2088,7 @@
           <a:p>
             <a:fld id="{BDE2A46F-7BDB-4139-9993-9E5D6C6B5509}" type="datetimeFigureOut">
               <a:rPr lang="en-US" smtClean="0"/>
-              <a:t>8/12/2026</a:t>
+              <a:t>9/3/2026</a:t>
             </a:fld>
             <a:endParaRPr lang="en-US"/>
           </a:p>
@@ -1153,7 +2139,7 @@
     </p:spTree>
     <p:extLst>
       <p:ext uri="{BB962C8B-B14F-4D97-AF65-F5344CB8AC3E}">
-        <p14:creationId xmlns:p14="http://schemas.microsoft.com/office/powerpoint/2010/main" val="1358867512"/>
+        <p14:creationId xmlns:p14="http://schemas.microsoft.com/office/powerpoint/2010/main" val="3205403968"/>
       </p:ext>
     </p:extLst>
   </p:cSld>
@@ -1215,8 +2201,8 @@
         </p:nvSpPr>
         <p:spPr>
           <a:xfrm>
-            <a:off x="314325" y="1338792"/>
-            <a:ext cx="1943100" cy="3190981"/>
+            <a:off x="325021" y="1363302"/>
+            <a:ext cx="2009219" cy="3249402"/>
           </a:xfrm>
         </p:spPr>
         <p:txBody>
@@ -1272,8 +2258,8 @@
         </p:nvSpPr>
         <p:spPr>
           <a:xfrm>
-            <a:off x="2314575" y="1338792"/>
-            <a:ext cx="1943100" cy="3190981"/>
+            <a:off x="2393335" y="1363302"/>
+            <a:ext cx="2009219" cy="3249402"/>
           </a:xfrm>
         </p:spPr>
         <p:txBody>
@@ -1334,7 +2320,7 @@
           <a:p>
             <a:fld id="{BDE2A46F-7BDB-4139-9993-9E5D6C6B5509}" type="datetimeFigureOut">
               <a:rPr lang="en-US" smtClean="0"/>
-              <a:t>8/12/2026</a:t>
+              <a:t>9/3/2026</a:t>
             </a:fld>
             <a:endParaRPr lang="en-US"/>
           </a:p>
@@ -1385,7 +2371,7 @@
     </p:spTree>
     <p:extLst>
       <p:ext uri="{BB962C8B-B14F-4D97-AF65-F5344CB8AC3E}">
-        <p14:creationId xmlns:p14="http://schemas.microsoft.com/office/powerpoint/2010/main" val="3014287862"/>
+        <p14:creationId xmlns:p14="http://schemas.microsoft.com/office/powerpoint/2010/main" val="2065986210"/>
       </p:ext>
     </p:extLst>
   </p:cSld>
@@ -1424,8 +2410,8 @@
         </p:nvSpPr>
         <p:spPr>
           <a:xfrm>
-            <a:off x="314921" y="267759"/>
-            <a:ext cx="3943350" cy="972080"/>
+            <a:off x="325637" y="272662"/>
+            <a:ext cx="4077533" cy="989876"/>
           </a:xfrm>
         </p:spPr>
         <p:txBody>
@@ -1452,8 +2438,8 @@
         </p:nvSpPr>
         <p:spPr>
           <a:xfrm>
-            <a:off x="314921" y="1232853"/>
-            <a:ext cx="1934170" cy="604202"/>
+            <a:off x="325637" y="1255424"/>
+            <a:ext cx="1999986" cy="615264"/>
           </a:xfrm>
         </p:spPr>
         <p:txBody>
@@ -1461,39 +2447,39 @@
           <a:lstStyle>
             <a:lvl1pPr marL="0" indent="0">
               <a:buNone/>
-              <a:defRPr sz="1200" b="1"/>
+              <a:defRPr sz="1241" b="1"/>
             </a:lvl1pPr>
-            <a:lvl2pPr marL="228600" indent="0">
-              <a:buNone/>
-              <a:defRPr sz="1000" b="1"/>
+            <a:lvl2pPr marL="236372" indent="0">
+              <a:buNone/>
+              <a:defRPr sz="1034" b="1"/>
             </a:lvl2pPr>
-            <a:lvl3pPr marL="457200" indent="0">
-              <a:buNone/>
-              <a:defRPr sz="900" b="1"/>
+            <a:lvl3pPr marL="472745" indent="0">
+              <a:buNone/>
+              <a:defRPr sz="931" b="1"/>
             </a:lvl3pPr>
-            <a:lvl4pPr marL="685800" indent="0">
-              <a:buNone/>
-              <a:defRPr sz="800" b="1"/>
+            <a:lvl4pPr marL="709117" indent="0">
+              <a:buNone/>
+              <a:defRPr sz="827" b="1"/>
             </a:lvl4pPr>
-            <a:lvl5pPr marL="914400" indent="0">
-              <a:buNone/>
-              <a:defRPr sz="800" b="1"/>
+            <a:lvl5pPr marL="945490" indent="0">
+              <a:buNone/>
+              <a:defRPr sz="827" b="1"/>
             </a:lvl5pPr>
-            <a:lvl6pPr marL="1143000" indent="0">
-              <a:buNone/>
-              <a:defRPr sz="800" b="1"/>
+            <a:lvl6pPr marL="1181862" indent="0">
+              <a:buNone/>
+              <a:defRPr sz="827" b="1"/>
             </a:lvl6pPr>
-            <a:lvl7pPr marL="1371600" indent="0">
-              <a:buNone/>
-              <a:defRPr sz="800" b="1"/>
+            <a:lvl7pPr marL="1418234" indent="0">
+              <a:buNone/>
+              <a:defRPr sz="827" b="1"/>
             </a:lvl7pPr>
-            <a:lvl8pPr marL="1600200" indent="0">
-              <a:buNone/>
-              <a:defRPr sz="800" b="1"/>
+            <a:lvl8pPr marL="1654607" indent="0">
+              <a:buNone/>
+              <a:defRPr sz="827" b="1"/>
             </a:lvl8pPr>
-            <a:lvl9pPr marL="1828800" indent="0">
-              <a:buNone/>
-              <a:defRPr sz="800" b="1"/>
+            <a:lvl9pPr marL="1890979" indent="0">
+              <a:buNone/>
+              <a:defRPr sz="827" b="1"/>
             </a:lvl9pPr>
           </a:lstStyle>
           <a:p>
@@ -1517,8 +2503,8 @@
         </p:nvSpPr>
         <p:spPr>
           <a:xfrm>
-            <a:off x="314921" y="1837055"/>
-            <a:ext cx="1934170" cy="2702031"/>
+            <a:off x="325637" y="1870688"/>
+            <a:ext cx="1999986" cy="2751500"/>
           </a:xfrm>
         </p:spPr>
         <p:txBody>
@@ -1574,8 +2560,8 @@
         </p:nvSpPr>
         <p:spPr>
           <a:xfrm>
-            <a:off x="2314575" y="1232853"/>
-            <a:ext cx="1943696" cy="604202"/>
+            <a:off x="2393335" y="1255424"/>
+            <a:ext cx="2009835" cy="615264"/>
           </a:xfrm>
         </p:spPr>
         <p:txBody>
@@ -1583,39 +2569,39 @@
           <a:lstStyle>
             <a:lvl1pPr marL="0" indent="0">
               <a:buNone/>
-              <a:defRPr sz="1200" b="1"/>
+              <a:defRPr sz="1241" b="1"/>
             </a:lvl1pPr>
-            <a:lvl2pPr marL="228600" indent="0">
-              <a:buNone/>
-              <a:defRPr sz="1000" b="1"/>
+            <a:lvl2pPr marL="236372" indent="0">
+              <a:buNone/>
+              <a:defRPr sz="1034" b="1"/>
             </a:lvl2pPr>
-            <a:lvl3pPr marL="457200" indent="0">
-              <a:buNone/>
-              <a:defRPr sz="900" b="1"/>
+            <a:lvl3pPr marL="472745" indent="0">
+              <a:buNone/>
+              <a:defRPr sz="931" b="1"/>
             </a:lvl3pPr>
-            <a:lvl4pPr marL="685800" indent="0">
-              <a:buNone/>
-              <a:defRPr sz="800" b="1"/>
+            <a:lvl4pPr marL="709117" indent="0">
+              <a:buNone/>
+              <a:defRPr sz="827" b="1"/>
             </a:lvl4pPr>
-            <a:lvl5pPr marL="914400" indent="0">
-              <a:buNone/>
-              <a:defRPr sz="800" b="1"/>
+            <a:lvl5pPr marL="945490" indent="0">
+              <a:buNone/>
+              <a:defRPr sz="827" b="1"/>
             </a:lvl5pPr>
-            <a:lvl6pPr marL="1143000" indent="0">
-              <a:buNone/>
-              <a:defRPr sz="800" b="1"/>
+            <a:lvl6pPr marL="1181862" indent="0">
+              <a:buNone/>
+              <a:defRPr sz="827" b="1"/>
             </a:lvl6pPr>
-            <a:lvl7pPr marL="1371600" indent="0">
-              <a:buNone/>
-              <a:defRPr sz="800" b="1"/>
+            <a:lvl7pPr marL="1418234" indent="0">
+              <a:buNone/>
+              <a:defRPr sz="827" b="1"/>
             </a:lvl7pPr>
-            <a:lvl8pPr marL="1600200" indent="0">
-              <a:buNone/>
-              <a:defRPr sz="800" b="1"/>
+            <a:lvl8pPr marL="1654607" indent="0">
+              <a:buNone/>
+              <a:defRPr sz="827" b="1"/>
             </a:lvl8pPr>
-            <a:lvl9pPr marL="1828800" indent="0">
-              <a:buNone/>
-              <a:defRPr sz="800" b="1"/>
+            <a:lvl9pPr marL="1890979" indent="0">
+              <a:buNone/>
+              <a:defRPr sz="827" b="1"/>
             </a:lvl9pPr>
           </a:lstStyle>
           <a:p>
@@ -1639,8 +2625,8 @@
         </p:nvSpPr>
         <p:spPr>
           <a:xfrm>
-            <a:off x="2314575" y="1837055"/>
-            <a:ext cx="1943696" cy="2702031"/>
+            <a:off x="2393335" y="1870688"/>
+            <a:ext cx="2009835" cy="2751500"/>
           </a:xfrm>
         </p:spPr>
         <p:txBody>
@@ -1701,7 +2687,7 @@
           <a:p>
             <a:fld id="{BDE2A46F-7BDB-4139-9993-9E5D6C6B5509}" type="datetimeFigureOut">
               <a:rPr lang="en-US" smtClean="0"/>
-              <a:t>8/12/2026</a:t>
+              <a:t>9/3/2026</a:t>
             </a:fld>
             <a:endParaRPr lang="en-US"/>
           </a:p>
@@ -1752,7 +2738,7 @@
     </p:spTree>
     <p:extLst>
       <p:ext uri="{BB962C8B-B14F-4D97-AF65-F5344CB8AC3E}">
-        <p14:creationId xmlns:p14="http://schemas.microsoft.com/office/powerpoint/2010/main" val="3878452572"/>
+        <p14:creationId xmlns:p14="http://schemas.microsoft.com/office/powerpoint/2010/main" val="1538098148"/>
       </p:ext>
     </p:extLst>
   </p:cSld>
@@ -1819,7 +2805,7 @@
           <a:p>
             <a:fld id="{BDE2A46F-7BDB-4139-9993-9E5D6C6B5509}" type="datetimeFigureOut">
               <a:rPr lang="en-US" smtClean="0"/>
-              <a:t>8/12/2026</a:t>
+              <a:t>9/3/2026</a:t>
             </a:fld>
             <a:endParaRPr lang="en-US"/>
           </a:p>
@@ -1870,7 +2856,7 @@
     </p:spTree>
     <p:extLst>
       <p:ext uri="{BB962C8B-B14F-4D97-AF65-F5344CB8AC3E}">
-        <p14:creationId xmlns:p14="http://schemas.microsoft.com/office/powerpoint/2010/main" val="1696614255"/>
+        <p14:creationId xmlns:p14="http://schemas.microsoft.com/office/powerpoint/2010/main" val="3902473901"/>
       </p:ext>
     </p:extLst>
   </p:cSld>
@@ -1914,7 +2900,7 @@
           <a:p>
             <a:fld id="{BDE2A46F-7BDB-4139-9993-9E5D6C6B5509}" type="datetimeFigureOut">
               <a:rPr lang="en-US" smtClean="0"/>
-              <a:t>8/12/2026</a:t>
+              <a:t>9/3/2026</a:t>
             </a:fld>
             <a:endParaRPr lang="en-US"/>
           </a:p>
@@ -1965,7 +2951,7 @@
     </p:spTree>
     <p:extLst>
       <p:ext uri="{BB962C8B-B14F-4D97-AF65-F5344CB8AC3E}">
-        <p14:creationId xmlns:p14="http://schemas.microsoft.com/office/powerpoint/2010/main" val="1162558529"/>
+        <p14:creationId xmlns:p14="http://schemas.microsoft.com/office/powerpoint/2010/main" val="2392989601"/>
       </p:ext>
     </p:extLst>
   </p:cSld>
@@ -2004,15 +2990,15 @@
         </p:nvSpPr>
         <p:spPr>
           <a:xfrm>
-            <a:off x="314921" y="335280"/>
-            <a:ext cx="1474589" cy="1173480"/>
+            <a:off x="325637" y="341418"/>
+            <a:ext cx="1524766" cy="1194964"/>
           </a:xfrm>
         </p:spPr>
         <p:txBody>
           <a:bodyPr anchor="b"/>
           <a:lstStyle>
             <a:lvl1pPr>
-              <a:defRPr sz="1600"/>
+              <a:defRPr sz="1654"/>
             </a:lvl1pPr>
           </a:lstStyle>
           <a:p>
@@ -2036,39 +3022,39 @@
         </p:nvSpPr>
         <p:spPr>
           <a:xfrm>
-            <a:off x="1943695" y="724113"/>
-            <a:ext cx="2314575" cy="3573992"/>
+            <a:off x="2009835" y="737370"/>
+            <a:ext cx="2393335" cy="3639425"/>
           </a:xfrm>
         </p:spPr>
         <p:txBody>
           <a:bodyPr/>
           <a:lstStyle>
             <a:lvl1pPr>
-              <a:defRPr sz="1600"/>
+              <a:defRPr sz="1654"/>
             </a:lvl1pPr>
             <a:lvl2pPr>
-              <a:defRPr sz="1400"/>
+              <a:defRPr sz="1448"/>
             </a:lvl2pPr>
             <a:lvl3pPr>
-              <a:defRPr sz="1200"/>
+              <a:defRPr sz="1241"/>
             </a:lvl3pPr>
             <a:lvl4pPr>
-              <a:defRPr sz="1000"/>
+              <a:defRPr sz="1034"/>
             </a:lvl4pPr>
             <a:lvl5pPr>
-              <a:defRPr sz="1000"/>
+              <a:defRPr sz="1034"/>
             </a:lvl5pPr>
             <a:lvl6pPr>
-              <a:defRPr sz="1000"/>
+              <a:defRPr sz="1034"/>
             </a:lvl6pPr>
             <a:lvl7pPr>
-              <a:defRPr sz="1000"/>
+              <a:defRPr sz="1034"/>
             </a:lvl7pPr>
             <a:lvl8pPr>
-              <a:defRPr sz="1000"/>
+              <a:defRPr sz="1034"/>
             </a:lvl8pPr>
             <a:lvl9pPr>
-              <a:defRPr sz="1000"/>
+              <a:defRPr sz="1034"/>
             </a:lvl9pPr>
           </a:lstStyle>
           <a:p>
@@ -2121,8 +3107,8 @@
         </p:nvSpPr>
         <p:spPr>
           <a:xfrm>
-            <a:off x="314921" y="1508760"/>
-            <a:ext cx="1474589" cy="2795165"/>
+            <a:off x="325637" y="1536382"/>
+            <a:ext cx="1524766" cy="2846339"/>
           </a:xfrm>
         </p:spPr>
         <p:txBody>
@@ -2130,39 +3116,39 @@
           <a:lstStyle>
             <a:lvl1pPr marL="0" indent="0">
               <a:buNone/>
-              <a:defRPr sz="800"/>
+              <a:defRPr sz="827"/>
             </a:lvl1pPr>
-            <a:lvl2pPr marL="228600" indent="0">
-              <a:buNone/>
-              <a:defRPr sz="700"/>
+            <a:lvl2pPr marL="236372" indent="0">
+              <a:buNone/>
+              <a:defRPr sz="724"/>
             </a:lvl2pPr>
-            <a:lvl3pPr marL="457200" indent="0">
-              <a:buNone/>
-              <a:defRPr sz="600"/>
+            <a:lvl3pPr marL="472745" indent="0">
+              <a:buNone/>
+              <a:defRPr sz="620"/>
             </a:lvl3pPr>
-            <a:lvl4pPr marL="685800" indent="0">
-              <a:buNone/>
-              <a:defRPr sz="500"/>
+            <a:lvl4pPr marL="709117" indent="0">
+              <a:buNone/>
+              <a:defRPr sz="517"/>
             </a:lvl4pPr>
-            <a:lvl5pPr marL="914400" indent="0">
-              <a:buNone/>
-              <a:defRPr sz="500"/>
+            <a:lvl5pPr marL="945490" indent="0">
+              <a:buNone/>
+              <a:defRPr sz="517"/>
             </a:lvl5pPr>
-            <a:lvl6pPr marL="1143000" indent="0">
-              <a:buNone/>
-              <a:defRPr sz="500"/>
+            <a:lvl6pPr marL="1181862" indent="0">
+              <a:buNone/>
+              <a:defRPr sz="517"/>
             </a:lvl6pPr>
-            <a:lvl7pPr marL="1371600" indent="0">
-              <a:buNone/>
-              <a:defRPr sz="500"/>
+            <a:lvl7pPr marL="1418234" indent="0">
+              <a:buNone/>
+              <a:defRPr sz="517"/>
             </a:lvl7pPr>
-            <a:lvl8pPr marL="1600200" indent="0">
-              <a:buNone/>
-              <a:defRPr sz="500"/>
+            <a:lvl8pPr marL="1654607" indent="0">
+              <a:buNone/>
+              <a:defRPr sz="517"/>
             </a:lvl8pPr>
-            <a:lvl9pPr marL="1828800" indent="0">
-              <a:buNone/>
-              <a:defRPr sz="500"/>
+            <a:lvl9pPr marL="1890979" indent="0">
+              <a:buNone/>
+              <a:defRPr sz="517"/>
             </a:lvl9pPr>
           </a:lstStyle>
           <a:p>
@@ -2191,7 +3177,7 @@
           <a:p>
             <a:fld id="{BDE2A46F-7BDB-4139-9993-9E5D6C6B5509}" type="datetimeFigureOut">
               <a:rPr lang="en-US" smtClean="0"/>
-              <a:t>8/12/2026</a:t>
+              <a:t>9/3/2026</a:t>
             </a:fld>
             <a:endParaRPr lang="en-US"/>
           </a:p>
@@ -2242,7 +3228,7 @@
     </p:spTree>
     <p:extLst>
       <p:ext uri="{BB962C8B-B14F-4D97-AF65-F5344CB8AC3E}">
-        <p14:creationId xmlns:p14="http://schemas.microsoft.com/office/powerpoint/2010/main" val="2984820380"/>
+        <p14:creationId xmlns:p14="http://schemas.microsoft.com/office/powerpoint/2010/main" val="917925286"/>
       </p:ext>
     </p:extLst>
   </p:cSld>
@@ -2281,15 +3267,15 @@
         </p:nvSpPr>
         <p:spPr>
           <a:xfrm>
-            <a:off x="314921" y="335280"/>
-            <a:ext cx="1474589" cy="1173480"/>
+            <a:off x="325637" y="341418"/>
+            <a:ext cx="1524766" cy="1194964"/>
           </a:xfrm>
         </p:spPr>
         <p:txBody>
           <a:bodyPr anchor="b"/>
           <a:lstStyle>
             <a:lvl1pPr>
-              <a:defRPr sz="1600"/>
+              <a:defRPr sz="1654"/>
             </a:lvl1pPr>
           </a:lstStyle>
           <a:p>
@@ -2313,8 +3299,8 @@
         </p:nvSpPr>
         <p:spPr>
           <a:xfrm>
-            <a:off x="1943695" y="724113"/>
-            <a:ext cx="2314575" cy="3573992"/>
+            <a:off x="2009835" y="737370"/>
+            <a:ext cx="2393335" cy="3639425"/>
           </a:xfrm>
         </p:spPr>
         <p:txBody>
@@ -2322,39 +3308,39 @@
           <a:lstStyle>
             <a:lvl1pPr marL="0" indent="0">
               <a:buNone/>
-              <a:defRPr sz="1600"/>
+              <a:defRPr sz="1654"/>
             </a:lvl1pPr>
-            <a:lvl2pPr marL="228600" indent="0">
-              <a:buNone/>
-              <a:defRPr sz="1400"/>
+            <a:lvl2pPr marL="236372" indent="0">
+              <a:buNone/>
+              <a:defRPr sz="1448"/>
             </a:lvl2pPr>
-            <a:lvl3pPr marL="457200" indent="0">
-              <a:buNone/>
-              <a:defRPr sz="1200"/>
+            <a:lvl3pPr marL="472745" indent="0">
+              <a:buNone/>
+              <a:defRPr sz="1241"/>
             </a:lvl3pPr>
-            <a:lvl4pPr marL="685800" indent="0">
-              <a:buNone/>
-              <a:defRPr sz="1000"/>
+            <a:lvl4pPr marL="709117" indent="0">
+              <a:buNone/>
+              <a:defRPr sz="1034"/>
             </a:lvl4pPr>
-            <a:lvl5pPr marL="914400" indent="0">
-              <a:buNone/>
-              <a:defRPr sz="1000"/>
+            <a:lvl5pPr marL="945490" indent="0">
+              <a:buNone/>
+              <a:defRPr sz="1034"/>
             </a:lvl5pPr>
-            <a:lvl6pPr marL="1143000" indent="0">
-              <a:buNone/>
-              <a:defRPr sz="1000"/>
+            <a:lvl6pPr marL="1181862" indent="0">
+              <a:buNone/>
+              <a:defRPr sz="1034"/>
             </a:lvl6pPr>
-            <a:lvl7pPr marL="1371600" indent="0">
-              <a:buNone/>
-              <a:defRPr sz="1000"/>
+            <a:lvl7pPr marL="1418234" indent="0">
+              <a:buNone/>
+              <a:defRPr sz="1034"/>
             </a:lvl7pPr>
-            <a:lvl8pPr marL="1600200" indent="0">
-              <a:buNone/>
-              <a:defRPr sz="1000"/>
+            <a:lvl8pPr marL="1654607" indent="0">
+              <a:buNone/>
+              <a:defRPr sz="1034"/>
             </a:lvl8pPr>
-            <a:lvl9pPr marL="1828800" indent="0">
-              <a:buNone/>
-              <a:defRPr sz="1000"/>
+            <a:lvl9pPr marL="1890979" indent="0">
+              <a:buNone/>
+              <a:defRPr sz="1034"/>
             </a:lvl9pPr>
           </a:lstStyle>
           <a:p>
@@ -2378,8 +3364,8 @@
         </p:nvSpPr>
         <p:spPr>
           <a:xfrm>
-            <a:off x="314921" y="1508760"/>
-            <a:ext cx="1474589" cy="2795165"/>
+            <a:off x="325637" y="1536382"/>
+            <a:ext cx="1524766" cy="2846339"/>
           </a:xfrm>
         </p:spPr>
         <p:txBody>
@@ -2387,39 +3373,39 @@
           <a:lstStyle>
             <a:lvl1pPr marL="0" indent="0">
               <a:buNone/>
-              <a:defRPr sz="800"/>
+              <a:defRPr sz="827"/>
             </a:lvl1pPr>
-            <a:lvl2pPr marL="228600" indent="0">
-              <a:buNone/>
-              <a:defRPr sz="700"/>
+            <a:lvl2pPr marL="236372" indent="0">
+              <a:buNone/>
+              <a:defRPr sz="724"/>
             </a:lvl2pPr>
-            <a:lvl3pPr marL="457200" indent="0">
-              <a:buNone/>
-              <a:defRPr sz="600"/>
+            <a:lvl3pPr marL="472745" indent="0">
+              <a:buNone/>
+              <a:defRPr sz="620"/>
             </a:lvl3pPr>
-            <a:lvl4pPr marL="685800" indent="0">
-              <a:buNone/>
-              <a:defRPr sz="500"/>
+            <a:lvl4pPr marL="709117" indent="0">
+              <a:buNone/>
+              <a:defRPr sz="517"/>
             </a:lvl4pPr>
-            <a:lvl5pPr marL="914400" indent="0">
-              <a:buNone/>
-              <a:defRPr sz="500"/>
+            <a:lvl5pPr marL="945490" indent="0">
+              <a:buNone/>
+              <a:defRPr sz="517"/>
             </a:lvl5pPr>
-            <a:lvl6pPr marL="1143000" indent="0">
-              <a:buNone/>
-              <a:defRPr sz="500"/>
+            <a:lvl6pPr marL="1181862" indent="0">
+              <a:buNone/>
+              <a:defRPr sz="517"/>
             </a:lvl6pPr>
-            <a:lvl7pPr marL="1371600" indent="0">
-              <a:buNone/>
-              <a:defRPr sz="500"/>
+            <a:lvl7pPr marL="1418234" indent="0">
+              <a:buNone/>
+              <a:defRPr sz="517"/>
             </a:lvl7pPr>
-            <a:lvl8pPr marL="1600200" indent="0">
-              <a:buNone/>
-              <a:defRPr sz="500"/>
+            <a:lvl8pPr marL="1654607" indent="0">
+              <a:buNone/>
+              <a:defRPr sz="517"/>
             </a:lvl8pPr>
-            <a:lvl9pPr marL="1828800" indent="0">
-              <a:buNone/>
-              <a:defRPr sz="500"/>
+            <a:lvl9pPr marL="1890979" indent="0">
+              <a:buNone/>
+              <a:defRPr sz="517"/>
             </a:lvl9pPr>
           </a:lstStyle>
           <a:p>
@@ -2448,7 +3434,7 @@
           <a:p>
             <a:fld id="{BDE2A46F-7BDB-4139-9993-9E5D6C6B5509}" type="datetimeFigureOut">
               <a:rPr lang="en-US" smtClean="0"/>
-              <a:t>8/12/2026</a:t>
+              <a:t>9/3/2026</a:t>
             </a:fld>
             <a:endParaRPr lang="en-US"/>
           </a:p>
@@ -2499,7 +3485,7 @@
     </p:spTree>
     <p:extLst>
       <p:ext uri="{BB962C8B-B14F-4D97-AF65-F5344CB8AC3E}">
-        <p14:creationId xmlns:p14="http://schemas.microsoft.com/office/powerpoint/2010/main" val="151295625"/>
+        <p14:creationId xmlns:p14="http://schemas.microsoft.com/office/powerpoint/2010/main" val="3676392850"/>
       </p:ext>
     </p:extLst>
   </p:cSld>
@@ -2543,8 +3529,8 @@
         </p:nvSpPr>
         <p:spPr>
           <a:xfrm>
-            <a:off x="314325" y="267759"/>
-            <a:ext cx="3943350" cy="972080"/>
+            <a:off x="325021" y="272662"/>
+            <a:ext cx="4077533" cy="989876"/>
           </a:xfrm>
           <a:prstGeom prst="rect">
             <a:avLst/>
@@ -2576,8 +3562,8 @@
         </p:nvSpPr>
         <p:spPr>
           <a:xfrm>
-            <a:off x="314325" y="1338792"/>
-            <a:ext cx="3943350" cy="3190981"/>
+            <a:off x="325021" y="1363302"/>
+            <a:ext cx="4077533" cy="3249402"/>
           </a:xfrm>
           <a:prstGeom prst="rect">
             <a:avLst/>
@@ -2638,8 +3624,8 @@
         </p:nvSpPr>
         <p:spPr>
           <a:xfrm>
-            <a:off x="314325" y="4661325"/>
-            <a:ext cx="1028700" cy="267758"/>
+            <a:off x="325021" y="4746665"/>
+            <a:ext cx="1063704" cy="272660"/>
           </a:xfrm>
           <a:prstGeom prst="rect">
             <a:avLst/>
@@ -2649,7 +3635,7 @@
           <a:bodyPr vert="horz" lIns="91440" tIns="45720" rIns="91440" bIns="45720" rtlCol="0" anchor="ctr"/>
           <a:lstStyle>
             <a:lvl1pPr algn="l">
-              <a:defRPr sz="600">
+              <a:defRPr sz="620">
                 <a:solidFill>
                   <a:schemeClr val="tx1">
                     <a:tint val="82000"/>
@@ -2661,7 +3647,7 @@
           <a:p>
             <a:fld id="{BDE2A46F-7BDB-4139-9993-9E5D6C6B5509}" type="datetimeFigureOut">
               <a:rPr lang="en-US" smtClean="0"/>
-              <a:t>8/12/2026</a:t>
+              <a:t>9/3/2026</a:t>
             </a:fld>
             <a:endParaRPr lang="en-US"/>
           </a:p>
@@ -2679,8 +3665,8 @@
         </p:nvSpPr>
         <p:spPr>
           <a:xfrm>
-            <a:off x="1514475" y="4661325"/>
-            <a:ext cx="1543050" cy="267758"/>
+            <a:off x="1566009" y="4746665"/>
+            <a:ext cx="1595557" cy="272660"/>
           </a:xfrm>
           <a:prstGeom prst="rect">
             <a:avLst/>
@@ -2690,7 +3676,7 @@
           <a:bodyPr vert="horz" lIns="91440" tIns="45720" rIns="91440" bIns="45720" rtlCol="0" anchor="ctr"/>
           <a:lstStyle>
             <a:lvl1pPr algn="ctr">
-              <a:defRPr sz="600">
+              <a:defRPr sz="620">
                 <a:solidFill>
                   <a:schemeClr val="tx1">
                     <a:tint val="82000"/>
@@ -2716,8 +3702,8 @@
         </p:nvSpPr>
         <p:spPr>
           <a:xfrm>
-            <a:off x="3228975" y="4661325"/>
-            <a:ext cx="1028700" cy="267758"/>
+            <a:off x="3338850" y="4746665"/>
+            <a:ext cx="1063704" cy="272660"/>
           </a:xfrm>
           <a:prstGeom prst="rect">
             <a:avLst/>
@@ -2727,7 +3713,7 @@
           <a:bodyPr vert="horz" lIns="91440" tIns="45720" rIns="91440" bIns="45720" rtlCol="0" anchor="ctr"/>
           <a:lstStyle>
             <a:lvl1pPr algn="r">
-              <a:defRPr sz="600">
+              <a:defRPr sz="620">
                 <a:solidFill>
                   <a:schemeClr val="tx1">
                     <a:tint val="82000"/>
@@ -2748,27 +3734,27 @@
     </p:spTree>
     <p:extLst>
       <p:ext uri="{BB962C8B-B14F-4D97-AF65-F5344CB8AC3E}">
-        <p14:creationId xmlns:p14="http://schemas.microsoft.com/office/powerpoint/2010/main" val="4145652492"/>
+        <p14:creationId xmlns:p14="http://schemas.microsoft.com/office/powerpoint/2010/main" val="649297445"/>
       </p:ext>
     </p:extLst>
   </p:cSld>
   <p:clrMap bg1="lt1" tx1="dk1" bg2="lt2" tx2="dk2" accent1="accent1" accent2="accent2" accent3="accent3" accent4="accent4" accent5="accent5" accent6="accent6" hlink="hlink" folHlink="folHlink"/>
   <p:sldLayoutIdLst>
-    <p:sldLayoutId id="2147483673" r:id="rId1"/>
-    <p:sldLayoutId id="2147483674" r:id="rId2"/>
-    <p:sldLayoutId id="2147483675" r:id="rId3"/>
-    <p:sldLayoutId id="2147483676" r:id="rId4"/>
-    <p:sldLayoutId id="2147483677" r:id="rId5"/>
-    <p:sldLayoutId id="2147483678" r:id="rId6"/>
-    <p:sldLayoutId id="2147483679" r:id="rId7"/>
-    <p:sldLayoutId id="2147483680" r:id="rId8"/>
-    <p:sldLayoutId id="2147483681" r:id="rId9"/>
-    <p:sldLayoutId id="2147483682" r:id="rId10"/>
-    <p:sldLayoutId id="2147483683" r:id="rId11"/>
+    <p:sldLayoutId id="2147483709" r:id="rId1"/>
+    <p:sldLayoutId id="2147483710" r:id="rId2"/>
+    <p:sldLayoutId id="2147483711" r:id="rId3"/>
+    <p:sldLayoutId id="2147483712" r:id="rId4"/>
+    <p:sldLayoutId id="2147483713" r:id="rId5"/>
+    <p:sldLayoutId id="2147483714" r:id="rId6"/>
+    <p:sldLayoutId id="2147483715" r:id="rId7"/>
+    <p:sldLayoutId id="2147483716" r:id="rId8"/>
+    <p:sldLayoutId id="2147483717" r:id="rId9"/>
+    <p:sldLayoutId id="2147483718" r:id="rId10"/>
+    <p:sldLayoutId id="2147483719" r:id="rId11"/>
   </p:sldLayoutIdLst>
   <p:txStyles>
     <p:titleStyle>
-      <a:lvl1pPr algn="l" defTabSz="457200" rtl="0" eaLnBrk="1" latinLnBrk="0" hangingPunct="1">
+      <a:lvl1pPr algn="l" defTabSz="472745" rtl="0" eaLnBrk="1" latinLnBrk="0" hangingPunct="1">
         <a:lnSpc>
           <a:spcPct val="90000"/>
         </a:lnSpc>
@@ -2776,7 +3762,7 @@
           <a:spcPct val="0"/>
         </a:spcBef>
         <a:buNone/>
-        <a:defRPr sz="2200" kern="1200">
+        <a:defRPr sz="2275" kern="1200">
           <a:solidFill>
             <a:schemeClr val="tx1"/>
           </a:solidFill>
@@ -2787,16 +3773,16 @@
       </a:lvl1pPr>
     </p:titleStyle>
     <p:bodyStyle>
-      <a:lvl1pPr marL="114300" indent="-114300" algn="l" defTabSz="457200" rtl="0" eaLnBrk="1" latinLnBrk="0" hangingPunct="1">
+      <a:lvl1pPr marL="118186" indent="-118186" algn="l" defTabSz="472745" rtl="0" eaLnBrk="1" latinLnBrk="0" hangingPunct="1">
         <a:lnSpc>
           <a:spcPct val="90000"/>
         </a:lnSpc>
         <a:spcBef>
-          <a:spcPts val="500"/>
+          <a:spcPts val="517"/>
         </a:spcBef>
         <a:buFont typeface="Arial" panose="020B0604020202020204" pitchFamily="34" charset="0"/>
         <a:buChar char="•"/>
-        <a:defRPr sz="1400" kern="1200">
+        <a:defRPr sz="1448" kern="1200">
           <a:solidFill>
             <a:schemeClr val="tx1"/>
           </a:solidFill>
@@ -2805,16 +3791,16 @@
           <a:cs typeface="+mn-cs"/>
         </a:defRPr>
       </a:lvl1pPr>
-      <a:lvl2pPr marL="342900" indent="-114300" algn="l" defTabSz="457200" rtl="0" eaLnBrk="1" latinLnBrk="0" hangingPunct="1">
+      <a:lvl2pPr marL="354559" indent="-118186" algn="l" defTabSz="472745" rtl="0" eaLnBrk="1" latinLnBrk="0" hangingPunct="1">
         <a:lnSpc>
           <a:spcPct val="90000"/>
         </a:lnSpc>
         <a:spcBef>
-          <a:spcPts val="250"/>
+          <a:spcPts val="259"/>
         </a:spcBef>
         <a:buFont typeface="Arial" panose="020B0604020202020204" pitchFamily="34" charset="0"/>
         <a:buChar char="•"/>
-        <a:defRPr sz="1200" kern="1200">
+        <a:defRPr sz="1241" kern="1200">
           <a:solidFill>
             <a:schemeClr val="tx1"/>
           </a:solidFill>
@@ -2823,16 +3809,16 @@
           <a:cs typeface="+mn-cs"/>
         </a:defRPr>
       </a:lvl2pPr>
-      <a:lvl3pPr marL="571500" indent="-114300" algn="l" defTabSz="457200" rtl="0" eaLnBrk="1" latinLnBrk="0" hangingPunct="1">
+      <a:lvl3pPr marL="590931" indent="-118186" algn="l" defTabSz="472745" rtl="0" eaLnBrk="1" latinLnBrk="0" hangingPunct="1">
         <a:lnSpc>
           <a:spcPct val="90000"/>
         </a:lnSpc>
         <a:spcBef>
-          <a:spcPts val="250"/>
+          <a:spcPts val="259"/>
         </a:spcBef>
         <a:buFont typeface="Arial" panose="020B0604020202020204" pitchFamily="34" charset="0"/>
         <a:buChar char="•"/>
-        <a:defRPr sz="1000" kern="1200">
+        <a:defRPr sz="1034" kern="1200">
           <a:solidFill>
             <a:schemeClr val="tx1"/>
           </a:solidFill>
@@ -2841,16 +3827,16 @@
           <a:cs typeface="+mn-cs"/>
         </a:defRPr>
       </a:lvl3pPr>
-      <a:lvl4pPr marL="800100" indent="-114300" algn="l" defTabSz="457200" rtl="0" eaLnBrk="1" latinLnBrk="0" hangingPunct="1">
+      <a:lvl4pPr marL="827303" indent="-118186" algn="l" defTabSz="472745" rtl="0" eaLnBrk="1" latinLnBrk="0" hangingPunct="1">
         <a:lnSpc>
           <a:spcPct val="90000"/>
         </a:lnSpc>
         <a:spcBef>
-          <a:spcPts val="250"/>
+          <a:spcPts val="259"/>
         </a:spcBef>
         <a:buFont typeface="Arial" panose="020B0604020202020204" pitchFamily="34" charset="0"/>
         <a:buChar char="•"/>
-        <a:defRPr sz="900" kern="1200">
+        <a:defRPr sz="931" kern="1200">
           <a:solidFill>
             <a:schemeClr val="tx1"/>
           </a:solidFill>
@@ -2859,16 +3845,16 @@
           <a:cs typeface="+mn-cs"/>
         </a:defRPr>
       </a:lvl4pPr>
-      <a:lvl5pPr marL="1028700" indent="-114300" algn="l" defTabSz="457200" rtl="0" eaLnBrk="1" latinLnBrk="0" hangingPunct="1">
+      <a:lvl5pPr marL="1063676" indent="-118186" algn="l" defTabSz="472745" rtl="0" eaLnBrk="1" latinLnBrk="0" hangingPunct="1">
         <a:lnSpc>
           <a:spcPct val="90000"/>
         </a:lnSpc>
         <a:spcBef>
-          <a:spcPts val="250"/>
+          <a:spcPts val="259"/>
         </a:spcBef>
         <a:buFont typeface="Arial" panose="020B0604020202020204" pitchFamily="34" charset="0"/>
         <a:buChar char="•"/>
-        <a:defRPr sz="900" kern="1200">
+        <a:defRPr sz="931" kern="1200">
           <a:solidFill>
             <a:schemeClr val="tx1"/>
           </a:solidFill>
@@ -2877,16 +3863,16 @@
           <a:cs typeface="+mn-cs"/>
         </a:defRPr>
       </a:lvl5pPr>
-      <a:lvl6pPr marL="1257300" indent="-114300" algn="l" defTabSz="457200" rtl="0" eaLnBrk="1" latinLnBrk="0" hangingPunct="1">
+      <a:lvl6pPr marL="1300048" indent="-118186" algn="l" defTabSz="472745" rtl="0" eaLnBrk="1" latinLnBrk="0" hangingPunct="1">
         <a:lnSpc>
           <a:spcPct val="90000"/>
         </a:lnSpc>
         <a:spcBef>
-          <a:spcPts val="250"/>
+          <a:spcPts val="259"/>
         </a:spcBef>
         <a:buFont typeface="Arial" panose="020B0604020202020204" pitchFamily="34" charset="0"/>
         <a:buChar char="•"/>
-        <a:defRPr sz="900" kern="1200">
+        <a:defRPr sz="931" kern="1200">
           <a:solidFill>
             <a:schemeClr val="tx1"/>
           </a:solidFill>
@@ -2895,16 +3881,16 @@
           <a:cs typeface="+mn-cs"/>
         </a:defRPr>
       </a:lvl6pPr>
-      <a:lvl7pPr marL="1485900" indent="-114300" algn="l" defTabSz="457200" rtl="0" eaLnBrk="1" latinLnBrk="0" hangingPunct="1">
+      <a:lvl7pPr marL="1536421" indent="-118186" algn="l" defTabSz="472745" rtl="0" eaLnBrk="1" latinLnBrk="0" hangingPunct="1">
         <a:lnSpc>
           <a:spcPct val="90000"/>
         </a:lnSpc>
         <a:spcBef>
-          <a:spcPts val="250"/>
+          <a:spcPts val="259"/>
         </a:spcBef>
         <a:buFont typeface="Arial" panose="020B0604020202020204" pitchFamily="34" charset="0"/>
         <a:buChar char="•"/>
-        <a:defRPr sz="900" kern="1200">
+        <a:defRPr sz="931" kern="1200">
           <a:solidFill>
             <a:schemeClr val="tx1"/>
           </a:solidFill>
@@ -2913,16 +3899,16 @@
           <a:cs typeface="+mn-cs"/>
         </a:defRPr>
       </a:lvl7pPr>
-      <a:lvl8pPr marL="1714500" indent="-114300" algn="l" defTabSz="457200" rtl="0" eaLnBrk="1" latinLnBrk="0" hangingPunct="1">
+      <a:lvl8pPr marL="1772793" indent="-118186" algn="l" defTabSz="472745" rtl="0" eaLnBrk="1" latinLnBrk="0" hangingPunct="1">
         <a:lnSpc>
           <a:spcPct val="90000"/>
         </a:lnSpc>
         <a:spcBef>
-          <a:spcPts val="250"/>
+          <a:spcPts val="259"/>
         </a:spcBef>
         <a:buFont typeface="Arial" panose="020B0604020202020204" pitchFamily="34" charset="0"/>
         <a:buChar char="•"/>
-        <a:defRPr sz="900" kern="1200">
+        <a:defRPr sz="931" kern="1200">
           <a:solidFill>
             <a:schemeClr val="tx1"/>
           </a:solidFill>
@@ -2931,16 +3917,16 @@
           <a:cs typeface="+mn-cs"/>
         </a:defRPr>
       </a:lvl8pPr>
-      <a:lvl9pPr marL="1943100" indent="-114300" algn="l" defTabSz="457200" rtl="0" eaLnBrk="1" latinLnBrk="0" hangingPunct="1">
+      <a:lvl9pPr marL="2009165" indent="-118186" algn="l" defTabSz="472745" rtl="0" eaLnBrk="1" latinLnBrk="0" hangingPunct="1">
         <a:lnSpc>
           <a:spcPct val="90000"/>
         </a:lnSpc>
         <a:spcBef>
-          <a:spcPts val="250"/>
+          <a:spcPts val="259"/>
         </a:spcBef>
         <a:buFont typeface="Arial" panose="020B0604020202020204" pitchFamily="34" charset="0"/>
         <a:buChar char="•"/>
-        <a:defRPr sz="900" kern="1200">
+        <a:defRPr sz="931" kern="1200">
           <a:solidFill>
             <a:schemeClr val="tx1"/>
           </a:solidFill>
@@ -2954,8 +3940,8 @@
       <a:defPPr>
         <a:defRPr lang="en-US"/>
       </a:defPPr>
-      <a:lvl1pPr marL="0" algn="l" defTabSz="457200" rtl="0" eaLnBrk="1" latinLnBrk="0" hangingPunct="1">
-        <a:defRPr sz="900" kern="1200">
+      <a:lvl1pPr marL="0" algn="l" defTabSz="472745" rtl="0" eaLnBrk="1" latinLnBrk="0" hangingPunct="1">
+        <a:defRPr sz="931" kern="1200">
           <a:solidFill>
             <a:schemeClr val="tx1"/>
           </a:solidFill>
@@ -2964,8 +3950,8 @@
           <a:cs typeface="+mn-cs"/>
         </a:defRPr>
       </a:lvl1pPr>
-      <a:lvl2pPr marL="228600" algn="l" defTabSz="457200" rtl="0" eaLnBrk="1" latinLnBrk="0" hangingPunct="1">
-        <a:defRPr sz="900" kern="1200">
+      <a:lvl2pPr marL="236372" algn="l" defTabSz="472745" rtl="0" eaLnBrk="1" latinLnBrk="0" hangingPunct="1">
+        <a:defRPr sz="931" kern="1200">
           <a:solidFill>
             <a:schemeClr val="tx1"/>
           </a:solidFill>
@@ -2974,8 +3960,8 @@
           <a:cs typeface="+mn-cs"/>
         </a:defRPr>
       </a:lvl2pPr>
-      <a:lvl3pPr marL="457200" algn="l" defTabSz="457200" rtl="0" eaLnBrk="1" latinLnBrk="0" hangingPunct="1">
-        <a:defRPr sz="900" kern="1200">
+      <a:lvl3pPr marL="472745" algn="l" defTabSz="472745" rtl="0" eaLnBrk="1" latinLnBrk="0" hangingPunct="1">
+        <a:defRPr sz="931" kern="1200">
           <a:solidFill>
             <a:schemeClr val="tx1"/>
           </a:solidFill>
@@ -2984,8 +3970,8 @@
           <a:cs typeface="+mn-cs"/>
         </a:defRPr>
       </a:lvl3pPr>
-      <a:lvl4pPr marL="685800" algn="l" defTabSz="457200" rtl="0" eaLnBrk="1" latinLnBrk="0" hangingPunct="1">
-        <a:defRPr sz="900" kern="1200">
+      <a:lvl4pPr marL="709117" algn="l" defTabSz="472745" rtl="0" eaLnBrk="1" latinLnBrk="0" hangingPunct="1">
+        <a:defRPr sz="931" kern="1200">
           <a:solidFill>
             <a:schemeClr val="tx1"/>
           </a:solidFill>
@@ -2994,8 +3980,8 @@
           <a:cs typeface="+mn-cs"/>
         </a:defRPr>
       </a:lvl4pPr>
-      <a:lvl5pPr marL="914400" algn="l" defTabSz="457200" rtl="0" eaLnBrk="1" latinLnBrk="0" hangingPunct="1">
-        <a:defRPr sz="900" kern="1200">
+      <a:lvl5pPr marL="945490" algn="l" defTabSz="472745" rtl="0" eaLnBrk="1" latinLnBrk="0" hangingPunct="1">
+        <a:defRPr sz="931" kern="1200">
           <a:solidFill>
             <a:schemeClr val="tx1"/>
           </a:solidFill>
@@ -3004,8 +3990,8 @@
           <a:cs typeface="+mn-cs"/>
         </a:defRPr>
       </a:lvl5pPr>
-      <a:lvl6pPr marL="1143000" algn="l" defTabSz="457200" rtl="0" eaLnBrk="1" latinLnBrk="0" hangingPunct="1">
-        <a:defRPr sz="900" kern="1200">
+      <a:lvl6pPr marL="1181862" algn="l" defTabSz="472745" rtl="0" eaLnBrk="1" latinLnBrk="0" hangingPunct="1">
+        <a:defRPr sz="931" kern="1200">
           <a:solidFill>
             <a:schemeClr val="tx1"/>
           </a:solidFill>
@@ -3014,8 +4000,8 @@
           <a:cs typeface="+mn-cs"/>
         </a:defRPr>
       </a:lvl6pPr>
-      <a:lvl7pPr marL="1371600" algn="l" defTabSz="457200" rtl="0" eaLnBrk="1" latinLnBrk="0" hangingPunct="1">
-        <a:defRPr sz="900" kern="1200">
+      <a:lvl7pPr marL="1418234" algn="l" defTabSz="472745" rtl="0" eaLnBrk="1" latinLnBrk="0" hangingPunct="1">
+        <a:defRPr sz="931" kern="1200">
           <a:solidFill>
             <a:schemeClr val="tx1"/>
           </a:solidFill>
@@ -3024,8 +4010,8 @@
           <a:cs typeface="+mn-cs"/>
         </a:defRPr>
       </a:lvl7pPr>
-      <a:lvl8pPr marL="1600200" algn="l" defTabSz="457200" rtl="0" eaLnBrk="1" latinLnBrk="0" hangingPunct="1">
-        <a:defRPr sz="900" kern="1200">
+      <a:lvl8pPr marL="1654607" algn="l" defTabSz="472745" rtl="0" eaLnBrk="1" latinLnBrk="0" hangingPunct="1">
+        <a:defRPr sz="931" kern="1200">
           <a:solidFill>
             <a:schemeClr val="tx1"/>
           </a:solidFill>
@@ -3034,8 +4020,8 @@
           <a:cs typeface="+mn-cs"/>
         </a:defRPr>
       </a:lvl8pPr>
-      <a:lvl9pPr marL="1828800" algn="l" defTabSz="457200" rtl="0" eaLnBrk="1" latinLnBrk="0" hangingPunct="1">
-        <a:defRPr sz="900" kern="1200">
+      <a:lvl9pPr marL="1890979" algn="l" defTabSz="472745" rtl="0" eaLnBrk="1" latinLnBrk="0" hangingPunct="1">
+        <a:defRPr sz="931" kern="1200">
           <a:solidFill>
             <a:schemeClr val="tx1"/>
           </a:solidFill>
@@ -3068,7 +4054,7 @@
       </p:grpSpPr>
       <p:pic>
         <p:nvPicPr>
-          <p:cNvPr id="3" name="Picture 2">
+          <p:cNvPr id="182" name="Picture 181">
             <a:extLst>
               <a:ext uri="{FF2B5EF4-FFF2-40B4-BE49-F238E27FC236}">
                 <a16:creationId xmlns:a16="http://schemas.microsoft.com/office/drawing/2014/main" id="{3312B9E9-F068-BAFD-B712-06C890B1A95D}"/>
@@ -3095,7 +4081,7 @@
         </p:blipFill>
         <p:spPr>
           <a:xfrm>
-            <a:off x="0" y="2327761"/>
+            <a:off x="76601" y="2377440"/>
             <a:ext cx="4572000" cy="2701439"/>
           </a:xfrm>
           <a:prstGeom prst="rect">
@@ -3103,12 +4089,307 @@
           </a:prstGeom>
         </p:spPr>
       </p:pic>
+      <p:sp>
+        <p:nvSpPr>
+          <p:cNvPr id="183" name="Rectangle 182">
+            <a:extLst>
+              <a:ext uri="{FF2B5EF4-FFF2-40B4-BE49-F238E27FC236}">
+                <a16:creationId xmlns:a16="http://schemas.microsoft.com/office/drawing/2014/main" id="{0E21E371-FCDF-D6DD-1C98-E7F1F5A31D7A}"/>
+              </a:ext>
+            </a:extLst>
+          </p:cNvPr>
+          <p:cNvSpPr/>
+          <p:nvPr/>
+        </p:nvSpPr>
+        <p:spPr>
+          <a:xfrm>
+            <a:off x="486669" y="3003079"/>
+            <a:ext cx="1053920" cy="281049"/>
+          </a:xfrm>
+          <a:prstGeom prst="rect">
+            <a:avLst/>
+          </a:prstGeom>
+          <a:noFill/>
+          <a:ln>
+            <a:noFill/>
+          </a:ln>
+        </p:spPr>
+        <p:style>
+          <a:lnRef idx="2">
+            <a:schemeClr val="accent1">
+              <a:shade val="15000"/>
+            </a:schemeClr>
+          </a:lnRef>
+          <a:fillRef idx="1">
+            <a:schemeClr val="accent1"/>
+          </a:fillRef>
+          <a:effectRef idx="0">
+            <a:schemeClr val="accent1"/>
+          </a:effectRef>
+          <a:fontRef idx="minor">
+            <a:schemeClr val="lt1"/>
+          </a:fontRef>
+        </p:style>
+        <p:txBody>
+          <a:bodyPr rtlCol="0" anchor="ctr"/>
+          <a:lstStyle/>
+          <a:p>
+            <a:pPr algn="ctr"/>
+            <a:r>
+              <a:rPr lang="en-US" sz="1000" b="1" dirty="0">
+                <a:solidFill>
+                  <a:srgbClr val="178F92"/>
+                </a:solidFill>
+                <a:latin typeface="Arial" panose="020B0604020202020204" pitchFamily="34" charset="0"/>
+                <a:cs typeface="Arial" panose="020B0604020202020204" pitchFamily="34" charset="0"/>
+              </a:rPr>
+              <a:t>loss of 7.3 species</a:t>
+            </a:r>
+          </a:p>
+        </p:txBody>
+      </p:sp>
+      <p:sp>
+        <p:nvSpPr>
+          <p:cNvPr id="184" name="Rectangle 183">
+            <a:extLst>
+              <a:ext uri="{FF2B5EF4-FFF2-40B4-BE49-F238E27FC236}">
+                <a16:creationId xmlns:a16="http://schemas.microsoft.com/office/drawing/2014/main" id="{FA78D632-3EF5-EEF3-7773-0DBAF07DFB00}"/>
+              </a:ext>
+            </a:extLst>
+          </p:cNvPr>
+          <p:cNvSpPr/>
+          <p:nvPr/>
+        </p:nvSpPr>
+        <p:spPr>
+          <a:xfrm>
+            <a:off x="486669" y="3818101"/>
+            <a:ext cx="1053920" cy="281049"/>
+          </a:xfrm>
+          <a:prstGeom prst="rect">
+            <a:avLst/>
+          </a:prstGeom>
+          <a:noFill/>
+          <a:ln>
+            <a:noFill/>
+          </a:ln>
+        </p:spPr>
+        <p:style>
+          <a:lnRef idx="2">
+            <a:schemeClr val="accent1">
+              <a:shade val="15000"/>
+            </a:schemeClr>
+          </a:lnRef>
+          <a:fillRef idx="1">
+            <a:schemeClr val="accent1"/>
+          </a:fillRef>
+          <a:effectRef idx="0">
+            <a:schemeClr val="accent1"/>
+          </a:effectRef>
+          <a:fontRef idx="minor">
+            <a:schemeClr val="lt1"/>
+          </a:fontRef>
+        </p:style>
+        <p:txBody>
+          <a:bodyPr rtlCol="0" anchor="ctr"/>
+          <a:lstStyle/>
+          <a:p>
+            <a:pPr algn="ctr"/>
+            <a:r>
+              <a:rPr lang="en-US" sz="1000" b="1" dirty="0">
+                <a:solidFill>
+                  <a:srgbClr val="AE8548"/>
+                </a:solidFill>
+                <a:latin typeface="Arial" panose="020B0604020202020204" pitchFamily="34" charset="0"/>
+                <a:cs typeface="Arial" panose="020B0604020202020204" pitchFamily="34" charset="0"/>
+              </a:rPr>
+              <a:t>loss of 1.4 species</a:t>
+            </a:r>
+          </a:p>
+        </p:txBody>
+      </p:sp>
+      <p:sp>
+        <p:nvSpPr>
+          <p:cNvPr id="185" name="Rectangle 184">
+            <a:extLst>
+              <a:ext uri="{FF2B5EF4-FFF2-40B4-BE49-F238E27FC236}">
+                <a16:creationId xmlns:a16="http://schemas.microsoft.com/office/drawing/2014/main" id="{7CBB6A18-4C62-1FE0-A525-041D9CDDC471}"/>
+              </a:ext>
+            </a:extLst>
+          </p:cNvPr>
+          <p:cNvSpPr/>
+          <p:nvPr/>
+        </p:nvSpPr>
+        <p:spPr>
+          <a:xfrm>
+            <a:off x="2593432" y="3976299"/>
+            <a:ext cx="1053920" cy="281049"/>
+          </a:xfrm>
+          <a:prstGeom prst="rect">
+            <a:avLst/>
+          </a:prstGeom>
+          <a:noFill/>
+          <a:ln>
+            <a:noFill/>
+          </a:ln>
+        </p:spPr>
+        <p:style>
+          <a:lnRef idx="2">
+            <a:schemeClr val="accent1">
+              <a:shade val="15000"/>
+            </a:schemeClr>
+          </a:lnRef>
+          <a:fillRef idx="1">
+            <a:schemeClr val="accent1"/>
+          </a:fillRef>
+          <a:effectRef idx="0">
+            <a:schemeClr val="accent1"/>
+          </a:effectRef>
+          <a:fontRef idx="minor">
+            <a:schemeClr val="lt1"/>
+          </a:fontRef>
+        </p:style>
+        <p:txBody>
+          <a:bodyPr rtlCol="0" anchor="ctr"/>
+          <a:lstStyle/>
+          <a:p>
+            <a:pPr algn="ctr"/>
+            <a:r>
+              <a:rPr lang="en-US" sz="1000" b="1" dirty="0">
+                <a:solidFill>
+                  <a:srgbClr val="AE8548"/>
+                </a:solidFill>
+                <a:latin typeface="Arial" panose="020B0604020202020204" pitchFamily="34" charset="0"/>
+                <a:cs typeface="Arial" panose="020B0604020202020204" pitchFamily="34" charset="0"/>
+              </a:rPr>
+              <a:t>loss of 0.5 species</a:t>
+            </a:r>
+          </a:p>
+        </p:txBody>
+      </p:sp>
+      <p:sp>
+        <p:nvSpPr>
+          <p:cNvPr id="186" name="Rectangle 185">
+            <a:extLst>
+              <a:ext uri="{FF2B5EF4-FFF2-40B4-BE49-F238E27FC236}">
+                <a16:creationId xmlns:a16="http://schemas.microsoft.com/office/drawing/2014/main" id="{088BCC8B-8957-7602-4A3E-ED17B6473B46}"/>
+              </a:ext>
+            </a:extLst>
+          </p:cNvPr>
+          <p:cNvSpPr/>
+          <p:nvPr/>
+        </p:nvSpPr>
+        <p:spPr>
+          <a:xfrm>
+            <a:off x="3373283" y="3672389"/>
+            <a:ext cx="1053920" cy="281049"/>
+          </a:xfrm>
+          <a:prstGeom prst="rect">
+            <a:avLst/>
+          </a:prstGeom>
+          <a:noFill/>
+          <a:ln>
+            <a:noFill/>
+          </a:ln>
+        </p:spPr>
+        <p:style>
+          <a:lnRef idx="2">
+            <a:schemeClr val="accent1">
+              <a:shade val="15000"/>
+            </a:schemeClr>
+          </a:lnRef>
+          <a:fillRef idx="1">
+            <a:schemeClr val="accent1"/>
+          </a:fillRef>
+          <a:effectRef idx="0">
+            <a:schemeClr val="accent1"/>
+          </a:effectRef>
+          <a:fontRef idx="minor">
+            <a:schemeClr val="lt1"/>
+          </a:fontRef>
+        </p:style>
+        <p:txBody>
+          <a:bodyPr rtlCol="0" anchor="ctr"/>
+          <a:lstStyle/>
+          <a:p>
+            <a:pPr algn="ctr"/>
+            <a:r>
+              <a:rPr lang="en-US" sz="1000" b="1" dirty="0">
+                <a:solidFill>
+                  <a:srgbClr val="178F92"/>
+                </a:solidFill>
+                <a:latin typeface="Arial" panose="020B0604020202020204" pitchFamily="34" charset="0"/>
+                <a:cs typeface="Arial" panose="020B0604020202020204" pitchFamily="34" charset="0"/>
+              </a:rPr>
+              <a:t>loss of 0.4 species</a:t>
+            </a:r>
+          </a:p>
+        </p:txBody>
+      </p:sp>
+      <p:sp>
+        <p:nvSpPr>
+          <p:cNvPr id="187" name="Rectangle 186">
+            <a:extLst>
+              <a:ext uri="{FF2B5EF4-FFF2-40B4-BE49-F238E27FC236}">
+                <a16:creationId xmlns:a16="http://schemas.microsoft.com/office/drawing/2014/main" id="{A61FF6A6-BDBA-7AD6-9D62-AD260FCC2F75}"/>
+              </a:ext>
+            </a:extLst>
+          </p:cNvPr>
+          <p:cNvSpPr/>
+          <p:nvPr/>
+        </p:nvSpPr>
+        <p:spPr>
+          <a:xfrm>
+            <a:off x="73152" y="2414016"/>
+            <a:ext cx="131297" cy="152639"/>
+          </a:xfrm>
+          <a:prstGeom prst="rect">
+            <a:avLst/>
+          </a:prstGeom>
+          <a:noFill/>
+          <a:ln>
+            <a:noFill/>
+          </a:ln>
+        </p:spPr>
+        <p:style>
+          <a:lnRef idx="2">
+            <a:schemeClr val="accent1">
+              <a:shade val="15000"/>
+            </a:schemeClr>
+          </a:lnRef>
+          <a:fillRef idx="1">
+            <a:schemeClr val="accent1"/>
+          </a:fillRef>
+          <a:effectRef idx="0">
+            <a:schemeClr val="accent1"/>
+          </a:effectRef>
+          <a:fontRef idx="minor">
+            <a:schemeClr val="lt1"/>
+          </a:fontRef>
+        </p:style>
+        <p:txBody>
+          <a:bodyPr rtlCol="0" anchor="ctr"/>
+          <a:lstStyle/>
+          <a:p>
+            <a:pPr algn="ctr"/>
+            <a:r>
+              <a:rPr lang="en-US" sz="900" b="1" dirty="0">
+                <a:solidFill>
+                  <a:schemeClr val="tx1"/>
+                </a:solidFill>
+                <a:latin typeface="Arial" panose="020B0604020202020204" pitchFamily="34" charset="0"/>
+                <a:cs typeface="Arial" panose="020B0604020202020204" pitchFamily="34" charset="0"/>
+              </a:rPr>
+              <a:t>C</a:t>
+            </a:r>
+          </a:p>
+        </p:txBody>
+      </p:sp>
       <p:grpSp>
         <p:nvGrpSpPr>
-          <p:cNvPr id="61" name="Group 60">
+          <p:cNvPr id="188" name="Group 187">
             <a:extLst>
               <a:ext uri="{FF2B5EF4-FFF2-40B4-BE49-F238E27FC236}">
-                <a16:creationId xmlns:a16="http://schemas.microsoft.com/office/drawing/2014/main" id="{C14FF0A8-DA51-7A66-C6D8-CA13BC6E09C2}"/>
+                <a16:creationId xmlns:a16="http://schemas.microsoft.com/office/drawing/2014/main" id="{3F4CDE92-3C04-8723-5353-AB59C84CBACE}"/>
               </a:ext>
             </a:extLst>
           </p:cNvPr>
@@ -3117,394 +4398,107 @@
         </p:nvGrpSpPr>
         <p:grpSpPr>
           <a:xfrm>
-            <a:off x="0" y="91440"/>
-            <a:ext cx="4572000" cy="4165908"/>
-            <a:chOff x="0" y="0"/>
-            <a:chExt cx="4572000" cy="4165908"/>
+            <a:off x="45720" y="45720"/>
+            <a:ext cx="4636008" cy="2331725"/>
+            <a:chOff x="45720" y="45720"/>
+            <a:chExt cx="4636008" cy="2331725"/>
           </a:xfrm>
         </p:grpSpPr>
-        <p:grpSp>
-          <p:nvGrpSpPr>
-            <p:cNvPr id="63" name="Group 62">
+        <p:pic>
+          <p:nvPicPr>
+            <p:cNvPr id="189" name="Picture 188">
               <a:extLst>
                 <a:ext uri="{FF2B5EF4-FFF2-40B4-BE49-F238E27FC236}">
-                  <a16:creationId xmlns:a16="http://schemas.microsoft.com/office/drawing/2014/main" id="{A43BD0DF-851A-8C8D-5036-D3B915FE47D1}"/>
+                  <a16:creationId xmlns:a16="http://schemas.microsoft.com/office/drawing/2014/main" id="{3A3FB0E3-DD33-8DBD-C9B2-7D186B2CE335}"/>
                 </a:ext>
               </a:extLst>
             </p:cNvPr>
-            <p:cNvGrpSpPr/>
+            <p:cNvPicPr>
+              <a:picLocks noChangeAspect="1"/>
+            </p:cNvPicPr>
             <p:nvPr/>
-          </p:nvGrpSpPr>
-          <p:grpSpPr>
+          </p:nvPicPr>
+          <p:blipFill>
+            <a:blip r:embed="rId3">
+              <a:extLst>
+                <a:ext uri="{28A0092B-C50C-407E-A947-70E740481C1C}">
+                  <a14:useLocalDpi xmlns:a14="http://schemas.microsoft.com/office/drawing/2010/main" val="0"/>
+                </a:ext>
+              </a:extLst>
+            </a:blip>
+            <a:stretch>
+              <a:fillRect/>
+            </a:stretch>
+          </p:blipFill>
+          <p:spPr>
             <a:xfrm>
-              <a:off x="0" y="0"/>
+              <a:off x="2377437" y="91439"/>
               <a:ext cx="2286005" cy="2286005"/>
-              <a:chOff x="0" y="228596"/>
-              <a:chExt cx="2286005" cy="2286005"/>
             </a:xfrm>
-          </p:grpSpPr>
-          <p:pic>
-            <p:nvPicPr>
-              <p:cNvPr id="77" name="Picture 76">
-                <a:extLst>
-                  <a:ext uri="{FF2B5EF4-FFF2-40B4-BE49-F238E27FC236}">
-                    <a16:creationId xmlns:a16="http://schemas.microsoft.com/office/drawing/2014/main" id="{59CD165E-F0F5-1AE0-AEC4-DC0A9FCA3A5C}"/>
-                  </a:ext>
-                </a:extLst>
-              </p:cNvPr>
-              <p:cNvPicPr>
-                <a:picLocks noChangeAspect="1"/>
-              </p:cNvPicPr>
-              <p:nvPr/>
-            </p:nvPicPr>
-            <p:blipFill>
-              <a:blip r:embed="rId3">
-                <a:extLst>
-                  <a:ext uri="{28A0092B-C50C-407E-A947-70E740481C1C}">
-                    <a14:useLocalDpi xmlns:a14="http://schemas.microsoft.com/office/drawing/2010/main" val="0"/>
-                  </a:ext>
-                </a:extLst>
-              </a:blip>
-              <a:stretch>
-                <a:fillRect/>
-              </a:stretch>
-            </p:blipFill>
-            <p:spPr>
-              <a:xfrm>
-                <a:off x="0" y="228596"/>
-                <a:ext cx="2286005" cy="2286005"/>
-              </a:xfrm>
-              <a:prstGeom prst="rect">
-                <a:avLst/>
-              </a:prstGeom>
-            </p:spPr>
-          </p:pic>
-          <p:grpSp>
-            <p:nvGrpSpPr>
-              <p:cNvPr id="78" name="Group 77">
-                <a:extLst>
-                  <a:ext uri="{FF2B5EF4-FFF2-40B4-BE49-F238E27FC236}">
-                    <a16:creationId xmlns:a16="http://schemas.microsoft.com/office/drawing/2014/main" id="{7F8EFD37-BE90-7E11-694F-CE32549FB337}"/>
-                  </a:ext>
-                </a:extLst>
-              </p:cNvPr>
-              <p:cNvGrpSpPr/>
-              <p:nvPr/>
-            </p:nvGrpSpPr>
-            <p:grpSpPr>
-              <a:xfrm>
-                <a:off x="385943" y="301530"/>
-                <a:ext cx="1900052" cy="1790606"/>
-                <a:chOff x="385943" y="301530"/>
-                <a:chExt cx="1900052" cy="1790606"/>
-              </a:xfrm>
-            </p:grpSpPr>
-            <p:sp>
-              <p:nvSpPr>
-                <p:cNvPr id="79" name="Rectangle 78">
-                  <a:extLst>
-                    <a:ext uri="{FF2B5EF4-FFF2-40B4-BE49-F238E27FC236}">
-                      <a16:creationId xmlns:a16="http://schemas.microsoft.com/office/drawing/2014/main" id="{46B984FC-6679-16BA-F998-6047C13CC4EA}"/>
-                    </a:ext>
-                  </a:extLst>
-                </p:cNvPr>
-                <p:cNvSpPr/>
-                <p:nvPr/>
-              </p:nvSpPr>
-              <p:spPr>
-                <a:xfrm>
-                  <a:off x="385943" y="374464"/>
-                  <a:ext cx="1900052" cy="281049"/>
-                </a:xfrm>
-                <a:prstGeom prst="rect">
-                  <a:avLst/>
-                </a:prstGeom>
-                <a:noFill/>
-                <a:ln>
-                  <a:noFill/>
-                </a:ln>
-              </p:spPr>
-              <p:style>
-                <a:lnRef idx="2">
-                  <a:schemeClr val="accent1">
-                    <a:shade val="15000"/>
-                  </a:schemeClr>
-                </a:lnRef>
-                <a:fillRef idx="1">
-                  <a:schemeClr val="accent1"/>
-                </a:fillRef>
-                <a:effectRef idx="0">
-                  <a:schemeClr val="accent1"/>
-                </a:effectRef>
-                <a:fontRef idx="minor">
-                  <a:schemeClr val="lt1"/>
-                </a:fontRef>
-              </p:style>
-              <p:txBody>
-                <a:bodyPr rtlCol="0" anchor="ctr"/>
-                <a:lstStyle/>
-                <a:p>
-                  <a:pPr algn="ctr"/>
-                  <a:r>
-                    <a:rPr lang="en-US" sz="1000" b="1" dirty="0">
-                      <a:solidFill>
-                        <a:srgbClr val="178F92"/>
-                      </a:solidFill>
-                      <a:latin typeface="Arial" panose="020B0604020202020204" pitchFamily="34" charset="0"/>
-                      <a:cs typeface="Arial" panose="020B0604020202020204" pitchFamily="34" charset="0"/>
-                    </a:rPr>
-                    <a:t>loss of 7.8 species</a:t>
-                  </a:r>
-                </a:p>
-              </p:txBody>
-            </p:sp>
-            <p:cxnSp>
-              <p:nvCxnSpPr>
-                <p:cNvPr id="80" name="Straight Connector 79">
-                  <a:extLst>
-                    <a:ext uri="{FF2B5EF4-FFF2-40B4-BE49-F238E27FC236}">
-                      <a16:creationId xmlns:a16="http://schemas.microsoft.com/office/drawing/2014/main" id="{0BEAAE1C-875A-A949-C79F-BEAA10836FA2}"/>
-                    </a:ext>
-                  </a:extLst>
-                </p:cNvPr>
-                <p:cNvCxnSpPr>
-                  <a:cxnSpLocks/>
-                </p:cNvCxnSpPr>
-                <p:nvPr/>
-              </p:nvCxnSpPr>
-              <p:spPr>
-                <a:xfrm>
-                  <a:off x="598170" y="301530"/>
-                  <a:ext cx="544822" cy="146145"/>
-                </a:xfrm>
-                <a:prstGeom prst="line">
-                  <a:avLst/>
-                </a:prstGeom>
-                <a:ln w="6350">
-                  <a:solidFill>
-                    <a:schemeClr val="bg1">
-                      <a:lumMod val="65000"/>
-                    </a:schemeClr>
-                  </a:solidFill>
-                  <a:prstDash val="sysDash"/>
-                </a:ln>
-              </p:spPr>
-              <p:style>
-                <a:lnRef idx="2">
-                  <a:schemeClr val="accent1"/>
-                </a:lnRef>
-                <a:fillRef idx="0">
-                  <a:schemeClr val="accent1"/>
-                </a:fillRef>
-                <a:effectRef idx="1">
-                  <a:schemeClr val="accent1"/>
-                </a:effectRef>
-                <a:fontRef idx="minor">
-                  <a:schemeClr val="tx1"/>
-                </a:fontRef>
-              </p:style>
-            </p:cxnSp>
-            <p:cxnSp>
-              <p:nvCxnSpPr>
-                <p:cNvPr id="81" name="Straight Connector 80">
-                  <a:extLst>
-                    <a:ext uri="{FF2B5EF4-FFF2-40B4-BE49-F238E27FC236}">
-                      <a16:creationId xmlns:a16="http://schemas.microsoft.com/office/drawing/2014/main" id="{7FDD7380-2464-64C4-52F3-F5A4197E4B1E}"/>
-                    </a:ext>
-                  </a:extLst>
-                </p:cNvPr>
-                <p:cNvCxnSpPr>
-                  <a:cxnSpLocks/>
-                </p:cNvCxnSpPr>
-                <p:nvPr/>
-              </p:nvCxnSpPr>
-              <p:spPr>
-                <a:xfrm>
-                  <a:off x="1387475" y="600075"/>
-                  <a:ext cx="715645" cy="1312545"/>
-                </a:xfrm>
-                <a:prstGeom prst="line">
-                  <a:avLst/>
-                </a:prstGeom>
-                <a:ln w="6350">
-                  <a:solidFill>
-                    <a:schemeClr val="bg1">
-                      <a:lumMod val="65000"/>
-                    </a:schemeClr>
-                  </a:solidFill>
-                  <a:prstDash val="sysDash"/>
-                </a:ln>
-              </p:spPr>
-              <p:style>
-                <a:lnRef idx="2">
-                  <a:schemeClr val="accent1"/>
-                </a:lnRef>
-                <a:fillRef idx="0">
-                  <a:schemeClr val="accent1"/>
-                </a:fillRef>
-                <a:effectRef idx="1">
-                  <a:schemeClr val="accent1"/>
-                </a:effectRef>
-                <a:fontRef idx="minor">
-                  <a:schemeClr val="tx1"/>
-                </a:fontRef>
-              </p:style>
-            </p:cxnSp>
-            <p:sp>
-              <p:nvSpPr>
-                <p:cNvPr id="82" name="Rectangle 81">
-                  <a:extLst>
-                    <a:ext uri="{FF2B5EF4-FFF2-40B4-BE49-F238E27FC236}">
-                      <a16:creationId xmlns:a16="http://schemas.microsoft.com/office/drawing/2014/main" id="{BD19C6D8-BAA8-0600-F916-9455C8E77F38}"/>
-                    </a:ext>
-                  </a:extLst>
-                </p:cNvPr>
-                <p:cNvSpPr/>
-                <p:nvPr/>
-              </p:nvSpPr>
-              <p:spPr>
-                <a:xfrm>
-                  <a:off x="425639" y="1811087"/>
-                  <a:ext cx="831349" cy="281049"/>
-                </a:xfrm>
-                <a:prstGeom prst="rect">
-                  <a:avLst/>
-                </a:prstGeom>
-                <a:noFill/>
-                <a:ln>
-                  <a:noFill/>
-                </a:ln>
-              </p:spPr>
-              <p:style>
-                <a:lnRef idx="2">
-                  <a:schemeClr val="accent1">
-                    <a:shade val="15000"/>
-                  </a:schemeClr>
-                </a:lnRef>
-                <a:fillRef idx="1">
-                  <a:schemeClr val="accent1"/>
-                </a:fillRef>
-                <a:effectRef idx="0">
-                  <a:schemeClr val="accent1"/>
-                </a:effectRef>
-                <a:fontRef idx="minor">
-                  <a:schemeClr val="lt1"/>
-                </a:fontRef>
-              </p:style>
-              <p:txBody>
-                <a:bodyPr rtlCol="0" anchor="ctr"/>
-                <a:lstStyle/>
-                <a:p>
-                  <a:r>
-                    <a:rPr lang="en-US" sz="1000" b="1" dirty="0">
-                      <a:solidFill>
-                        <a:srgbClr val="AE8548"/>
-                      </a:solidFill>
-                      <a:latin typeface="Arial" panose="020B0604020202020204" pitchFamily="34" charset="0"/>
-                      <a:cs typeface="Arial" panose="020B0604020202020204" pitchFamily="34" charset="0"/>
-                    </a:rPr>
-                    <a:t>loss of 3.0 species</a:t>
-                  </a:r>
-                </a:p>
-              </p:txBody>
-            </p:sp>
-            <p:cxnSp>
-              <p:nvCxnSpPr>
-                <p:cNvPr id="83" name="Straight Connector 82">
-                  <a:extLst>
-                    <a:ext uri="{FF2B5EF4-FFF2-40B4-BE49-F238E27FC236}">
-                      <a16:creationId xmlns:a16="http://schemas.microsoft.com/office/drawing/2014/main" id="{CBFACCB6-88B2-E554-C0FD-47A50175A328}"/>
-                    </a:ext>
-                  </a:extLst>
-                </p:cNvPr>
-                <p:cNvCxnSpPr>
-                  <a:cxnSpLocks/>
-                </p:cNvCxnSpPr>
-                <p:nvPr/>
-              </p:nvCxnSpPr>
-              <p:spPr>
-                <a:xfrm>
-                  <a:off x="553088" y="1623525"/>
-                  <a:ext cx="0" cy="187562"/>
-                </a:xfrm>
-                <a:prstGeom prst="line">
-                  <a:avLst/>
-                </a:prstGeom>
-                <a:ln w="6350">
-                  <a:solidFill>
-                    <a:schemeClr val="bg1">
-                      <a:lumMod val="65000"/>
-                    </a:schemeClr>
-                  </a:solidFill>
-                  <a:prstDash val="sysDash"/>
-                </a:ln>
-              </p:spPr>
-              <p:style>
-                <a:lnRef idx="2">
-                  <a:schemeClr val="accent1"/>
-                </a:lnRef>
-                <a:fillRef idx="0">
-                  <a:schemeClr val="accent1"/>
-                </a:fillRef>
-                <a:effectRef idx="1">
-                  <a:schemeClr val="accent1"/>
-                </a:effectRef>
-                <a:fontRef idx="minor">
-                  <a:schemeClr val="tx1"/>
-                </a:fontRef>
-              </p:style>
-            </p:cxnSp>
-            <p:cxnSp>
-              <p:nvCxnSpPr>
-                <p:cNvPr id="84" name="Straight Connector 83">
-                  <a:extLst>
-                    <a:ext uri="{FF2B5EF4-FFF2-40B4-BE49-F238E27FC236}">
-                      <a16:creationId xmlns:a16="http://schemas.microsoft.com/office/drawing/2014/main" id="{5D51FCF1-A072-85AF-E0AC-EAA8924C2356}"/>
-                    </a:ext>
-                  </a:extLst>
-                </p:cNvPr>
-                <p:cNvCxnSpPr>
-                  <a:cxnSpLocks/>
-                </p:cNvCxnSpPr>
-                <p:nvPr/>
-              </p:nvCxnSpPr>
-              <p:spPr>
-                <a:xfrm flipH="1">
-                  <a:off x="1021556" y="2058737"/>
-                  <a:ext cx="1038066" cy="0"/>
-                </a:xfrm>
-                <a:prstGeom prst="line">
-                  <a:avLst/>
-                </a:prstGeom>
-                <a:ln w="6350">
-                  <a:solidFill>
-                    <a:schemeClr val="bg1">
-                      <a:lumMod val="65000"/>
-                    </a:schemeClr>
-                  </a:solidFill>
-                  <a:prstDash val="sysDash"/>
-                </a:ln>
-              </p:spPr>
-              <p:style>
-                <a:lnRef idx="2">
-                  <a:schemeClr val="accent1"/>
-                </a:lnRef>
-                <a:fillRef idx="0">
-                  <a:schemeClr val="accent1"/>
-                </a:fillRef>
-                <a:effectRef idx="1">
-                  <a:schemeClr val="accent1"/>
-                </a:effectRef>
-                <a:fontRef idx="minor">
-                  <a:schemeClr val="tx1"/>
-                </a:fontRef>
-              </p:style>
-            </p:cxnSp>
-          </p:grpSp>
-        </p:grpSp>
+            <a:prstGeom prst="rect">
+              <a:avLst/>
+            </a:prstGeom>
+          </p:spPr>
+        </p:pic>
+        <p:sp>
+          <p:nvSpPr>
+            <p:cNvPr id="190" name="Rectangle 189">
+              <a:extLst>
+                <a:ext uri="{FF2B5EF4-FFF2-40B4-BE49-F238E27FC236}">
+                  <a16:creationId xmlns:a16="http://schemas.microsoft.com/office/drawing/2014/main" id="{B52204DB-5774-19B6-A456-A966CE855586}"/>
+                </a:ext>
+              </a:extLst>
+            </p:cNvPr>
+            <p:cNvSpPr/>
+            <p:nvPr/>
+          </p:nvSpPr>
+          <p:spPr>
+            <a:xfrm>
+              <a:off x="2395728" y="45720"/>
+              <a:ext cx="2286000" cy="2286000"/>
+            </a:xfrm>
+            <a:prstGeom prst="rect">
+              <a:avLst/>
+            </a:prstGeom>
+            <a:solidFill>
+              <a:schemeClr val="accent1">
+                <a:alpha val="0"/>
+              </a:schemeClr>
+            </a:solidFill>
+            <a:ln w="6350">
+              <a:solidFill>
+                <a:schemeClr val="tx1"/>
+              </a:solidFill>
+            </a:ln>
+          </p:spPr>
+          <p:style>
+            <a:lnRef idx="2">
+              <a:schemeClr val="accent1">
+                <a:shade val="15000"/>
+              </a:schemeClr>
+            </a:lnRef>
+            <a:fillRef idx="1">
+              <a:schemeClr val="accent1"/>
+            </a:fillRef>
+            <a:effectRef idx="0">
+              <a:schemeClr val="accent1"/>
+            </a:effectRef>
+            <a:fontRef idx="minor">
+              <a:schemeClr val="lt1"/>
+            </a:fontRef>
+          </p:style>
+          <p:txBody>
+            <a:bodyPr rtlCol="0" anchor="ctr"/>
+            <a:lstStyle/>
+            <a:p>
+              <a:pPr algn="ctr"/>
+              <a:endParaRPr lang="en-US" b="1" dirty="0"/>
+            </a:p>
+          </p:txBody>
+        </p:sp>
         <p:grpSp>
           <p:nvGrpSpPr>
-            <p:cNvPr id="64" name="Group 63">
+            <p:cNvPr id="191" name="Group 190">
               <a:extLst>
                 <a:ext uri="{FF2B5EF4-FFF2-40B4-BE49-F238E27FC236}">
                   <a16:creationId xmlns:a16="http://schemas.microsoft.com/office/drawing/2014/main" id="{1F1221FE-96B6-2BC8-00DC-B1146062102A}"/>
@@ -3516,51 +4510,15 @@
           </p:nvGrpSpPr>
           <p:grpSpPr>
             <a:xfrm>
-              <a:off x="2285995" y="0"/>
-              <a:ext cx="2286005" cy="2286005"/>
-              <a:chOff x="2285995" y="228596"/>
-              <a:chExt cx="2286005" cy="2286005"/>
+              <a:off x="2909987" y="607790"/>
+              <a:ext cx="1591769" cy="1001147"/>
+              <a:chOff x="2909987" y="744946"/>
+              <a:chExt cx="1591769" cy="1001147"/>
             </a:xfrm>
           </p:grpSpPr>
-          <p:pic>
-            <p:nvPicPr>
-              <p:cNvPr id="72" name="Picture 71">
-                <a:extLst>
-                  <a:ext uri="{FF2B5EF4-FFF2-40B4-BE49-F238E27FC236}">
-                    <a16:creationId xmlns:a16="http://schemas.microsoft.com/office/drawing/2014/main" id="{D0FB048F-6D41-1CC3-ACF0-F1D81D1DCC3D}"/>
-                  </a:ext>
-                </a:extLst>
-              </p:cNvPr>
-              <p:cNvPicPr>
-                <a:picLocks noChangeAspect="1"/>
-              </p:cNvPicPr>
-              <p:nvPr/>
-            </p:nvPicPr>
-            <p:blipFill>
-              <a:blip r:embed="rId4">
-                <a:extLst>
-                  <a:ext uri="{28A0092B-C50C-407E-A947-70E740481C1C}">
-                    <a14:useLocalDpi xmlns:a14="http://schemas.microsoft.com/office/drawing/2010/main" val="0"/>
-                  </a:ext>
-                </a:extLst>
-              </a:blip>
-              <a:stretch>
-                <a:fillRect/>
-              </a:stretch>
-            </p:blipFill>
-            <p:spPr>
-              <a:xfrm>
-                <a:off x="2285995" y="228596"/>
-                <a:ext cx="2286005" cy="2286005"/>
-              </a:xfrm>
-              <a:prstGeom prst="rect">
-                <a:avLst/>
-              </a:prstGeom>
-            </p:spPr>
-          </p:pic>
           <p:sp>
             <p:nvSpPr>
-              <p:cNvPr id="73" name="Rectangle 72">
+              <p:cNvPr id="206" name="Rectangle 205">
                 <a:extLst>
                   <a:ext uri="{FF2B5EF4-FFF2-40B4-BE49-F238E27FC236}">
                     <a16:creationId xmlns:a16="http://schemas.microsoft.com/office/drawing/2014/main" id="{99F67F2C-5E11-C4CF-9D29-FC2BFC11A0CC}"/>
@@ -3572,7 +4530,7 @@
             </p:nvSpPr>
             <p:spPr>
               <a:xfrm rot="18288285">
-                <a:off x="2475797" y="1171796"/>
+                <a:off x="2553273" y="1101660"/>
                 <a:ext cx="904882" cy="191453"/>
               </a:xfrm>
               <a:prstGeom prst="rect">
@@ -3605,7 +4563,7 @@
               <a:p>
                 <a:pPr algn="ctr"/>
                 <a:r>
-                  <a:rPr lang="en-US" sz="900" dirty="0">
+                  <a:rPr lang="en-US" sz="900" b="1" dirty="0">
                     <a:solidFill>
                       <a:schemeClr val="tx1"/>
                     </a:solidFill>
@@ -3617,7 +4575,7 @@
           </p:sp>
           <p:cxnSp>
             <p:nvCxnSpPr>
-              <p:cNvPr id="74" name="Straight Arrow Connector 73">
+              <p:cNvPr id="207" name="Straight Arrow Connector 206">
                 <a:extLst>
                   <a:ext uri="{FF2B5EF4-FFF2-40B4-BE49-F238E27FC236}">
                     <a16:creationId xmlns:a16="http://schemas.microsoft.com/office/drawing/2014/main" id="{B3AC14C0-D495-739A-92A8-1DEB1A104595}"/>
@@ -3631,7 +4589,7 @@
             </p:nvCxnSpPr>
             <p:spPr>
               <a:xfrm>
-                <a:off x="2904167" y="1438276"/>
+                <a:off x="2980367" y="1444626"/>
                 <a:ext cx="0" cy="301467"/>
               </a:xfrm>
               <a:prstGeom prst="straightConnector1">
@@ -3661,7 +4619,7 @@
           </p:cxnSp>
           <p:sp>
             <p:nvSpPr>
-              <p:cNvPr id="75" name="Rectangle 74">
+              <p:cNvPr id="208" name="Rectangle 207">
                 <a:extLst>
                   <a:ext uri="{FF2B5EF4-FFF2-40B4-BE49-F238E27FC236}">
                     <a16:creationId xmlns:a16="http://schemas.microsoft.com/office/drawing/2014/main" id="{98D05FE3-5A7E-3100-EF73-242D8696E482}"/>
@@ -3673,8 +4631,8 @@
             </p:nvSpPr>
             <p:spPr>
               <a:xfrm rot="18288285">
-                <a:off x="3981809" y="1121932"/>
-                <a:ext cx="651383" cy="191453"/>
+                <a:off x="4063842" y="1101659"/>
+                <a:ext cx="684375" cy="191453"/>
               </a:xfrm>
               <a:prstGeom prst="rect">
                 <a:avLst/>
@@ -3706,7 +4664,7 @@
               <a:p>
                 <a:pPr algn="ctr"/>
                 <a:r>
-                  <a:rPr lang="en-US" sz="900" dirty="0">
+                  <a:rPr lang="en-US" sz="900" b="1" dirty="0">
                     <a:solidFill>
                       <a:schemeClr val="tx1"/>
                     </a:solidFill>
@@ -3717,304 +4675,524 @@
             </p:txBody>
           </p:sp>
         </p:grpSp>
-        <p:sp>
-          <p:nvSpPr>
-            <p:cNvPr id="65" name="Rectangle 64">
+        <p:grpSp>
+          <p:nvGrpSpPr>
+            <p:cNvPr id="192" name="Group 191">
               <a:extLst>
                 <a:ext uri="{FF2B5EF4-FFF2-40B4-BE49-F238E27FC236}">
-                  <a16:creationId xmlns:a16="http://schemas.microsoft.com/office/drawing/2014/main" id="{0E21E371-FCDF-D6DD-1C98-E7F1F5A31D7A}"/>
+                  <a16:creationId xmlns:a16="http://schemas.microsoft.com/office/drawing/2014/main" id="{1C89B2AC-E6F7-96B7-68B5-A9E882DEDB8C}"/>
                 </a:ext>
               </a:extLst>
             </p:cNvPr>
-            <p:cNvSpPr/>
+            <p:cNvGrpSpPr/>
             <p:nvPr/>
-          </p:nvSpPr>
-          <p:spPr>
+          </p:nvGrpSpPr>
+          <p:grpSpPr>
             <a:xfrm>
-              <a:off x="425639" y="2918966"/>
-              <a:ext cx="1053920" cy="281049"/>
+              <a:off x="45720" y="45720"/>
+              <a:ext cx="2287915" cy="2331725"/>
+              <a:chOff x="45720" y="45720"/>
+              <a:chExt cx="2287915" cy="2331725"/>
             </a:xfrm>
-            <a:prstGeom prst="rect">
-              <a:avLst/>
-            </a:prstGeom>
-            <a:noFill/>
-            <a:ln>
+          </p:grpSpPr>
+          <p:grpSp>
+            <p:nvGrpSpPr>
+              <p:cNvPr id="195" name="Group 194">
+                <a:extLst>
+                  <a:ext uri="{FF2B5EF4-FFF2-40B4-BE49-F238E27FC236}">
+                    <a16:creationId xmlns:a16="http://schemas.microsoft.com/office/drawing/2014/main" id="{A43BD0DF-851A-8C8D-5036-D3B915FE47D1}"/>
+                  </a:ext>
+                </a:extLst>
+              </p:cNvPr>
+              <p:cNvGrpSpPr/>
+              <p:nvPr/>
+            </p:nvGrpSpPr>
+            <p:grpSpPr>
+              <a:xfrm>
+                <a:off x="47630" y="91440"/>
+                <a:ext cx="2286005" cy="2286005"/>
+                <a:chOff x="0" y="228596"/>
+                <a:chExt cx="2286005" cy="2286005"/>
+              </a:xfrm>
+            </p:grpSpPr>
+            <p:pic>
+              <p:nvPicPr>
+                <p:cNvPr id="198" name="Picture 197">
+                  <a:extLst>
+                    <a:ext uri="{FF2B5EF4-FFF2-40B4-BE49-F238E27FC236}">
+                      <a16:creationId xmlns:a16="http://schemas.microsoft.com/office/drawing/2014/main" id="{59CD165E-F0F5-1AE0-AEC4-DC0A9FCA3A5C}"/>
+                    </a:ext>
+                  </a:extLst>
+                </p:cNvPr>
+                <p:cNvPicPr>
+                  <a:picLocks noChangeAspect="1"/>
+                </p:cNvPicPr>
+                <p:nvPr/>
+              </p:nvPicPr>
+              <p:blipFill>
+                <a:blip r:embed="rId4">
+                  <a:extLst>
+                    <a:ext uri="{28A0092B-C50C-407E-A947-70E740481C1C}">
+                      <a14:useLocalDpi xmlns:a14="http://schemas.microsoft.com/office/drawing/2010/main" val="0"/>
+                    </a:ext>
+                  </a:extLst>
+                </a:blip>
+                <a:stretch>
+                  <a:fillRect/>
+                </a:stretch>
+              </p:blipFill>
+              <p:spPr>
+                <a:xfrm>
+                  <a:off x="0" y="228596"/>
+                  <a:ext cx="2286005" cy="2286005"/>
+                </a:xfrm>
+                <a:prstGeom prst="rect">
+                  <a:avLst/>
+                </a:prstGeom>
+              </p:spPr>
+            </p:pic>
+            <p:grpSp>
+              <p:nvGrpSpPr>
+                <p:cNvPr id="199" name="Group 198">
+                  <a:extLst>
+                    <a:ext uri="{FF2B5EF4-FFF2-40B4-BE49-F238E27FC236}">
+                      <a16:creationId xmlns:a16="http://schemas.microsoft.com/office/drawing/2014/main" id="{7F8EFD37-BE90-7E11-694F-CE32549FB337}"/>
+                    </a:ext>
+                  </a:extLst>
+                </p:cNvPr>
+                <p:cNvGrpSpPr/>
+                <p:nvPr/>
+              </p:nvGrpSpPr>
+              <p:grpSpPr>
+                <a:xfrm>
+                  <a:off x="385943" y="301530"/>
+                  <a:ext cx="1900052" cy="1790606"/>
+                  <a:chOff x="385943" y="301530"/>
+                  <a:chExt cx="1900052" cy="1790606"/>
+                </a:xfrm>
+              </p:grpSpPr>
+              <p:sp>
+                <p:nvSpPr>
+                  <p:cNvPr id="200" name="Rectangle 199">
+                    <a:extLst>
+                      <a:ext uri="{FF2B5EF4-FFF2-40B4-BE49-F238E27FC236}">
+                        <a16:creationId xmlns:a16="http://schemas.microsoft.com/office/drawing/2014/main" id="{46B984FC-6679-16BA-F998-6047C13CC4EA}"/>
+                      </a:ext>
+                    </a:extLst>
+                  </p:cNvPr>
+                  <p:cNvSpPr/>
+                  <p:nvPr/>
+                </p:nvSpPr>
+                <p:spPr>
+                  <a:xfrm>
+                    <a:off x="385943" y="374464"/>
+                    <a:ext cx="1900052" cy="281049"/>
+                  </a:xfrm>
+                  <a:prstGeom prst="rect">
+                    <a:avLst/>
+                  </a:prstGeom>
+                  <a:noFill/>
+                  <a:ln>
+                    <a:noFill/>
+                  </a:ln>
+                </p:spPr>
+                <p:style>
+                  <a:lnRef idx="2">
+                    <a:schemeClr val="accent1">
+                      <a:shade val="15000"/>
+                    </a:schemeClr>
+                  </a:lnRef>
+                  <a:fillRef idx="1">
+                    <a:schemeClr val="accent1"/>
+                  </a:fillRef>
+                  <a:effectRef idx="0">
+                    <a:schemeClr val="accent1"/>
+                  </a:effectRef>
+                  <a:fontRef idx="minor">
+                    <a:schemeClr val="lt1"/>
+                  </a:fontRef>
+                </p:style>
+                <p:txBody>
+                  <a:bodyPr rtlCol="0" anchor="ctr"/>
+                  <a:lstStyle/>
+                  <a:p>
+                    <a:pPr algn="ctr"/>
+                    <a:r>
+                      <a:rPr lang="en-US" sz="1000" b="1" dirty="0">
+                        <a:solidFill>
+                          <a:srgbClr val="178F92"/>
+                        </a:solidFill>
+                        <a:latin typeface="Arial" panose="020B0604020202020204" pitchFamily="34" charset="0"/>
+                        <a:cs typeface="Arial" panose="020B0604020202020204" pitchFamily="34" charset="0"/>
+                      </a:rPr>
+                      <a:t>loss of 7.8 species</a:t>
+                    </a:r>
+                  </a:p>
+                </p:txBody>
+              </p:sp>
+              <p:cxnSp>
+                <p:nvCxnSpPr>
+                  <p:cNvPr id="201" name="Straight Connector 200">
+                    <a:extLst>
+                      <a:ext uri="{FF2B5EF4-FFF2-40B4-BE49-F238E27FC236}">
+                        <a16:creationId xmlns:a16="http://schemas.microsoft.com/office/drawing/2014/main" id="{0BEAAE1C-875A-A949-C79F-BEAA10836FA2}"/>
+                      </a:ext>
+                    </a:extLst>
+                  </p:cNvPr>
+                  <p:cNvCxnSpPr>
+                    <a:cxnSpLocks/>
+                  </p:cNvCxnSpPr>
+                  <p:nvPr/>
+                </p:nvCxnSpPr>
+                <p:spPr>
+                  <a:xfrm>
+                    <a:off x="598170" y="301530"/>
+                    <a:ext cx="544822" cy="146145"/>
+                  </a:xfrm>
+                  <a:prstGeom prst="line">
+                    <a:avLst/>
+                  </a:prstGeom>
+                  <a:ln w="6350">
+                    <a:solidFill>
+                      <a:schemeClr val="bg1">
+                        <a:lumMod val="65000"/>
+                      </a:schemeClr>
+                    </a:solidFill>
+                    <a:prstDash val="sysDash"/>
+                  </a:ln>
+                </p:spPr>
+                <p:style>
+                  <a:lnRef idx="2">
+                    <a:schemeClr val="accent1"/>
+                  </a:lnRef>
+                  <a:fillRef idx="0">
+                    <a:schemeClr val="accent1"/>
+                  </a:fillRef>
+                  <a:effectRef idx="1">
+                    <a:schemeClr val="accent1"/>
+                  </a:effectRef>
+                  <a:fontRef idx="minor">
+                    <a:schemeClr val="tx1"/>
+                  </a:fontRef>
+                </p:style>
+              </p:cxnSp>
+              <p:cxnSp>
+                <p:nvCxnSpPr>
+                  <p:cNvPr id="202" name="Straight Connector 201">
+                    <a:extLst>
+                      <a:ext uri="{FF2B5EF4-FFF2-40B4-BE49-F238E27FC236}">
+                        <a16:creationId xmlns:a16="http://schemas.microsoft.com/office/drawing/2014/main" id="{7FDD7380-2464-64C4-52F3-F5A4197E4B1E}"/>
+                      </a:ext>
+                    </a:extLst>
+                  </p:cNvPr>
+                  <p:cNvCxnSpPr>
+                    <a:cxnSpLocks/>
+                  </p:cNvCxnSpPr>
+                  <p:nvPr/>
+                </p:nvCxnSpPr>
+                <p:spPr>
+                  <a:xfrm>
+                    <a:off x="1387475" y="600075"/>
+                    <a:ext cx="715645" cy="1312545"/>
+                  </a:xfrm>
+                  <a:prstGeom prst="line">
+                    <a:avLst/>
+                  </a:prstGeom>
+                  <a:ln w="6350">
+                    <a:solidFill>
+                      <a:schemeClr val="bg1">
+                        <a:lumMod val="65000"/>
+                      </a:schemeClr>
+                    </a:solidFill>
+                    <a:prstDash val="sysDash"/>
+                  </a:ln>
+                </p:spPr>
+                <p:style>
+                  <a:lnRef idx="2">
+                    <a:schemeClr val="accent1"/>
+                  </a:lnRef>
+                  <a:fillRef idx="0">
+                    <a:schemeClr val="accent1"/>
+                  </a:fillRef>
+                  <a:effectRef idx="1">
+                    <a:schemeClr val="accent1"/>
+                  </a:effectRef>
+                  <a:fontRef idx="minor">
+                    <a:schemeClr val="tx1"/>
+                  </a:fontRef>
+                </p:style>
+              </p:cxnSp>
+              <p:sp>
+                <p:nvSpPr>
+                  <p:cNvPr id="203" name="Rectangle 202">
+                    <a:extLst>
+                      <a:ext uri="{FF2B5EF4-FFF2-40B4-BE49-F238E27FC236}">
+                        <a16:creationId xmlns:a16="http://schemas.microsoft.com/office/drawing/2014/main" id="{BD19C6D8-BAA8-0600-F916-9455C8E77F38}"/>
+                      </a:ext>
+                    </a:extLst>
+                  </p:cNvPr>
+                  <p:cNvSpPr/>
+                  <p:nvPr/>
+                </p:nvSpPr>
+                <p:spPr>
+                  <a:xfrm>
+                    <a:off x="425639" y="1811087"/>
+                    <a:ext cx="831349" cy="281049"/>
+                  </a:xfrm>
+                  <a:prstGeom prst="rect">
+                    <a:avLst/>
+                  </a:prstGeom>
+                  <a:noFill/>
+                  <a:ln>
+                    <a:noFill/>
+                  </a:ln>
+                </p:spPr>
+                <p:style>
+                  <a:lnRef idx="2">
+                    <a:schemeClr val="accent1">
+                      <a:shade val="15000"/>
+                    </a:schemeClr>
+                  </a:lnRef>
+                  <a:fillRef idx="1">
+                    <a:schemeClr val="accent1"/>
+                  </a:fillRef>
+                  <a:effectRef idx="0">
+                    <a:schemeClr val="accent1"/>
+                  </a:effectRef>
+                  <a:fontRef idx="minor">
+                    <a:schemeClr val="lt1"/>
+                  </a:fontRef>
+                </p:style>
+                <p:txBody>
+                  <a:bodyPr rtlCol="0" anchor="ctr"/>
+                  <a:lstStyle/>
+                  <a:p>
+                    <a:r>
+                      <a:rPr lang="en-US" sz="1000" b="1" dirty="0">
+                        <a:solidFill>
+                          <a:srgbClr val="AE8548"/>
+                        </a:solidFill>
+                        <a:latin typeface="Arial" panose="020B0604020202020204" pitchFamily="34" charset="0"/>
+                        <a:cs typeface="Arial" panose="020B0604020202020204" pitchFamily="34" charset="0"/>
+                      </a:rPr>
+                      <a:t>loss of 3.0 species</a:t>
+                    </a:r>
+                  </a:p>
+                </p:txBody>
+              </p:sp>
+              <p:cxnSp>
+                <p:nvCxnSpPr>
+                  <p:cNvPr id="204" name="Straight Connector 203">
+                    <a:extLst>
+                      <a:ext uri="{FF2B5EF4-FFF2-40B4-BE49-F238E27FC236}">
+                        <a16:creationId xmlns:a16="http://schemas.microsoft.com/office/drawing/2014/main" id="{CBFACCB6-88B2-E554-C0FD-47A50175A328}"/>
+                      </a:ext>
+                    </a:extLst>
+                  </p:cNvPr>
+                  <p:cNvCxnSpPr>
+                    <a:cxnSpLocks/>
+                  </p:cNvCxnSpPr>
+                  <p:nvPr/>
+                </p:nvCxnSpPr>
+                <p:spPr>
+                  <a:xfrm>
+                    <a:off x="553088" y="1623525"/>
+                    <a:ext cx="0" cy="187562"/>
+                  </a:xfrm>
+                  <a:prstGeom prst="line">
+                    <a:avLst/>
+                  </a:prstGeom>
+                  <a:ln w="6350">
+                    <a:solidFill>
+                      <a:schemeClr val="bg1">
+                        <a:lumMod val="65000"/>
+                      </a:schemeClr>
+                    </a:solidFill>
+                    <a:prstDash val="sysDash"/>
+                  </a:ln>
+                </p:spPr>
+                <p:style>
+                  <a:lnRef idx="2">
+                    <a:schemeClr val="accent1"/>
+                  </a:lnRef>
+                  <a:fillRef idx="0">
+                    <a:schemeClr val="accent1"/>
+                  </a:fillRef>
+                  <a:effectRef idx="1">
+                    <a:schemeClr val="accent1"/>
+                  </a:effectRef>
+                  <a:fontRef idx="minor">
+                    <a:schemeClr val="tx1"/>
+                  </a:fontRef>
+                </p:style>
+              </p:cxnSp>
+              <p:cxnSp>
+                <p:nvCxnSpPr>
+                  <p:cNvPr id="205" name="Straight Connector 204">
+                    <a:extLst>
+                      <a:ext uri="{FF2B5EF4-FFF2-40B4-BE49-F238E27FC236}">
+                        <a16:creationId xmlns:a16="http://schemas.microsoft.com/office/drawing/2014/main" id="{5D51FCF1-A072-85AF-E0AC-EAA8924C2356}"/>
+                      </a:ext>
+                    </a:extLst>
+                  </p:cNvPr>
+                  <p:cNvCxnSpPr>
+                    <a:cxnSpLocks/>
+                  </p:cNvCxnSpPr>
+                  <p:nvPr/>
+                </p:nvCxnSpPr>
+                <p:spPr>
+                  <a:xfrm flipH="1">
+                    <a:off x="1021556" y="2058737"/>
+                    <a:ext cx="1038066" cy="0"/>
+                  </a:xfrm>
+                  <a:prstGeom prst="line">
+                    <a:avLst/>
+                  </a:prstGeom>
+                  <a:ln w="6350">
+                    <a:solidFill>
+                      <a:schemeClr val="bg1">
+                        <a:lumMod val="65000"/>
+                      </a:schemeClr>
+                    </a:solidFill>
+                    <a:prstDash val="sysDash"/>
+                  </a:ln>
+                </p:spPr>
+                <p:style>
+                  <a:lnRef idx="2">
+                    <a:schemeClr val="accent1"/>
+                  </a:lnRef>
+                  <a:fillRef idx="0">
+                    <a:schemeClr val="accent1"/>
+                  </a:fillRef>
+                  <a:effectRef idx="1">
+                    <a:schemeClr val="accent1"/>
+                  </a:effectRef>
+                  <a:fontRef idx="minor">
+                    <a:schemeClr val="tx1"/>
+                  </a:fontRef>
+                </p:style>
+              </p:cxnSp>
+            </p:grpSp>
+          </p:grpSp>
+          <p:sp>
+            <p:nvSpPr>
+              <p:cNvPr id="196" name="Rectangle 195">
+                <a:extLst>
+                  <a:ext uri="{FF2B5EF4-FFF2-40B4-BE49-F238E27FC236}">
+                    <a16:creationId xmlns:a16="http://schemas.microsoft.com/office/drawing/2014/main" id="{B1B04EBE-5177-3EF3-22C1-E20EB28AD32E}"/>
+                  </a:ext>
+                </a:extLst>
+              </p:cNvPr>
+              <p:cNvSpPr/>
+              <p:nvPr/>
+            </p:nvSpPr>
+            <p:spPr>
+              <a:xfrm>
+                <a:off x="45720" y="45720"/>
+                <a:ext cx="2286005" cy="2286005"/>
+              </a:xfrm>
+              <a:prstGeom prst="rect">
+                <a:avLst/>
+              </a:prstGeom>
+              <a:solidFill>
+                <a:schemeClr val="accent1">
+                  <a:alpha val="0"/>
+                </a:schemeClr>
+              </a:solidFill>
+              <a:ln w="6350">
+                <a:solidFill>
+                  <a:schemeClr val="tx1"/>
+                </a:solidFill>
+              </a:ln>
+            </p:spPr>
+            <p:style>
+              <a:lnRef idx="2">
+                <a:schemeClr val="accent1">
+                  <a:shade val="15000"/>
+                </a:schemeClr>
+              </a:lnRef>
+              <a:fillRef idx="1">
+                <a:schemeClr val="accent1"/>
+              </a:fillRef>
+              <a:effectRef idx="0">
+                <a:schemeClr val="accent1"/>
+              </a:effectRef>
+              <a:fontRef idx="minor">
+                <a:schemeClr val="lt1"/>
+              </a:fontRef>
+            </p:style>
+            <p:txBody>
+              <a:bodyPr rtlCol="0" anchor="ctr"/>
+              <a:lstStyle/>
+              <a:p>
+                <a:pPr algn="ctr"/>
+                <a:endParaRPr lang="en-US" b="1" dirty="0"/>
+              </a:p>
+            </p:txBody>
+          </p:sp>
+          <p:sp>
+            <p:nvSpPr>
+              <p:cNvPr id="197" name="Rectangle 196">
+                <a:extLst>
+                  <a:ext uri="{FF2B5EF4-FFF2-40B4-BE49-F238E27FC236}">
+                    <a16:creationId xmlns:a16="http://schemas.microsoft.com/office/drawing/2014/main" id="{9BD73756-49EC-4CB5-0C3A-7D0370512674}"/>
+                  </a:ext>
+                </a:extLst>
+              </p:cNvPr>
+              <p:cNvSpPr/>
+              <p:nvPr/>
+            </p:nvSpPr>
+            <p:spPr>
+              <a:xfrm>
+                <a:off x="69250" y="83609"/>
+                <a:ext cx="131297" cy="152639"/>
+              </a:xfrm>
+              <a:prstGeom prst="rect">
+                <a:avLst/>
+              </a:prstGeom>
               <a:noFill/>
-            </a:ln>
-          </p:spPr>
-          <p:style>
-            <a:lnRef idx="2">
-              <a:schemeClr val="accent1">
-                <a:shade val="15000"/>
-              </a:schemeClr>
-            </a:lnRef>
-            <a:fillRef idx="1">
-              <a:schemeClr val="accent1"/>
-            </a:fillRef>
-            <a:effectRef idx="0">
-              <a:schemeClr val="accent1"/>
-            </a:effectRef>
-            <a:fontRef idx="minor">
-              <a:schemeClr val="lt1"/>
-            </a:fontRef>
-          </p:style>
-          <p:txBody>
-            <a:bodyPr rtlCol="0" anchor="ctr"/>
-            <a:lstStyle/>
-            <a:p>
-              <a:pPr algn="ctr"/>
-              <a:r>
-                <a:rPr lang="en-US" sz="1000" b="1" dirty="0">
-                  <a:solidFill>
-                    <a:srgbClr val="178F92"/>
-                  </a:solidFill>
-                  <a:latin typeface="Arial" panose="020B0604020202020204" pitchFamily="34" charset="0"/>
-                  <a:cs typeface="Arial" panose="020B0604020202020204" pitchFamily="34" charset="0"/>
-                </a:rPr>
-                <a:t>loss of 7.3 species</a:t>
-              </a:r>
-            </a:p>
-          </p:txBody>
-        </p:sp>
+              <a:ln>
+                <a:noFill/>
+              </a:ln>
+            </p:spPr>
+            <p:style>
+              <a:lnRef idx="2">
+                <a:schemeClr val="accent1">
+                  <a:shade val="15000"/>
+                </a:schemeClr>
+              </a:lnRef>
+              <a:fillRef idx="1">
+                <a:schemeClr val="accent1"/>
+              </a:fillRef>
+              <a:effectRef idx="0">
+                <a:schemeClr val="accent1"/>
+              </a:effectRef>
+              <a:fontRef idx="minor">
+                <a:schemeClr val="lt1"/>
+              </a:fontRef>
+            </p:style>
+            <p:txBody>
+              <a:bodyPr rtlCol="0" anchor="ctr"/>
+              <a:lstStyle/>
+              <a:p>
+                <a:pPr algn="ctr"/>
+                <a:r>
+                  <a:rPr lang="en-US" sz="900" b="1" dirty="0">
+                    <a:solidFill>
+                      <a:schemeClr val="tx1"/>
+                    </a:solidFill>
+                    <a:latin typeface="Arial" panose="020B0604020202020204" pitchFamily="34" charset="0"/>
+                    <a:cs typeface="Arial" panose="020B0604020202020204" pitchFamily="34" charset="0"/>
+                  </a:rPr>
+                  <a:t>A</a:t>
+                </a:r>
+              </a:p>
+            </p:txBody>
+          </p:sp>
+        </p:grpSp>
         <p:sp>
           <p:nvSpPr>
-            <p:cNvPr id="66" name="Rectangle 65">
-              <a:extLst>
-                <a:ext uri="{FF2B5EF4-FFF2-40B4-BE49-F238E27FC236}">
-                  <a16:creationId xmlns:a16="http://schemas.microsoft.com/office/drawing/2014/main" id="{FA78D632-3EF5-EEF3-7773-0DBAF07DFB00}"/>
-                </a:ext>
-              </a:extLst>
-            </p:cNvPr>
-            <p:cNvSpPr/>
-            <p:nvPr/>
-          </p:nvSpPr>
-          <p:spPr>
-            <a:xfrm>
-              <a:off x="486669" y="3727965"/>
-              <a:ext cx="1053920" cy="281049"/>
-            </a:xfrm>
-            <a:prstGeom prst="rect">
-              <a:avLst/>
-            </a:prstGeom>
-            <a:noFill/>
-            <a:ln>
-              <a:noFill/>
-            </a:ln>
-          </p:spPr>
-          <p:style>
-            <a:lnRef idx="2">
-              <a:schemeClr val="accent1">
-                <a:shade val="15000"/>
-              </a:schemeClr>
-            </a:lnRef>
-            <a:fillRef idx="1">
-              <a:schemeClr val="accent1"/>
-            </a:fillRef>
-            <a:effectRef idx="0">
-              <a:schemeClr val="accent1"/>
-            </a:effectRef>
-            <a:fontRef idx="minor">
-              <a:schemeClr val="lt1"/>
-            </a:fontRef>
-          </p:style>
-          <p:txBody>
-            <a:bodyPr rtlCol="0" anchor="ctr"/>
-            <a:lstStyle/>
-            <a:p>
-              <a:pPr algn="ctr"/>
-              <a:r>
-                <a:rPr lang="en-US" sz="1000" b="1" dirty="0">
-                  <a:solidFill>
-                    <a:srgbClr val="AE8548"/>
-                  </a:solidFill>
-                  <a:latin typeface="Arial" panose="020B0604020202020204" pitchFamily="34" charset="0"/>
-                  <a:cs typeface="Arial" panose="020B0604020202020204" pitchFamily="34" charset="0"/>
-                </a:rPr>
-                <a:t>loss of 1.4 species</a:t>
-              </a:r>
-            </a:p>
-          </p:txBody>
-        </p:sp>
-        <p:sp>
-          <p:nvSpPr>
-            <p:cNvPr id="67" name="Rectangle 66">
-              <a:extLst>
-                <a:ext uri="{FF2B5EF4-FFF2-40B4-BE49-F238E27FC236}">
-                  <a16:creationId xmlns:a16="http://schemas.microsoft.com/office/drawing/2014/main" id="{7CBB6A18-4C62-1FE0-A525-041D9CDDC471}"/>
-                </a:ext>
-              </a:extLst>
-            </p:cNvPr>
-            <p:cNvSpPr/>
-            <p:nvPr/>
-          </p:nvSpPr>
-          <p:spPr>
-            <a:xfrm>
-              <a:off x="2593432" y="3884859"/>
-              <a:ext cx="1053920" cy="281049"/>
-            </a:xfrm>
-            <a:prstGeom prst="rect">
-              <a:avLst/>
-            </a:prstGeom>
-            <a:noFill/>
-            <a:ln>
-              <a:noFill/>
-            </a:ln>
-          </p:spPr>
-          <p:style>
-            <a:lnRef idx="2">
-              <a:schemeClr val="accent1">
-                <a:shade val="15000"/>
-              </a:schemeClr>
-            </a:lnRef>
-            <a:fillRef idx="1">
-              <a:schemeClr val="accent1"/>
-            </a:fillRef>
-            <a:effectRef idx="0">
-              <a:schemeClr val="accent1"/>
-            </a:effectRef>
-            <a:fontRef idx="minor">
-              <a:schemeClr val="lt1"/>
-            </a:fontRef>
-          </p:style>
-          <p:txBody>
-            <a:bodyPr rtlCol="0" anchor="ctr"/>
-            <a:lstStyle/>
-            <a:p>
-              <a:pPr algn="ctr"/>
-              <a:r>
-                <a:rPr lang="en-US" sz="1000" b="1" dirty="0">
-                  <a:solidFill>
-                    <a:srgbClr val="AE8548"/>
-                  </a:solidFill>
-                  <a:latin typeface="Arial" panose="020B0604020202020204" pitchFamily="34" charset="0"/>
-                  <a:cs typeface="Arial" panose="020B0604020202020204" pitchFamily="34" charset="0"/>
-                </a:rPr>
-                <a:t>loss of 0.5 species</a:t>
-              </a:r>
-            </a:p>
-          </p:txBody>
-        </p:sp>
-        <p:sp>
-          <p:nvSpPr>
-            <p:cNvPr id="68" name="Rectangle 67">
-              <a:extLst>
-                <a:ext uri="{FF2B5EF4-FFF2-40B4-BE49-F238E27FC236}">
-                  <a16:creationId xmlns:a16="http://schemas.microsoft.com/office/drawing/2014/main" id="{088BCC8B-8957-7602-4A3E-ED17B6473B46}"/>
-                </a:ext>
-              </a:extLst>
-            </p:cNvPr>
-            <p:cNvSpPr/>
-            <p:nvPr/>
-          </p:nvSpPr>
-          <p:spPr>
-            <a:xfrm>
-              <a:off x="3342560" y="3586137"/>
-              <a:ext cx="1053920" cy="281049"/>
-            </a:xfrm>
-            <a:prstGeom prst="rect">
-              <a:avLst/>
-            </a:prstGeom>
-            <a:noFill/>
-            <a:ln>
-              <a:noFill/>
-            </a:ln>
-          </p:spPr>
-          <p:style>
-            <a:lnRef idx="2">
-              <a:schemeClr val="accent1">
-                <a:shade val="15000"/>
-              </a:schemeClr>
-            </a:lnRef>
-            <a:fillRef idx="1">
-              <a:schemeClr val="accent1"/>
-            </a:fillRef>
-            <a:effectRef idx="0">
-              <a:schemeClr val="accent1"/>
-            </a:effectRef>
-            <a:fontRef idx="minor">
-              <a:schemeClr val="lt1"/>
-            </a:fontRef>
-          </p:style>
-          <p:txBody>
-            <a:bodyPr rtlCol="0" anchor="ctr"/>
-            <a:lstStyle/>
-            <a:p>
-              <a:pPr algn="ctr"/>
-              <a:r>
-                <a:rPr lang="en-US" sz="1000" b="1" dirty="0">
-                  <a:solidFill>
-                    <a:srgbClr val="178F92"/>
-                  </a:solidFill>
-                  <a:latin typeface="Arial" panose="020B0604020202020204" pitchFamily="34" charset="0"/>
-                  <a:cs typeface="Arial" panose="020B0604020202020204" pitchFamily="34" charset="0"/>
-                </a:rPr>
-                <a:t>loss of 0.4 species</a:t>
-              </a:r>
-            </a:p>
-          </p:txBody>
-        </p:sp>
-        <p:sp>
-          <p:nvSpPr>
-            <p:cNvPr id="69" name="Rectangle 68">
-              <a:extLst>
-                <a:ext uri="{FF2B5EF4-FFF2-40B4-BE49-F238E27FC236}">
-                  <a16:creationId xmlns:a16="http://schemas.microsoft.com/office/drawing/2014/main" id="{9BD73756-49EC-4CB5-0C3A-7D0370512674}"/>
-                </a:ext>
-              </a:extLst>
-            </p:cNvPr>
-            <p:cNvSpPr/>
-            <p:nvPr/>
-          </p:nvSpPr>
-          <p:spPr>
-            <a:xfrm>
-              <a:off x="45435" y="39798"/>
-              <a:ext cx="131297" cy="152639"/>
-            </a:xfrm>
-            <a:prstGeom prst="rect">
-              <a:avLst/>
-            </a:prstGeom>
-            <a:noFill/>
-            <a:ln>
-              <a:noFill/>
-            </a:ln>
-          </p:spPr>
-          <p:style>
-            <a:lnRef idx="2">
-              <a:schemeClr val="accent1">
-                <a:shade val="15000"/>
-              </a:schemeClr>
-            </a:lnRef>
-            <a:fillRef idx="1">
-              <a:schemeClr val="accent1"/>
-            </a:fillRef>
-            <a:effectRef idx="0">
-              <a:schemeClr val="accent1"/>
-            </a:effectRef>
-            <a:fontRef idx="minor">
-              <a:schemeClr val="lt1"/>
-            </a:fontRef>
-          </p:style>
-          <p:txBody>
-            <a:bodyPr rtlCol="0" anchor="ctr"/>
-            <a:lstStyle/>
-            <a:p>
-              <a:pPr algn="ctr"/>
-              <a:r>
-                <a:rPr lang="en-US" sz="900" b="1" dirty="0">
-                  <a:solidFill>
-                    <a:schemeClr val="tx1"/>
-                  </a:solidFill>
-                  <a:latin typeface="Arial" panose="020B0604020202020204" pitchFamily="34" charset="0"/>
-                  <a:cs typeface="Arial" panose="020B0604020202020204" pitchFamily="34" charset="0"/>
-                </a:rPr>
-                <a:t>A</a:t>
-              </a:r>
-            </a:p>
-          </p:txBody>
-        </p:sp>
-        <p:sp>
-          <p:nvSpPr>
-            <p:cNvPr id="70" name="Rectangle 69">
+            <p:cNvPr id="193" name="Rectangle 192">
               <a:extLst>
                 <a:ext uri="{FF2B5EF4-FFF2-40B4-BE49-F238E27FC236}">
                   <a16:creationId xmlns:a16="http://schemas.microsoft.com/office/drawing/2014/main" id="{BCD3D06E-CC25-1B46-9A17-26CAF8C93CF0}"/>
@@ -4026,7 +5204,7 @@
           </p:nvSpPr>
           <p:spPr>
             <a:xfrm>
-              <a:off x="2331440" y="39798"/>
+              <a:off x="2423160" y="82296"/>
               <a:ext cx="131297" cy="152639"/>
             </a:xfrm>
             <a:prstGeom prst="rect">
@@ -4073,10 +5251,10 @@
         </p:sp>
         <p:sp>
           <p:nvSpPr>
-            <p:cNvPr id="71" name="Rectangle 70">
+            <p:cNvPr id="194" name="Freeform: Shape 193">
               <a:extLst>
                 <a:ext uri="{FF2B5EF4-FFF2-40B4-BE49-F238E27FC236}">
-                  <a16:creationId xmlns:a16="http://schemas.microsoft.com/office/drawing/2014/main" id="{A61FF6A6-BDBA-7AD6-9D62-AD260FCC2F75}"/>
+                  <a16:creationId xmlns:a16="http://schemas.microsoft.com/office/drawing/2014/main" id="{D3A2D6DF-710B-3720-4C6D-BFC2B82C70D8}"/>
                 </a:ext>
               </a:extLst>
             </p:cNvPr>
@@ -4085,15 +5263,56 @@
           </p:nvSpPr>
           <p:spPr>
             <a:xfrm>
-              <a:off x="45434" y="2209679"/>
-              <a:ext cx="131297" cy="152639"/>
+              <a:off x="4328126" y="1202173"/>
+              <a:ext cx="198154" cy="378618"/>
             </a:xfrm>
-            <a:prstGeom prst="rect">
+            <a:custGeom>
               <a:avLst/>
-            </a:prstGeom>
+              <a:gdLst>
+                <a:gd name="csX0" fmla="*/ 0 w 198154"/>
+                <a:gd name="csY0" fmla="*/ 378618 h 378618"/>
+                <a:gd name="csX1" fmla="*/ 183357 w 198154"/>
+                <a:gd name="csY1" fmla="*/ 157162 h 378618"/>
+                <a:gd name="csX2" fmla="*/ 173832 w 198154"/>
+                <a:gd name="csY2" fmla="*/ 0 h 378618"/>
+              </a:gdLst>
+              <a:ahLst/>
+              <a:cxnLst>
+                <a:cxn ang="0">
+                  <a:pos x="csX0" y="csY0"/>
+                </a:cxn>
+                <a:cxn ang="0">
+                  <a:pos x="csX1" y="csY1"/>
+                </a:cxn>
+                <a:cxn ang="0">
+                  <a:pos x="csX2" y="csY2"/>
+                </a:cxn>
+              </a:cxnLst>
+              <a:rect l="l" t="t" r="r" b="b"/>
+              <a:pathLst>
+                <a:path w="198154" h="378618">
+                  <a:moveTo>
+                    <a:pt x="0" y="378618"/>
+                  </a:moveTo>
+                  <a:cubicBezTo>
+                    <a:pt x="77192" y="299441"/>
+                    <a:pt x="154385" y="220265"/>
+                    <a:pt x="183357" y="157162"/>
+                  </a:cubicBezTo>
+                  <a:cubicBezTo>
+                    <a:pt x="212329" y="94059"/>
+                    <a:pt x="193080" y="47029"/>
+                    <a:pt x="173832" y="0"/>
+                  </a:cubicBezTo>
+                </a:path>
+              </a:pathLst>
+            </a:custGeom>
             <a:noFill/>
             <a:ln>
-              <a:noFill/>
+              <a:solidFill>
+                <a:schemeClr val="tx1"/>
+              </a:solidFill>
+              <a:headEnd type="triangle"/>
             </a:ln>
           </p:spPr>
           <p:style>
@@ -4117,26 +5336,17 @@
             <a:lstStyle/>
             <a:p>
               <a:pPr algn="ctr"/>
-              <a:r>
-                <a:rPr lang="en-US" sz="900" b="1" dirty="0">
-                  <a:solidFill>
-                    <a:schemeClr val="tx1"/>
-                  </a:solidFill>
-                  <a:latin typeface="Arial" panose="020B0604020202020204" pitchFamily="34" charset="0"/>
-                  <a:cs typeface="Arial" panose="020B0604020202020204" pitchFamily="34" charset="0"/>
-                </a:rPr>
-                <a:t>C</a:t>
-              </a:r>
+              <a:endParaRPr lang="en-US" b="1"/>
             </a:p>
           </p:txBody>
         </p:sp>
       </p:grpSp>
       <p:sp>
         <p:nvSpPr>
-          <p:cNvPr id="4" name="Freeform: Shape 3">
+          <p:cNvPr id="209" name="Rectangle 208">
             <a:extLst>
               <a:ext uri="{FF2B5EF4-FFF2-40B4-BE49-F238E27FC236}">
-                <a16:creationId xmlns:a16="http://schemas.microsoft.com/office/drawing/2014/main" id="{D3A2D6DF-710B-3720-4C6D-BFC2B82C70D8}"/>
+                <a16:creationId xmlns:a16="http://schemas.microsoft.com/office/drawing/2014/main" id="{8E296CFF-F3FA-663B-CD2D-EFB2E0DD3E23}"/>
               </a:ext>
             </a:extLst>
           </p:cNvPr>
@@ -4145,56 +5355,21 @@
         </p:nvSpPr>
         <p:spPr>
           <a:xfrm>
-            <a:off x="4241006" y="1147763"/>
-            <a:ext cx="198154" cy="378618"/>
+            <a:off x="45436" y="2377441"/>
+            <a:ext cx="4636292" cy="2701438"/>
           </a:xfrm>
-          <a:custGeom>
+          <a:prstGeom prst="rect">
             <a:avLst/>
-            <a:gdLst>
-              <a:gd name="csX0" fmla="*/ 0 w 198154"/>
-              <a:gd name="csY0" fmla="*/ 378618 h 378618"/>
-              <a:gd name="csX1" fmla="*/ 183357 w 198154"/>
-              <a:gd name="csY1" fmla="*/ 157162 h 378618"/>
-              <a:gd name="csX2" fmla="*/ 173832 w 198154"/>
-              <a:gd name="csY2" fmla="*/ 0 h 378618"/>
-            </a:gdLst>
-            <a:ahLst/>
-            <a:cxnLst>
-              <a:cxn ang="0">
-                <a:pos x="csX0" y="csY0"/>
-              </a:cxn>
-              <a:cxn ang="0">
-                <a:pos x="csX1" y="csY1"/>
-              </a:cxn>
-              <a:cxn ang="0">
-                <a:pos x="csX2" y="csY2"/>
-              </a:cxn>
-            </a:cxnLst>
-            <a:rect l="l" t="t" r="r" b="b"/>
-            <a:pathLst>
-              <a:path w="198154" h="378618">
-                <a:moveTo>
-                  <a:pt x="0" y="378618"/>
-                </a:moveTo>
-                <a:cubicBezTo>
-                  <a:pt x="77192" y="299441"/>
-                  <a:pt x="154385" y="220265"/>
-                  <a:pt x="183357" y="157162"/>
-                </a:cubicBezTo>
-                <a:cubicBezTo>
-                  <a:pt x="212329" y="94059"/>
-                  <a:pt x="193080" y="47029"/>
-                  <a:pt x="173832" y="0"/>
-                </a:cubicBezTo>
-              </a:path>
-            </a:pathLst>
-          </a:custGeom>
-          <a:noFill/>
-          <a:ln>
+          </a:prstGeom>
+          <a:solidFill>
+            <a:schemeClr val="accent1">
+              <a:alpha val="0"/>
+            </a:schemeClr>
+          </a:solidFill>
+          <a:ln w="6350">
             <a:solidFill>
               <a:schemeClr val="tx1"/>
             </a:solidFill>
-            <a:headEnd type="triangle"/>
           </a:ln>
         </p:spPr>
         <p:style>
@@ -4218,7 +5393,7 @@
           <a:lstStyle/>
           <a:p>
             <a:pPr algn="ctr"/>
-            <a:endParaRPr lang="en-US"/>
+            <a:endParaRPr lang="en-US" b="1" dirty="0"/>
           </a:p>
         </p:txBody>
       </p:sp>
